--- a/IUEA_Teaching_Plan/decks/CML3111_Week11_Engineering.pptx
+++ b/IUEA_Teaching_Plan/decks/CML3111_Week11_Engineering.pptx
@@ -39,14 +39,13 @@
     <p:sldId xmlns:r="http://schemas.openxmlformats.org/officeDocument/2006/relationships" id="293" r:id="Rb9602ef0fd61472f"/>
     <p:sldId xmlns:ns0="http://schemas.openxmlformats.org/officeDocument/2006/relationships" id="309" ns0:id="rId59"/>
     <p:sldId xmlns:ns0="http://schemas.openxmlformats.org/officeDocument/2006/relationships" id="310" ns0:id="rId60"/>
+    <p:sldId xmlns:ns0="http://schemas.openxmlformats.org/officeDocument/2006/relationships" id="312" ns0:id="rId46"/>
     <p:sldId xmlns:r="http://schemas.openxmlformats.org/officeDocument/2006/relationships" id="298" r:id="R9a55b1843e07436f"/>
     <p:sldId xmlns:r="http://schemas.openxmlformats.org/officeDocument/2006/relationships" id="299" r:id="R20dae676eb194717"/>
     <p:sldId xmlns:r="http://schemas.openxmlformats.org/officeDocument/2006/relationships" id="300" r:id="R1c5787958563453e"/>
     <p:sldId xmlns:r="http://schemas.openxmlformats.org/officeDocument/2006/relationships" id="301" r:id="R86908e2e202f4e08"/>
-    <p:sldId xmlns:r="http://schemas.openxmlformats.org/officeDocument/2006/relationships" id="302" r:id="R21cfc854a3674544"/>
     <p:sldId xmlns:r="http://schemas.openxmlformats.org/officeDocument/2006/relationships" id="303" r:id="Rfc2c44586198438a"/>
     <p:sldId xmlns:ns0="http://schemas.openxmlformats.org/officeDocument/2006/relationships" id="311" ns0:id="rId61"/>
-    <p:sldId xmlns:r="http://schemas.openxmlformats.org/officeDocument/2006/relationships" id="304" r:id="Rf7c63ffe87424b16"/>
     <p:sldId xmlns:r="http://schemas.openxmlformats.org/officeDocument/2006/relationships" id="305" r:id="R823911cb26754962"/>
   </p:sldIdLst>
   <p:sldSz cx="12191695" cy="6858000"/>
@@ -2582,7 +2581,7 @@
 </file>
 
 <file path=ppt/notesSlides/notesSlide32.xml><?xml version="1.0" encoding="utf-8"?>
-<p:notes xmlns:p="http://schemas.openxmlformats.org/presentationml/2006/main">
+<p:notes xmlns:a="http://schemas.openxmlformats.org/drawingml/2006/main" xmlns:p="http://schemas.openxmlformats.org/presentationml/2006/main" xmlns:r="http://schemas.openxmlformats.org/officeDocument/2006/relationships">
   <p:cSld>
     <p:spTree>
       <p:nvGrpSpPr>
@@ -2591,16 +2590,21 @@
         <p:nvPr/>
       </p:nvGrpSpPr>
       <p:grpSpPr>
-        <a:xfrm xmlns:a="http://schemas.openxmlformats.org/drawingml/2006/main"/>
+        <a:xfrm>
+          <a:off x="0" y="0"/>
+          <a:ext cx="0" cy="0"/>
+          <a:chOff x="0" y="0"/>
+          <a:chExt cx="0" cy="0"/>
+        </a:xfrm>
       </p:grpSpPr>
       <p:sp>
         <p:nvSpPr>
           <p:cNvPr id="2" name="Slide Image Placeholder 1"/>
           <p:cNvSpPr>
-            <a:spLocks xmlns:a="http://schemas.openxmlformats.org/drawingml/2006/main" noGrp="1"/>
+            <a:spLocks noGrp="1"/>
           </p:cNvSpPr>
           <p:nvPr>
-            <p:ph type="sldImg" idx="0"/>
+            <p:ph type="sldImg" idx="2"/>
           </p:nvPr>
         </p:nvSpPr>
         <p:spPr/>
@@ -2609,31 +2613,37 @@
         <p:nvSpPr>
           <p:cNvPr id="3" name="Notes Placeholder 2"/>
           <p:cNvSpPr>
-            <a:spLocks xmlns:a="http://schemas.openxmlformats.org/drawingml/2006/main" noGrp="1"/>
+            <a:spLocks noGrp="1"/>
           </p:cNvSpPr>
           <p:nvPr>
-            <p:ph type="body" idx="1"/>
+            <p:ph type="body" idx="3" sz="quarter"/>
           </p:nvPr>
         </p:nvSpPr>
         <p:spPr/>
         <p:txBody>
-          <a:bodyPr xmlns:a="http://schemas.openxmlformats.org/drawingml/2006/main"/>
-          <a:lstStyle xmlns:a="http://schemas.openxmlformats.org/drawingml/2006/main"/>
-          <a:p xmlns:a="http://schemas.openxmlformats.org/drawingml/2006/main">
-            <a:r>
-              <a:t>This slide states your task for this week. You are investigating motor temperature, and its unit is deg C. Say the target and the unit exactly as they appear on the slide.</a:t>
-            </a:r>
-          </a:p>
-          <a:p xmlns:a="http://schemas.openxmlformats.org/drawingml/2006/main"/>
-          <a:p xmlns:a="http://schemas.openxmlformats.org/drawingml/2006/main">
-            <a:r>
-              <a:t>Each row of the data is one operating observation. The equipment_id column repeats, because the same machine is observed many times. The record_id column is the identifier of each observation. The load_pct column is the load in percent, and ambient_c is the surrounding temperature in degrees Celsius. In the training rows the target holds the known answer.</a:t>
-            </a:r>
-          </a:p>
-          <a:p xmlns:a="http://schemas.openxmlformats.org/drawingml/2006/main"/>
-          <a:p xmlns:a="http://schemas.openxmlformats.org/drawingml/2006/main">
-            <a:r>
-              <a:t>These are synthetic teaching records, made up for learning. They are not measurements that could be used to operate real equipment, and the relationships we find in them are not calibrated physical laws.</a:t>
+          <a:bodyPr/>
+          <a:lstStyle/>
+          <a:p>
+            <a:r>
+              <a:t>From this week the weekly assignment and the weekly quiz stop. We now assess in blocks of three classes. Block 2 covers Weeks 11, 12 and 13: features and ablation; choosing a model; regularisation, nearest neighbours and reproducibility.</a:t>
+            </a:r>
+          </a:p>
+          <a:p/>
+          <a:p>
+            <a:r>
+              <a:t>Today's tasks are part A of the Block 2 assignment pack. It is worth 20 of the pack's 40 marks. The next part arrives in Week 12. Week 13 has no graded notebook, so its content is assessed in the Block 2 quiz and in your project.</a:t>
+            </a:r>
+          </a:p>
+          <a:p/>
+          <a:p>
+            <a:r>
+              <a:t>Nothing is submitted after today's class, and there is no quiz. We hand in all 2 parts together by Thursday 10 December at 23:59 Kampala time. The Block 2 quiz has fifteen questions, five from each week. It opens after the Week 13 class.</a:t>
+            </a:r>
+          </a:p>
+          <a:p/>
+          <a:p>
+            <a:r>
+              <a:t>Weeks 1 to 6 stay as they were. The two lowest weekly scores are dropped, and the block marks count in full, so the blocks carry about 60 percent of the quiz and assignment marks.</a:t>
             </a:r>
           </a:p>
         </p:txBody>
@@ -2642,23 +2652,18 @@
         <p:nvSpPr>
           <p:cNvPr id="4" name="Slide Number Placeholder 3"/>
           <p:cNvSpPr>
-            <a:spLocks xmlns:a="http://schemas.openxmlformats.org/drawingml/2006/main" noGrp="1"/>
+            <a:spLocks noGrp="1"/>
           </p:cNvSpPr>
           <p:nvPr>
-            <p:ph type="sldNum" idx="5"/>
+            <p:ph type="sldNum" idx="5" sz="quarter"/>
           </p:nvPr>
         </p:nvSpPr>
         <p:spPr/>
-        <p:txBody>
-          <a:bodyPr xmlns:a="http://schemas.openxmlformats.org/drawingml/2006/main"/>
-          <a:lstStyle xmlns:a="http://schemas.openxmlformats.org/drawingml/2006/main"/>
-          <a:p xmlns:a="http://schemas.openxmlformats.org/drawingml/2006/main"/>
-        </p:txBody>
       </p:sp>
     </p:spTree>
   </p:cSld>
   <p:clrMapOvr>
-    <a:masterClrMapping xmlns:a="http://schemas.openxmlformats.org/drawingml/2006/main"/>
+    <a:masterClrMapping/>
   </p:clrMapOvr>
 </p:notes>
 </file>
@@ -2703,31 +2708,19 @@
           <a:lstStyle xmlns:a="http://schemas.openxmlformats.org/drawingml/2006/main"/>
           <a:p xmlns:a="http://schemas.openxmlformats.org/drawingml/2006/main">
             <a:r>
-              <a:t>Your first required function is called make_features, and it takes one input, feature_records. Use the exact function name.</a:t>
+              <a:t>This slide states your task for this week. You are investigating motor temperature, and its unit is deg C. Say the target and the unit exactly as they appear on the slide.</a:t>
             </a:r>
           </a:p>
           <a:p xmlns:a="http://schemas.openxmlformats.org/drawingml/2006/main"/>
           <a:p xmlns:a="http://schemas.openxmlformats.org/drawingml/2006/main">
             <a:r>
-              <a:t>For each record it must return one row of four numbers, in this order. First comes load_pct itself. Second comes ambient_c itself. Third comes load_pct divided by 100. Fourth comes load_pct multiplied by ambient_c.</a:t>
+              <a:t>Each row of the data is one operating observation. The equipment_id column repeats, because the same machine is observed many times. The record_id column is the identifier of each observation. The load_pct column is the load in percent, and ambient_c is the surrounding temperature in degrees Celsius. In the training rows the target holds the known answer.</a:t>
             </a:r>
           </a:p>
           <a:p xmlns:a="http://schemas.openxmlformats.org/drawingml/2006/main"/>
           <a:p xmlns:a="http://schemas.openxmlformats.org/drawingml/2006/main">
             <a:r>
-              <a:t>The result holds one such row per input record, and the rows stay in the same order as the input.</a:t>
-            </a:r>
-          </a:p>
-          <a:p xmlns:a="http://schemas.openxmlformats.org/drawingml/2006/main"/>
-          <a:p xmlns:a="http://schemas.openxmlformats.org/drawingml/2006/main">
-            <a:r>
-              <a:t>Use only values that are available at the moment a prediction is requested. That means load and ambient temperature, and anything calculated from them. The target never goes into a feature.</a:t>
-            </a:r>
-          </a:p>
-          <a:p xmlns:a="http://schemas.openxmlformats.org/drawingml/2006/main"/>
-          <a:p xmlns:a="http://schemas.openxmlformats.org/drawingml/2006/main">
-            <a:r>
-              <a:t>Keep the exact names and the exact output order. Check the types and units against the task brief on your own issued task slide.</a:t>
+              <a:t>These are synthetic teaching records, made up for learning. They are not measurements that could be used to operate real equipment, and the relationships we find in them are not calibrated physical laws.</a:t>
             </a:r>
           </a:p>
         </p:txBody>
@@ -2797,37 +2790,31 @@
           <a:lstStyle xmlns:a="http://schemas.openxmlformats.org/drawingml/2006/main"/>
           <a:p xmlns:a="http://schemas.openxmlformats.org/drawingml/2006/main">
             <a:r>
-              <a:t>Your second required function is ablation_metrics. It receives training records and validation records.</a:t>
+              <a:t>Your first required function is called make_features, and it takes one input, feature_records. Use the exact function name.</a:t>
             </a:r>
           </a:p>
           <a:p xmlns:a="http://schemas.openxmlformats.org/drawingml/2006/main"/>
           <a:p xmlns:a="http://schemas.openxmlformats.org/drawingml/2006/main">
             <a:r>
-              <a:t>Inside it you fit two scikit-learn LinearRegression models on the same training records. The base model uses load_pct and ambient_c. The extended model uses those two and also load_pct multiplied by ambient_c.</a:t>
+              <a:t>For each record it must return one row of four numbers, in this order. First comes load_pct itself. Second comes ambient_c itself. Third comes load_pct divided by 100. Fourth comes load_pct multiplied by ambient_c.</a:t>
             </a:r>
           </a:p>
           <a:p xmlns:a="http://schemas.openxmlformats.org/drawingml/2006/main"/>
           <a:p xmlns:a="http://schemas.openxmlformats.org/drawingml/2006/main">
             <a:r>
-              <a:t>Then you evaluate both models on the same validation records, using mean absolute error.</a:t>
+              <a:t>The result holds one such row per input record, and the rows stay in the same order as the input.</a:t>
             </a:r>
           </a:p>
           <a:p xmlns:a="http://schemas.openxmlformats.org/drawingml/2006/main"/>
           <a:p xmlns:a="http://schemas.openxmlformats.org/drawingml/2006/main">
             <a:r>
-              <a:t>The function returns three values, base_mae, extended_mae and improvement. The improvement is base_mae minus extended_mae. Do not round any of them, because the grader compares the exact values.</a:t>
+              <a:t>Use only values that are available at the moment a prediction is requested. That means load and ambient temperature, and anything calculated from them. The target never goes into a feature.</a:t>
             </a:r>
           </a:p>
           <a:p xmlns:a="http://schemas.openxmlformats.org/drawingml/2006/main"/>
           <a:p xmlns:a="http://schemas.openxmlformats.org/drawingml/2006/main">
             <a:r>
-              <a:t>The inputs are complete, which means no values are missing, so you do not need an imputer here. And never fit on the validation targets. Validation rows are only for scoring the models.</a:t>
-            </a:r>
-          </a:p>
-          <a:p xmlns:a="http://schemas.openxmlformats.org/drawingml/2006/main"/>
-          <a:p xmlns:a="http://schemas.openxmlformats.org/drawingml/2006/main">
-            <a:r>
-              <a:t>Use the exact function name and the exact output names.</a:t>
+              <a:t>Keep the exact names and the exact output order. Check the types and units against the task brief on your own issued task slide.</a:t>
             </a:r>
           </a:p>
         </p:txBody>
@@ -2897,31 +2884,37 @@
           <a:lstStyle xmlns:a="http://schemas.openxmlformats.org/drawingml/2006/main"/>
           <a:p xmlns:a="http://schemas.openxmlformats.org/drawingml/2006/main">
             <a:r>
-              <a:t>Your notebook needs words as well as code. Find the cell headed My written evidence and write your answer there.</a:t>
+              <a:t>Your second required function is ablation_metrics. It receives training records and validation records.</a:t>
             </a:r>
           </a:p>
           <a:p xmlns:a="http://schemas.openxmlformats.org/drawingml/2006/main"/>
           <a:p xmlns:a="http://schemas.openxmlformats.org/drawingml/2006/main">
             <a:r>
-              <a:t>Explain the scenario we supplied in your own words. Say what the target is and give its unit, which is deg C. Then give your reasons for the choices you made, and state the limitations of what you found.</a:t>
+              <a:t>Inside it you fit two scikit-learn LinearRegression models on the same training records. The base model uses load_pct and ambient_c. The extended model uses those two and also load_pct multiplied by ambient_c.</a:t>
             </a:r>
           </a:p>
           <a:p xmlns:a="http://schemas.openxmlformats.org/drawingml/2006/main"/>
           <a:p xmlns:a="http://schemas.openxmlformats.org/drawingml/2006/main">
             <a:r>
-              <a:t>A good explanation links a decision to a result. For example, you might say why the imputer takes its medians from the training rows only, and what that protects you from.</a:t>
+              <a:t>Then you evaluate both models on the same validation records, using mean absolute error.</a:t>
             </a:r>
           </a:p>
           <a:p xmlns:a="http://schemas.openxmlformats.org/drawingml/2006/main"/>
           <a:p xmlns:a="http://schemas.openxmlformats.org/drawingml/2006/main">
             <a:r>
-              <a:t>The figures in the scenario came with it, so describe them as supplied and not as measurements you made yourself.</a:t>
+              <a:t>The function returns three values, base_mae, extended_mae and improvement. The improvement is base_mae minus extended_mae. Do not round any of them, because the grader compares the exact values.</a:t>
             </a:r>
           </a:p>
           <a:p xmlns:a="http://schemas.openxmlformats.org/drawingml/2006/main"/>
           <a:p xmlns:a="http://schemas.openxmlformats.org/drawingml/2006/main">
             <a:r>
-              <a:t>Submit one complete notebook that contains both your code and your written evidence. Copied prompts and code comments do not replace your own reasoning.</a:t>
+              <a:t>The inputs are complete, which means no values are missing, so you do not need an imputer here. And never fit on the validation targets. Validation rows are only for scoring the models.</a:t>
+            </a:r>
+          </a:p>
+          <a:p xmlns:a="http://schemas.openxmlformats.org/drawingml/2006/main"/>
+          <a:p xmlns:a="http://schemas.openxmlformats.org/drawingml/2006/main">
+            <a:r>
+              <a:t>Use the exact function name and the exact output names.</a:t>
             </a:r>
           </a:p>
         </p:txBody>
@@ -2991,31 +2984,31 @@
           <a:lstStyle xmlns:a="http://schemas.openxmlformats.org/drawingml/2006/main"/>
           <a:p xmlns:a="http://schemas.openxmlformats.org/drawingml/2006/main">
             <a:r>
-              <a:t>This slide covers the submission of your Week 11 assignment. Read the opening time and the deadline on the slide, and check them again on the form itself before you submit.</a:t>
+              <a:t>Your notebook needs words as well as code. Find the cell headed My written evidence and write your answer there.</a:t>
             </a:r>
           </a:p>
           <a:p xmlns:a="http://schemas.openxmlformats.org/drawingml/2006/main"/>
           <a:p xmlns:a="http://schemas.openxmlformats.org/drawingml/2006/main">
             <a:r>
-              <a:t>The form asks for your full Student Registration Number. Type it exactly, because this is how we match your work to you.</a:t>
+              <a:t>Explain the scenario we supplied in your own words. Say what the target is and give its unit, which is deg C. Then give your reasons for the choices you made, and state the limitations of what you found.</a:t>
             </a:r>
           </a:p>
           <a:p xmlns:a="http://schemas.openxmlformats.org/drawingml/2006/main"/>
           <a:p xmlns:a="http://schemas.openxmlformats.org/drawingml/2006/main">
             <a:r>
-              <a:t>The file to submit is one completed notebook, with the dot ipynb ending. When you upload it, wait until the filename appears on the form before pressing Submit.</a:t>
+              <a:t>A good explanation links a decision to a result. For example, you might say why the imputer takes its medians from the training rows only, and what that protects you from.</a:t>
             </a:r>
           </a:p>
           <a:p xmlns:a="http://schemas.openxmlformats.org/drawingml/2006/main"/>
           <a:p xmlns:a="http://schemas.openxmlformats.org/drawingml/2006/main">
             <a:r>
-              <a:t>A notebook saved only in Drive or GitHub has not been submitted. Only the form counts.</a:t>
+              <a:t>The figures in the scenario came with it, so describe them as supplied and not as measurements you made yourself.</a:t>
             </a:r>
           </a:p>
           <a:p xmlns:a="http://schemas.openxmlformats.org/drawingml/2006/main"/>
           <a:p xmlns:a="http://schemas.openxmlformats.org/drawingml/2006/main">
             <a:r>
-              <a:t>Keep the submitted file and the confirmation after you finish, as your evidence that you submitted.</a:t>
+              <a:t>The code and the written evidence for this part go in one complete notebook, and that notebook goes into the Block 2 pack. Copied prompts and code comments do not replace your own reasoning.</a:t>
             </a:r>
           </a:p>
         </p:txBody>
@@ -3243,25 +3236,31 @@
           <a:lstStyle xmlns:a="http://schemas.openxmlformats.org/drawingml/2006/main"/>
           <a:p xmlns:a="http://schemas.openxmlformats.org/drawingml/2006/main">
             <a:r>
-              <a:t>This slide is about the Week 11 quiz. You answer it on your own.</a:t>
+              <a:t>We finish with a check you do on your own. Pick a classmate, or imagine one, and explain three things out loud.</a:t>
             </a:r>
           </a:p>
           <a:p xmlns:a="http://schemas.openxmlformats.org/drawingml/2006/main"/>
           <a:p xmlns:a="http://schemas.openxmlformats.org/drawingml/2006/main">
             <a:r>
-              <a:t>The quiz opens when the lecturer activates it, and from that moment it stays open for 24 hours. Check the closing time that is announced for your class.</a:t>
+              <a:t>First, why load divided by 100 is a derived feature. Second, how you decide whether to keep a new feature. Third, why a repair note written after a fault cannot be used as an input.</a:t>
             </a:r>
           </a:p>
           <a:p xmlns:a="http://schemas.openxmlformats.org/drawingml/2006/main"/>
           <a:p xmlns:a="http://schemas.openxmlformats.org/drawingml/2006/main">
             <a:r>
-              <a:t>When you fill in the form, use your Student Registration Number and your registered account. Using a different account can make your answers difficult to match to you.</a:t>
+              <a:t>If you can explain these three clearly, you understood the lesson. If you get stuck, go back to the slide where that idea appeared.</a:t>
             </a:r>
           </a:p>
           <a:p xmlns:a="http://schemas.openxmlformats.org/drawingml/2006/main"/>
           <a:p xmlns:a="http://schemas.openxmlformats.org/drawingml/2006/main">
             <a:r>
-              <a:t>The link on the slide opens the response form. The link alone does not start the 24 hours. That starts when the lecturer activates the quiz, so wait for that announcement and then answer.</a:t>
+              <a:t>Before you hand in your notebooks, keep the raw data unchanged, then restart your notebook and run all cells from the top. If the notebook runs cleanly to the end, it is ready.</a:t>
+            </a:r>
+          </a:p>
+          <a:p xmlns:a="http://schemas.openxmlformats.org/drawingml/2006/main"/>
+          <a:p xmlns:a="http://schemas.openxmlformats.org/drawingml/2006/main">
+            <a:r>
+              <a:t>Point to your evidence, and save your work.</a:t>
             </a:r>
           </a:p>
         </p:txBody>
@@ -3350,100 +3349,6 @@
           <a:p xmlns:a="http://schemas.openxmlformats.org/drawingml/2006/main">
             <a:r>
               <a:t>Run the cells in the order the slides show them, because each cell uses names created by the one before. We never edit the original CSV. It stays as the untouched record, and every change we make happens on copies inside Python.</a:t>
-            </a:r>
-          </a:p>
-        </p:txBody>
-      </p:sp>
-      <p:sp>
-        <p:nvSpPr>
-          <p:cNvPr id="4" name="Slide Number Placeholder 3"/>
-          <p:cNvSpPr>
-            <a:spLocks xmlns:a="http://schemas.openxmlformats.org/drawingml/2006/main" noGrp="1"/>
-          </p:cNvSpPr>
-          <p:nvPr>
-            <p:ph type="sldNum" idx="5"/>
-          </p:nvPr>
-        </p:nvSpPr>
-        <p:spPr/>
-        <p:txBody>
-          <a:bodyPr xmlns:a="http://schemas.openxmlformats.org/drawingml/2006/main"/>
-          <a:lstStyle xmlns:a="http://schemas.openxmlformats.org/drawingml/2006/main"/>
-          <a:p xmlns:a="http://schemas.openxmlformats.org/drawingml/2006/main"/>
-        </p:txBody>
-      </p:sp>
-    </p:spTree>
-  </p:cSld>
-  <p:clrMapOvr>
-    <a:masterClrMapping xmlns:a="http://schemas.openxmlformats.org/drawingml/2006/main"/>
-  </p:clrMapOvr>
-</p:notes>
-</file>
-
-<file path=ppt/notesSlides/notesSlide40.xml><?xml version="1.0" encoding="utf-8"?>
-<p:notes xmlns:p="http://schemas.openxmlformats.org/presentationml/2006/main">
-  <p:cSld>
-    <p:spTree>
-      <p:nvGrpSpPr>
-        <p:cNvPr id="1" name=""/>
-        <p:cNvGrpSpPr/>
-        <p:nvPr/>
-      </p:nvGrpSpPr>
-      <p:grpSpPr>
-        <a:xfrm xmlns:a="http://schemas.openxmlformats.org/drawingml/2006/main"/>
-      </p:grpSpPr>
-      <p:sp>
-        <p:nvSpPr>
-          <p:cNvPr id="2" name="Slide Image Placeholder 1"/>
-          <p:cNvSpPr>
-            <a:spLocks xmlns:a="http://schemas.openxmlformats.org/drawingml/2006/main" noGrp="1"/>
-          </p:cNvSpPr>
-          <p:nvPr>
-            <p:ph type="sldImg" idx="0"/>
-          </p:nvPr>
-        </p:nvSpPr>
-        <p:spPr/>
-      </p:sp>
-      <p:sp>
-        <p:nvSpPr>
-          <p:cNvPr id="3" name="Notes Placeholder 2"/>
-          <p:cNvSpPr>
-            <a:spLocks xmlns:a="http://schemas.openxmlformats.org/drawingml/2006/main" noGrp="1"/>
-          </p:cNvSpPr>
-          <p:nvPr>
-            <p:ph type="body" idx="1"/>
-          </p:nvPr>
-        </p:nvSpPr>
-        <p:spPr/>
-        <p:txBody>
-          <a:bodyPr xmlns:a="http://schemas.openxmlformats.org/drawingml/2006/main"/>
-          <a:lstStyle xmlns:a="http://schemas.openxmlformats.org/drawingml/2006/main"/>
-          <a:p xmlns:a="http://schemas.openxmlformats.org/drawingml/2006/main">
-            <a:r>
-              <a:t>We finish with a check you do on your own. Pick a classmate, or imagine one, and explain three things out loud.</a:t>
-            </a:r>
-          </a:p>
-          <a:p xmlns:a="http://schemas.openxmlformats.org/drawingml/2006/main"/>
-          <a:p xmlns:a="http://schemas.openxmlformats.org/drawingml/2006/main">
-            <a:r>
-              <a:t>First, why load divided by 100 is a derived feature. Second, how you decide whether to keep a new feature. Third, why a repair note written after a fault cannot be used as an input.</a:t>
-            </a:r>
-          </a:p>
-          <a:p xmlns:a="http://schemas.openxmlformats.org/drawingml/2006/main"/>
-          <a:p xmlns:a="http://schemas.openxmlformats.org/drawingml/2006/main">
-            <a:r>
-              <a:t>If you can explain these three clearly, you understood the lesson. If you get stuck, go back to the slide where that idea appeared.</a:t>
-            </a:r>
-          </a:p>
-          <a:p xmlns:a="http://schemas.openxmlformats.org/drawingml/2006/main"/>
-          <a:p xmlns:a="http://schemas.openxmlformats.org/drawingml/2006/main">
-            <a:r>
-              <a:t>Before you submit, keep the raw data unchanged, then restart your notebook and run all cells from the top. If the notebook runs cleanly to the end, it is ready.</a:t>
-            </a:r>
-          </a:p>
-          <a:p xmlns:a="http://schemas.openxmlformats.org/drawingml/2006/main"/>
-          <a:p xmlns:a="http://schemas.openxmlformats.org/drawingml/2006/main">
-            <a:r>
-              <a:t>Point to your evidence, and save your work.</a:t>
             </a:r>
           </a:p>
         </p:txBody>
@@ -17746,6 +17651,7 @@
           </a:p>
           <a:p xmlns:a="http://schemas.openxmlformats.org/drawingml/2006/main">
             <a:r>
+              <a:rPr/>
               <a:t/>
             </a:r>
           </a:p>
@@ -17774,6 +17680,7 @@
           </a:p>
           <a:p xmlns:a="http://schemas.openxmlformats.org/drawingml/2006/main">
             <a:r>
+              <a:rPr/>
               <a:t/>
             </a:r>
           </a:p>
@@ -19882,6 +19789,7 @@
           </a:p>
           <a:p xmlns:a="http://schemas.openxmlformats.org/drawingml/2006/main">
             <a:r>
+              <a:rPr/>
               <a:t/>
             </a:r>
           </a:p>
@@ -20907,7 +20815,7 @@
                 <a:ea typeface="Calibri"/>
                 <a:cs typeface="Calibri"/>
               </a:rPr>
-              <a:t>base_feature_columns: input columns for the simpler comparison pipeline.</a:t>
+              <a:t>Run the cell and read the output below it.</a:t>
             </a:r>
           </a:p>
         </p:txBody>
@@ -26241,7 +26149,7 @@
                 <a:ea typeface="Calibri"/>
                 <a:cs typeface="Calibri"/>
               </a:rPr>
-              <a:t>base_feature_columns: input columns for the simpler comparison pipeline.</a:t>
+              <a:t>Run the cell and read the output below it.</a:t>
             </a:r>
           </a:p>
         </p:txBody>
@@ -27378,7 +27286,7 @@
                 <a:ea typeface="Calibri"/>
                 <a:cs typeface="Calibri"/>
               </a:rPr>
-              <a:t>base_feature_columns: input columns for the simpler comparison pipeline.</a:t>
+              <a:t>Run the cell and read the output below it.</a:t>
             </a:r>
           </a:p>
         </p:txBody>
@@ -29134,6 +29042,339 @@
 </file>
 
 <file path=ppt/slides/slide32.xml><?xml version="1.0" encoding="utf-8"?>
+<p:sld xmlns:a="http://schemas.openxmlformats.org/drawingml/2006/main" xmlns:p="http://schemas.openxmlformats.org/presentationml/2006/main" xmlns:r="http://schemas.openxmlformats.org/officeDocument/2006/relationships">
+  <p:cSld>
+    <p:spTree>
+      <p:nvGrpSpPr>
+        <p:cNvPr id="1" name=""/>
+        <p:cNvGrpSpPr/>
+        <p:nvPr/>
+      </p:nvGrpSpPr>
+      <p:grpSpPr/>
+      <p:sp>
+        <p:nvSpPr>
+          <p:cNvPr id="2" name="Rectangle 1"/>
+          <p:cNvSpPr/>
+          <p:nvPr/>
+        </p:nvSpPr>
+        <p:spPr>
+          <a:xfrm>
+            <a:off x="0" y="0"/>
+            <a:ext cx="12192000" cy="1397000"/>
+          </a:xfrm>
+          <a:prstGeom prst="rect">
+            <a:avLst/>
+          </a:prstGeom>
+          <a:solidFill>
+            <a:srgbClr val="1C3144"/>
+          </a:solidFill>
+          <a:ln>
+            <a:noFill/>
+          </a:ln>
+          <a:effectLst/>
+        </p:spPr>
+        <p:style>
+          <a:lnRef idx="1">
+            <a:schemeClr val="accent1"/>
+          </a:lnRef>
+          <a:fillRef idx="3">
+            <a:schemeClr val="accent1"/>
+          </a:fillRef>
+          <a:effectRef idx="2">
+            <a:schemeClr val="accent1"/>
+          </a:effectRef>
+          <a:fontRef idx="minor">
+            <a:schemeClr val="lt1"/>
+          </a:fontRef>
+        </p:style>
+        <p:txBody>
+          <a:bodyPr rtlCol="0" anchor="ctr"/>
+          <a:lstStyle/>
+          <a:p>
+            <a:pPr algn="ctr"/>
+          </a:p>
+        </p:txBody>
+      </p:sp>
+      <p:sp>
+        <p:nvSpPr>
+          <p:cNvPr id="3" name="TextBox 2"/>
+          <p:cNvSpPr txBox="1"/>
+          <p:nvPr/>
+        </p:nvSpPr>
+        <p:spPr>
+          <a:xfrm>
+            <a:off x="584200" y="177800"/>
+            <a:ext cx="11049000" cy="279400"/>
+          </a:xfrm>
+          <a:prstGeom prst="rect">
+            <a:avLst/>
+          </a:prstGeom>
+          <a:noFill/>
+        </p:spPr>
+        <p:txBody>
+          <a:bodyPr wrap="square">
+            <a:spAutoFit/>
+          </a:bodyPr>
+          <a:lstStyle/>
+          <a:p>
+            <a:pPr>
+              <a:spcAft>
+                <a:spcPts val="0"/>
+              </a:spcAft>
+            </a:pPr>
+            <a:r>
+              <a:rPr sz="1500" b="1">
+                <a:solidFill>
+                  <a:srgbClr val="E4572E"/>
+                </a:solidFill>
+                <a:latin typeface="Calibri"/>
+              </a:rPr>
+              <a:t>ASSESSMENT</a:t>
+            </a:r>
+          </a:p>
+        </p:txBody>
+      </p:sp>
+      <p:sp>
+        <p:nvSpPr>
+          <p:cNvPr id="4" name="TextBox 3"/>
+          <p:cNvSpPr txBox="1"/>
+          <p:nvPr/>
+        </p:nvSpPr>
+        <p:spPr>
+          <a:xfrm>
+            <a:off x="584200" y="520700"/>
+            <a:ext cx="11049000" cy="812800"/>
+          </a:xfrm>
+          <a:prstGeom prst="rect">
+            <a:avLst/>
+          </a:prstGeom>
+          <a:noFill/>
+        </p:spPr>
+        <p:txBody>
+          <a:bodyPr wrap="square">
+            <a:spAutoFit/>
+          </a:bodyPr>
+          <a:lstStyle/>
+          <a:p>
+            <a:pPr>
+              <a:spcAft>
+                <a:spcPts val="0"/>
+              </a:spcAft>
+            </a:pPr>
+            <a:r>
+              <a:rPr sz="3150" b="1">
+                <a:solidFill>
+                  <a:srgbClr val="FFFFFF"/>
+                </a:solidFill>
+                <a:latin typeface="Calibri"/>
+              </a:rPr>
+              <a:t>Block 2: how Weeks 11, 12 and 13 are assessed</a:t>
+            </a:r>
+          </a:p>
+        </p:txBody>
+      </p:sp>
+      <p:sp>
+        <p:nvSpPr>
+          <p:cNvPr id="5" name="Rectangle 4"/>
+          <p:cNvSpPr/>
+          <p:nvPr/>
+        </p:nvSpPr>
+        <p:spPr>
+          <a:xfrm>
+            <a:off x="584200" y="1752600"/>
+            <a:ext cx="4470400" cy="4203700"/>
+          </a:xfrm>
+          <a:prstGeom prst="rect">
+            <a:avLst/>
+          </a:prstGeom>
+          <a:solidFill>
+            <a:srgbClr val="2E7D6F"/>
+          </a:solidFill>
+          <a:ln>
+            <a:noFill/>
+          </a:ln>
+          <a:effectLst/>
+        </p:spPr>
+        <p:style>
+          <a:lnRef idx="1">
+            <a:schemeClr val="accent1"/>
+          </a:lnRef>
+          <a:fillRef idx="3">
+            <a:schemeClr val="accent1"/>
+          </a:fillRef>
+          <a:effectRef idx="2">
+            <a:schemeClr val="accent1"/>
+          </a:effectRef>
+          <a:fontRef idx="minor">
+            <a:schemeClr val="lt1"/>
+          </a:fontRef>
+        </p:style>
+        <p:txBody>
+          <a:bodyPr rtlCol="0" anchor="ctr"/>
+          <a:lstStyle/>
+          <a:p>
+            <a:pPr algn="ctr"/>
+          </a:p>
+        </p:txBody>
+      </p:sp>
+      <p:sp>
+        <p:nvSpPr>
+          <p:cNvPr id="6" name="TextBox 5"/>
+          <p:cNvSpPr txBox="1"/>
+          <p:nvPr/>
+        </p:nvSpPr>
+        <p:spPr>
+          <a:xfrm>
+            <a:off x="863600" y="2032000"/>
+            <a:ext cx="3911600" cy="3683000"/>
+          </a:xfrm>
+          <a:prstGeom prst="rect">
+            <a:avLst/>
+          </a:prstGeom>
+          <a:noFill/>
+        </p:spPr>
+        <p:txBody>
+          <a:bodyPr wrap="square">
+            <a:spAutoFit/>
+          </a:bodyPr>
+          <a:lstStyle/>
+          <a:p>
+            <a:pPr>
+              <a:spcAft>
+                <a:spcPts val="0"/>
+              </a:spcAft>
+            </a:pPr>
+            <a:r>
+              <a:rPr sz="2600" b="1">
+                <a:solidFill>
+                  <a:srgbClr val="FFFFFF"/>
+                </a:solidFill>
+                <a:latin typeface="Calibri"/>
+              </a:rPr>
+              <a:t>One assignment pack and one quiz for every three classes.</a:t>
+            </a:r>
+          </a:p>
+        </p:txBody>
+      </p:sp>
+      <p:sp>
+        <p:nvSpPr>
+          <p:cNvPr id="7" name="TextBox 6"/>
+          <p:cNvSpPr txBox="1"/>
+          <p:nvPr/>
+        </p:nvSpPr>
+        <p:spPr>
+          <a:xfrm>
+            <a:off x="5435600" y="1905000"/>
+            <a:ext cx="5969000" cy="3937000"/>
+          </a:xfrm>
+          <a:prstGeom prst="rect">
+            <a:avLst/>
+          </a:prstGeom>
+          <a:noFill/>
+        </p:spPr>
+        <p:txBody>
+          <a:bodyPr wrap="square">
+            <a:spAutoFit/>
+          </a:bodyPr>
+          <a:lstStyle/>
+          <a:p>
+            <a:pPr>
+              <a:spcAft>
+                <a:spcPts val="900"/>
+              </a:spcAft>
+            </a:pPr>
+            <a:r>
+              <a:rPr sz="2200" b="0">
+                <a:solidFill>
+                  <a:srgbClr val="1C3144"/>
+                </a:solidFill>
+                <a:latin typeface="Calibri"/>
+              </a:rPr>
+              <a:t>Today's tasks are part A of the Block 2 pack, worth 20 of its 40 marks. Week 13 has no graded notebook. It is assessed in the Block 2 quiz and in your project.</a:t>
+            </a:r>
+          </a:p>
+          <a:p>
+            <a:pPr>
+              <a:spcAft>
+                <a:spcPts val="900"/>
+              </a:spcAft>
+            </a:pPr>
+            <a:r>
+              <a:rPr sz="2200" b="0">
+                <a:solidFill>
+                  <a:srgbClr val="1C3144"/>
+                </a:solidFill>
+                <a:latin typeface="Calibri"/>
+              </a:rPr>
+              <a:t>Nothing is submitted and there is no quiz after today's class. You hand in all 2 parts together by Thursday 10 December 2026, 23:59 Kampala time.</a:t>
+            </a:r>
+          </a:p>
+          <a:p>
+            <a:pPr>
+              <a:spcAft>
+                <a:spcPts val="900"/>
+              </a:spcAft>
+            </a:pPr>
+            <a:r>
+              <a:rPr sz="2200" b="0">
+                <a:solidFill>
+                  <a:srgbClr val="1C3144"/>
+                </a:solidFill>
+                <a:latin typeface="Calibri"/>
+              </a:rPr>
+              <a:t>The Block 2 quiz has 15 questions, five from each of the three weeks. You sit it after the Week 13 class.</a:t>
+            </a:r>
+          </a:p>
+        </p:txBody>
+      </p:sp>
+      <p:sp>
+        <p:nvSpPr>
+          <p:cNvPr id="8" name="TextBox 7"/>
+          <p:cNvSpPr txBox="1"/>
+          <p:nvPr/>
+        </p:nvSpPr>
+        <p:spPr>
+          <a:xfrm>
+            <a:off x="584200" y="6524625"/>
+            <a:ext cx="10807700" cy="215900"/>
+          </a:xfrm>
+          <a:prstGeom prst="rect">
+            <a:avLst/>
+          </a:prstGeom>
+          <a:noFill/>
+        </p:spPr>
+        <p:txBody>
+          <a:bodyPr wrap="square">
+            <a:spAutoFit/>
+          </a:bodyPr>
+          <a:lstStyle/>
+          <a:p>
+            <a:pPr>
+              <a:spcAft>
+                <a:spcPts val="0"/>
+              </a:spcAft>
+            </a:pPr>
+            <a:r>
+              <a:rPr sz="1200" b="0">
+                <a:solidFill>
+                  <a:srgbClr val="6B7A8A"/>
+                </a:solidFill>
+                <a:latin typeface="Calibri"/>
+              </a:rPr>
+              <a:t>CML3111   Week 11   32</a:t>
+            </a:r>
+          </a:p>
+        </p:txBody>
+      </p:sp>
+    </p:spTree>
+  </p:cSld>
+  <p:clrMapOvr>
+    <a:masterClrMapping/>
+  </p:clrMapOvr>
+</p:sld>
+</file>
+
+<file path=ppt/slides/slide33.xml><?xml version="1.0" encoding="utf-8"?>
 <p:sld xmlns:p="http://schemas.openxmlformats.org/presentationml/2006/main">
   <p:cSld>
     <p:bg>
@@ -29339,7 +29580,7 @@
                 <a:ea typeface="Calibri"/>
                 <a:cs typeface="Calibri"/>
               </a:rPr>
-              <a:t>WHAT TO DO</a:t>
+              <a:t>BLOCK 2, PART A</a:t>
             </a:r>
           </a:p>
         </p:txBody>
@@ -30919,7 +31160,7 @@
                 <a:ea typeface="Calibri"/>
                 <a:cs typeface="Calibri"/>
               </a:rPr>
-              <a:t>CML3111   Week 11   32</a:t>
+              <a:t>CML3111   Week 11   33</a:t>
             </a:r>
           </a:p>
         </p:txBody>
@@ -30934,7 +31175,7 @@
 </p:sld>
 </file>
 
-<file path=ppt/slides/slide33.xml><?xml version="1.0" encoding="utf-8"?>
+<file path=ppt/slides/slide34.xml><?xml version="1.0" encoding="utf-8"?>
 <p:sld xmlns:p="http://schemas.openxmlformats.org/presentationml/2006/main">
   <p:cSld>
     <p:bg>
@@ -31140,7 +31381,7 @@
                 <a:ea typeface="Calibri"/>
                 <a:cs typeface="Calibri"/>
               </a:rPr>
-              <a:t>YOUR REQUIRED TASK</a:t>
+              <a:t>BLOCK 2, PART A</a:t>
             </a:r>
           </a:p>
         </p:txBody>
@@ -31495,6 +31736,7 @@
           </a:p>
           <a:p xmlns:a="http://schemas.openxmlformats.org/drawingml/2006/main">
             <a:r>
+              <a:rPr/>
               <a:t/>
             </a:r>
           </a:p>
@@ -31868,7 +32110,7 @@
                 <a:ea typeface="Calibri"/>
                 <a:cs typeface="Calibri"/>
               </a:rPr>
-              <a:t>CML3111   Week 11   33</a:t>
+              <a:t>CML3111   Week 11   34</a:t>
             </a:r>
           </a:p>
         </p:txBody>
@@ -31883,7 +32125,7 @@
 </p:sld>
 </file>
 
-<file path=ppt/slides/slide34.xml><?xml version="1.0" encoding="utf-8"?>
+<file path=ppt/slides/slide35.xml><?xml version="1.0" encoding="utf-8"?>
 <p:sld xmlns:p="http://schemas.openxmlformats.org/presentationml/2006/main">
   <p:cSld>
     <p:bg>
@@ -32089,7 +32331,7 @@
                 <a:ea typeface="Calibri"/>
                 <a:cs typeface="Calibri"/>
               </a:rPr>
-              <a:t>YOUR REQUIRED TASK</a:t>
+              <a:t>BLOCK 2, PART A</a:t>
             </a:r>
           </a:p>
         </p:txBody>
@@ -32444,6 +32686,7 @@
           </a:p>
           <a:p xmlns:a="http://schemas.openxmlformats.org/drawingml/2006/main">
             <a:r>
+              <a:rPr/>
               <a:t/>
             </a:r>
           </a:p>
@@ -32472,6 +32715,7 @@
           </a:p>
           <a:p xmlns:a="http://schemas.openxmlformats.org/drawingml/2006/main">
             <a:r>
+              <a:rPr/>
               <a:t/>
             </a:r>
           </a:p>
@@ -32500,6 +32744,7 @@
           </a:p>
           <a:p xmlns:a="http://schemas.openxmlformats.org/drawingml/2006/main">
             <a:r>
+              <a:rPr/>
               <a:t/>
             </a:r>
           </a:p>
@@ -32873,7 +33118,7 @@
                 <a:ea typeface="Calibri"/>
                 <a:cs typeface="Calibri"/>
               </a:rPr>
-              <a:t>CML3111   Week 11   34</a:t>
+              <a:t>CML3111   Week 11   35</a:t>
             </a:r>
           </a:p>
         </p:txBody>
@@ -32888,7 +33133,7 @@
 </p:sld>
 </file>
 
-<file path=ppt/slides/slide35.xml><?xml version="1.0" encoding="utf-8"?>
+<file path=ppt/slides/slide36.xml><?xml version="1.0" encoding="utf-8"?>
 <p:sld xmlns:p="http://schemas.openxmlformats.org/presentationml/2006/main">
   <p:cSld>
     <p:bg>
@@ -33094,7 +33339,7 @@
                 <a:ea typeface="Calibri"/>
                 <a:cs typeface="Calibri"/>
               </a:rPr>
-              <a:t>WHAT TO DO</a:t>
+              <a:t>BLOCK 2, PART A</a:t>
             </a:r>
           </a:p>
         </p:txBody>
@@ -34674,7 +34919,7 @@
                 <a:ea typeface="Calibri"/>
                 <a:cs typeface="Calibri"/>
               </a:rPr>
-              <a:t>CML3111   Week 11   35</a:t>
+              <a:t>CML3111   Week 11   36</a:t>
             </a:r>
           </a:p>
         </p:txBody>
@@ -34683,2158 +34928,6 @@
     <p:extLst>
       <p:ext uri="{BB962C8B-B14F-4D97-AF65-F5344CB8AC3E}">
         <p14:creationId xmlns:p14="http://schemas.microsoft.com/office/powerpoint/2010/main" val="1283042156"/>
-      </p:ext>
-    </p:extLst>
-  </p:cSld>
-</p:sld>
-</file>
-
-<file path=ppt/slides/slide36.xml><?xml version="1.0" encoding="utf-8"?>
-<p:sld xmlns:p="http://schemas.openxmlformats.org/presentationml/2006/main">
-  <p:cSld>
-    <p:bg>
-      <p:bgPr>
-        <a:solidFill xmlns:a="http://schemas.openxmlformats.org/drawingml/2006/main">
-          <a:srgbClr val="FFFFFF"/>
-        </a:solidFill>
-      </p:bgPr>
-    </p:bg>
-    <p:spTree>
-      <p:nvGrpSpPr>
-        <p:cNvPr id="1" name=""/>
-        <p:cNvGrpSpPr/>
-        <p:nvPr/>
-      </p:nvGrpSpPr>
-      <p:grpSpPr>
-        <a:xfrm xmlns:a="http://schemas.openxmlformats.org/drawingml/2006/main"/>
-      </p:grpSpPr>
-      <p:sp>
-        <p:nvSpPr>
-          <p:cNvPr id="16" name="">
-            <a:extLst xmlns:a="http://schemas.openxmlformats.org/drawingml/2006/main">
-              <a:ext uri="{FF2B5EF4-FFF2-40B4-BE49-F238E27FC236}">
-                <a16:creationId xmlns:a16="http://schemas.microsoft.com/office/drawing/2014/main" id="{1AEF2E90-A469-4A01-80D1-FCCBB64CC74C}"/>
-              </a:ext>
-            </a:extLst>
-          </p:cNvPr>
-          <p:cNvSpPr>
-            <a:spLocks xmlns:a="http://schemas.openxmlformats.org/drawingml/2006/main" noGrp="1"/>
-          </p:cNvSpPr>
-          <p:nvPr/>
-        </p:nvSpPr>
-        <p:spPr>
-          <a:xfrm xmlns:a="http://schemas.openxmlformats.org/drawingml/2006/main">
-            <a:off x="0" y="0"/>
-            <a:ext cx="12191695" cy="1390650"/>
-          </a:xfrm>
-          <a:prstGeom xmlns:a="http://schemas.openxmlformats.org/drawingml/2006/main" prst="rect">
-            <a:avLst/>
-          </a:prstGeom>
-          <a:solidFill xmlns:a="http://schemas.openxmlformats.org/drawingml/2006/main">
-            <a:srgbClr val="1C3144"/>
-          </a:solidFill>
-          <a:ln xmlns:a="http://schemas.openxmlformats.org/drawingml/2006/main" w="0">
-            <a:noFill/>
-          </a:ln>
-        </p:spPr>
-        <p:txBody xmlns:a="http://schemas.openxmlformats.org/drawingml/2006/main">
-          <a:bodyPr/>
-          <a:p/>
-        </p:txBody>
-      </p:sp>
-      <p:sp>
-        <p:nvSpPr>
-          <p:cNvPr id="2" name="">
-            <a:extLst xmlns:a="http://schemas.openxmlformats.org/drawingml/2006/main">
-              <a:ext uri="{FF2B5EF4-FFF2-40B4-BE49-F238E27FC236}">
-                <a16:creationId xmlns:a16="http://schemas.microsoft.com/office/drawing/2014/main" id="{E6C2BE7C-D89D-4DBC-83FE-67C6B3438AE9}"/>
-              </a:ext>
-            </a:extLst>
-          </p:cNvPr>
-          <p:cNvSpPr>
-            <a:spLocks xmlns:a="http://schemas.openxmlformats.org/drawingml/2006/main" noGrp="1"/>
-          </p:cNvSpPr>
-          <p:nvPr/>
-        </p:nvSpPr>
-        <p:spPr>
-          <a:xfrm xmlns:a="http://schemas.openxmlformats.org/drawingml/2006/main">
-            <a:off x="590550" y="180975"/>
-            <a:ext cx="11049000" cy="285750"/>
-          </a:xfrm>
-          <a:prstGeom xmlns:a="http://schemas.openxmlformats.org/drawingml/2006/main" prst="rect">
-            <a:avLst/>
-          </a:prstGeom>
-          <a:noFill xmlns:a="http://schemas.openxmlformats.org/drawingml/2006/main"/>
-          <a:ln xmlns:a="http://schemas.openxmlformats.org/drawingml/2006/main" w="0">
-            <a:noFill/>
-          </a:ln>
-        </p:spPr>
-        <p:txBody>
-          <a:bodyPr xmlns:a="http://schemas.openxmlformats.org/drawingml/2006/main">
-            <a:noAutofit/>
-          </a:bodyPr>
-          <a:lstStyle xmlns:a="http://schemas.openxmlformats.org/drawingml/2006/main">
-            <a:defPPr>
-              <a:defRPr sz="1500" b="1">
-                <a:solidFill>
-                  <a:srgbClr val="E4572E"/>
-                </a:solidFill>
-                <a:latin typeface="Calibri"/>
-                <a:ea typeface="Calibri"/>
-                <a:cs typeface="Calibri"/>
-              </a:defRPr>
-            </a:defPPr>
-            <a:lvl1pPr>
-              <a:defRPr sz="1500" b="1">
-                <a:solidFill>
-                  <a:srgbClr val="E4572E"/>
-                </a:solidFill>
-                <a:latin typeface="Calibri"/>
-                <a:ea typeface="Calibri"/>
-                <a:cs typeface="Calibri"/>
-              </a:defRPr>
-            </a:lvl1pPr>
-            <a:lvl2pPr>
-              <a:defRPr sz="1500" b="1">
-                <a:solidFill>
-                  <a:srgbClr val="E4572E"/>
-                </a:solidFill>
-                <a:latin typeface="Calibri"/>
-                <a:ea typeface="Calibri"/>
-                <a:cs typeface="Calibri"/>
-              </a:defRPr>
-            </a:lvl2pPr>
-            <a:lvl3pPr>
-              <a:defRPr sz="1500" b="1">
-                <a:solidFill>
-                  <a:srgbClr val="E4572E"/>
-                </a:solidFill>
-                <a:latin typeface="Calibri"/>
-                <a:ea typeface="Calibri"/>
-                <a:cs typeface="Calibri"/>
-              </a:defRPr>
-            </a:lvl3pPr>
-            <a:lvl4pPr>
-              <a:defRPr sz="1500" b="1">
-                <a:solidFill>
-                  <a:srgbClr val="E4572E"/>
-                </a:solidFill>
-                <a:latin typeface="Calibri"/>
-                <a:ea typeface="Calibri"/>
-                <a:cs typeface="Calibri"/>
-              </a:defRPr>
-            </a:lvl4pPr>
-            <a:lvl5pPr>
-              <a:defRPr sz="1500" b="1">
-                <a:solidFill>
-                  <a:srgbClr val="E4572E"/>
-                </a:solidFill>
-                <a:latin typeface="Calibri"/>
-                <a:ea typeface="Calibri"/>
-                <a:cs typeface="Calibri"/>
-              </a:defRPr>
-            </a:lvl5pPr>
-            <a:lvl6pPr>
-              <a:defRPr sz="1500" b="1">
-                <a:solidFill>
-                  <a:srgbClr val="E4572E"/>
-                </a:solidFill>
-                <a:latin typeface="Calibri"/>
-                <a:ea typeface="Calibri"/>
-                <a:cs typeface="Calibri"/>
-              </a:defRPr>
-            </a:lvl6pPr>
-            <a:lvl7pPr>
-              <a:defRPr sz="1500" b="1">
-                <a:solidFill>
-                  <a:srgbClr val="E4572E"/>
-                </a:solidFill>
-                <a:latin typeface="Calibri"/>
-                <a:ea typeface="Calibri"/>
-                <a:cs typeface="Calibri"/>
-              </a:defRPr>
-            </a:lvl7pPr>
-            <a:lvl8pPr>
-              <a:defRPr sz="1500" b="1">
-                <a:solidFill>
-                  <a:srgbClr val="E4572E"/>
-                </a:solidFill>
-                <a:latin typeface="Calibri"/>
-                <a:ea typeface="Calibri"/>
-                <a:cs typeface="Calibri"/>
-              </a:defRPr>
-            </a:lvl8pPr>
-            <a:lvl9pPr>
-              <a:defRPr sz="1500" b="1">
-                <a:solidFill>
-                  <a:srgbClr val="E4572E"/>
-                </a:solidFill>
-                <a:latin typeface="Calibri"/>
-                <a:ea typeface="Calibri"/>
-                <a:cs typeface="Calibri"/>
-              </a:defRPr>
-            </a:lvl9pPr>
-          </a:lstStyle>
-          <a:p xmlns:a="http://schemas.openxmlformats.org/drawingml/2006/main">
-            <a:pPr>
-              <a:defRPr sz="1500" b="1">
-                <a:solidFill>
-                  <a:srgbClr val="E4572E"/>
-                </a:solidFill>
-                <a:latin typeface="Calibri"/>
-                <a:ea typeface="Calibri"/>
-                <a:cs typeface="Calibri"/>
-              </a:defRPr>
-            </a:pPr>
-            <a:r>
-              <a:rPr sz="1500" b="1">
-                <a:solidFill>
-                  <a:srgbClr val="E4572E"/>
-                </a:solidFill>
-                <a:latin typeface="Calibri"/>
-                <a:ea typeface="Calibri"/>
-                <a:cs typeface="Calibri"/>
-              </a:rPr>
-              <a:t>ASSIGNMENT SUBMISSION</a:t>
-            </a:r>
-          </a:p>
-        </p:txBody>
-      </p:sp>
-      <p:sp>
-        <p:nvSpPr>
-          <p:cNvPr id="3" name="">
-            <a:extLst xmlns:a="http://schemas.openxmlformats.org/drawingml/2006/main">
-              <a:ext uri="{FF2B5EF4-FFF2-40B4-BE49-F238E27FC236}">
-                <a16:creationId xmlns:a16="http://schemas.microsoft.com/office/drawing/2014/main" id="{9C557DC7-ADD4-49BB-8E45-F8C77CEE49F2}"/>
-              </a:ext>
-            </a:extLst>
-          </p:cNvPr>
-          <p:cNvSpPr>
-            <a:spLocks xmlns:a="http://schemas.openxmlformats.org/drawingml/2006/main" noGrp="1"/>
-          </p:cNvSpPr>
-          <p:nvPr/>
-        </p:nvSpPr>
-        <p:spPr>
-          <a:xfrm xmlns:a="http://schemas.openxmlformats.org/drawingml/2006/main">
-            <a:off x="590550" y="523875"/>
-            <a:ext cx="11049000" cy="809625"/>
-          </a:xfrm>
-          <a:prstGeom xmlns:a="http://schemas.openxmlformats.org/drawingml/2006/main" prst="rect">
-            <a:avLst/>
-          </a:prstGeom>
-          <a:noFill xmlns:a="http://schemas.openxmlformats.org/drawingml/2006/main"/>
-          <a:ln xmlns:a="http://schemas.openxmlformats.org/drawingml/2006/main" w="0">
-            <a:noFill/>
-          </a:ln>
-        </p:spPr>
-        <p:txBody>
-          <a:bodyPr xmlns:a="http://schemas.openxmlformats.org/drawingml/2006/main">
-            <a:noAutofit/>
-          </a:bodyPr>
-          <a:lstStyle xmlns:a="http://schemas.openxmlformats.org/drawingml/2006/main">
-            <a:defPPr>
-              <a:defRPr sz="3150" b="1">
-                <a:solidFill>
-                  <a:srgbClr val="FFFFFF"/>
-                </a:solidFill>
-                <a:latin typeface="Calibri"/>
-                <a:ea typeface="Calibri"/>
-                <a:cs typeface="Calibri"/>
-              </a:defRPr>
-            </a:defPPr>
-            <a:lvl1pPr>
-              <a:defRPr sz="3150" b="1">
-                <a:solidFill>
-                  <a:srgbClr val="FFFFFF"/>
-                </a:solidFill>
-                <a:latin typeface="Calibri"/>
-                <a:ea typeface="Calibri"/>
-                <a:cs typeface="Calibri"/>
-              </a:defRPr>
-            </a:lvl1pPr>
-            <a:lvl2pPr>
-              <a:defRPr sz="3150" b="1">
-                <a:solidFill>
-                  <a:srgbClr val="FFFFFF"/>
-                </a:solidFill>
-                <a:latin typeface="Calibri"/>
-                <a:ea typeface="Calibri"/>
-                <a:cs typeface="Calibri"/>
-              </a:defRPr>
-            </a:lvl2pPr>
-            <a:lvl3pPr>
-              <a:defRPr sz="3150" b="1">
-                <a:solidFill>
-                  <a:srgbClr val="FFFFFF"/>
-                </a:solidFill>
-                <a:latin typeface="Calibri"/>
-                <a:ea typeface="Calibri"/>
-                <a:cs typeface="Calibri"/>
-              </a:defRPr>
-            </a:lvl3pPr>
-            <a:lvl4pPr>
-              <a:defRPr sz="3150" b="1">
-                <a:solidFill>
-                  <a:srgbClr val="FFFFFF"/>
-                </a:solidFill>
-                <a:latin typeface="Calibri"/>
-                <a:ea typeface="Calibri"/>
-                <a:cs typeface="Calibri"/>
-              </a:defRPr>
-            </a:lvl4pPr>
-            <a:lvl5pPr>
-              <a:defRPr sz="3150" b="1">
-                <a:solidFill>
-                  <a:srgbClr val="FFFFFF"/>
-                </a:solidFill>
-                <a:latin typeface="Calibri"/>
-                <a:ea typeface="Calibri"/>
-                <a:cs typeface="Calibri"/>
-              </a:defRPr>
-            </a:lvl5pPr>
-            <a:lvl6pPr>
-              <a:defRPr sz="3150" b="1">
-                <a:solidFill>
-                  <a:srgbClr val="FFFFFF"/>
-                </a:solidFill>
-                <a:latin typeface="Calibri"/>
-                <a:ea typeface="Calibri"/>
-                <a:cs typeface="Calibri"/>
-              </a:defRPr>
-            </a:lvl6pPr>
-            <a:lvl7pPr>
-              <a:defRPr sz="3150" b="1">
-                <a:solidFill>
-                  <a:srgbClr val="FFFFFF"/>
-                </a:solidFill>
-                <a:latin typeface="Calibri"/>
-                <a:ea typeface="Calibri"/>
-                <a:cs typeface="Calibri"/>
-              </a:defRPr>
-            </a:lvl7pPr>
-            <a:lvl8pPr>
-              <a:defRPr sz="3150" b="1">
-                <a:solidFill>
-                  <a:srgbClr val="FFFFFF"/>
-                </a:solidFill>
-                <a:latin typeface="Calibri"/>
-                <a:ea typeface="Calibri"/>
-                <a:cs typeface="Calibri"/>
-              </a:defRPr>
-            </a:lvl8pPr>
-            <a:lvl9pPr>
-              <a:defRPr sz="3150" b="1">
-                <a:solidFill>
-                  <a:srgbClr val="FFFFFF"/>
-                </a:solidFill>
-                <a:latin typeface="Calibri"/>
-                <a:ea typeface="Calibri"/>
-                <a:cs typeface="Calibri"/>
-              </a:defRPr>
-            </a:lvl9pPr>
-          </a:lstStyle>
-          <a:p xmlns:a="http://schemas.openxmlformats.org/drawingml/2006/main">
-            <a:pPr>
-              <a:defRPr sz="3150" b="1">
-                <a:solidFill>
-                  <a:srgbClr val="FFFFFF"/>
-                </a:solidFill>
-                <a:latin typeface="Calibri"/>
-                <a:ea typeface="Calibri"/>
-                <a:cs typeface="Calibri"/>
-              </a:defRPr>
-            </a:pPr>
-            <a:r>
-              <a:rPr sz="3150" b="1">
-                <a:solidFill>
-                  <a:srgbClr val="FFFFFF"/>
-                </a:solidFill>
-                <a:latin typeface="Calibri"/>
-                <a:ea typeface="Calibri"/>
-                <a:cs typeface="Calibri"/>
-              </a:rPr>
-              <a:t>Features and ablation submission</a:t>
-            </a:r>
-          </a:p>
-        </p:txBody>
-      </p:sp>
-      <p:sp>
-        <p:nvSpPr>
-          <p:cNvPr id="4" name="">
-            <a:extLst xmlns:a="http://schemas.openxmlformats.org/drawingml/2006/main">
-              <a:ext uri="{FF2B5EF4-FFF2-40B4-BE49-F238E27FC236}">
-                <a16:creationId xmlns:a16="http://schemas.microsoft.com/office/drawing/2014/main" id="{EDAC5F3D-9E6C-4DDA-AC81-4F8BADFE3F7B}"/>
-              </a:ext>
-            </a:extLst>
-          </p:cNvPr>
-          <p:cNvSpPr>
-            <a:spLocks xmlns:a="http://schemas.openxmlformats.org/drawingml/2006/main" noGrp="1"/>
-          </p:cNvSpPr>
-          <p:nvPr/>
-        </p:nvSpPr>
-        <p:spPr>
-          <a:xfrm xmlns:a="http://schemas.openxmlformats.org/drawingml/2006/main">
-            <a:off x="590550" y="1724025"/>
-            <a:ext cx="619125" cy="571500"/>
-          </a:xfrm>
-          <a:prstGeom xmlns:a="http://schemas.openxmlformats.org/drawingml/2006/main" prst="rect">
-            <a:avLst/>
-          </a:prstGeom>
-          <a:noFill xmlns:a="http://schemas.openxmlformats.org/drawingml/2006/main"/>
-          <a:ln xmlns:a="http://schemas.openxmlformats.org/drawingml/2006/main" w="0">
-            <a:noFill/>
-          </a:ln>
-        </p:spPr>
-        <p:txBody>
-          <a:bodyPr xmlns:a="http://schemas.openxmlformats.org/drawingml/2006/main">
-            <a:noAutofit/>
-          </a:bodyPr>
-          <a:lstStyle xmlns:a="http://schemas.openxmlformats.org/drawingml/2006/main">
-            <a:defPPr>
-              <a:defRPr sz="2550" b="1">
-                <a:solidFill>
-                  <a:srgbClr val="E4572E"/>
-                </a:solidFill>
-                <a:latin typeface="Calibri"/>
-                <a:ea typeface="Calibri"/>
-                <a:cs typeface="Calibri"/>
-              </a:defRPr>
-            </a:defPPr>
-            <a:lvl1pPr>
-              <a:defRPr sz="2550" b="1">
-                <a:solidFill>
-                  <a:srgbClr val="E4572E"/>
-                </a:solidFill>
-                <a:latin typeface="Calibri"/>
-                <a:ea typeface="Calibri"/>
-                <a:cs typeface="Calibri"/>
-              </a:defRPr>
-            </a:lvl1pPr>
-            <a:lvl2pPr>
-              <a:defRPr sz="2550" b="1">
-                <a:solidFill>
-                  <a:srgbClr val="E4572E"/>
-                </a:solidFill>
-                <a:latin typeface="Calibri"/>
-                <a:ea typeface="Calibri"/>
-                <a:cs typeface="Calibri"/>
-              </a:defRPr>
-            </a:lvl2pPr>
-            <a:lvl3pPr>
-              <a:defRPr sz="2550" b="1">
-                <a:solidFill>
-                  <a:srgbClr val="E4572E"/>
-                </a:solidFill>
-                <a:latin typeface="Calibri"/>
-                <a:ea typeface="Calibri"/>
-                <a:cs typeface="Calibri"/>
-              </a:defRPr>
-            </a:lvl3pPr>
-            <a:lvl4pPr>
-              <a:defRPr sz="2550" b="1">
-                <a:solidFill>
-                  <a:srgbClr val="E4572E"/>
-                </a:solidFill>
-                <a:latin typeface="Calibri"/>
-                <a:ea typeface="Calibri"/>
-                <a:cs typeface="Calibri"/>
-              </a:defRPr>
-            </a:lvl4pPr>
-            <a:lvl5pPr>
-              <a:defRPr sz="2550" b="1">
-                <a:solidFill>
-                  <a:srgbClr val="E4572E"/>
-                </a:solidFill>
-                <a:latin typeface="Calibri"/>
-                <a:ea typeface="Calibri"/>
-                <a:cs typeface="Calibri"/>
-              </a:defRPr>
-            </a:lvl5pPr>
-            <a:lvl6pPr>
-              <a:defRPr sz="2550" b="1">
-                <a:solidFill>
-                  <a:srgbClr val="E4572E"/>
-                </a:solidFill>
-                <a:latin typeface="Calibri"/>
-                <a:ea typeface="Calibri"/>
-                <a:cs typeface="Calibri"/>
-              </a:defRPr>
-            </a:lvl6pPr>
-            <a:lvl7pPr>
-              <a:defRPr sz="2550" b="1">
-                <a:solidFill>
-                  <a:srgbClr val="E4572E"/>
-                </a:solidFill>
-                <a:latin typeface="Calibri"/>
-                <a:ea typeface="Calibri"/>
-                <a:cs typeface="Calibri"/>
-              </a:defRPr>
-            </a:lvl7pPr>
-            <a:lvl8pPr>
-              <a:defRPr sz="2550" b="1">
-                <a:solidFill>
-                  <a:srgbClr val="E4572E"/>
-                </a:solidFill>
-                <a:latin typeface="Calibri"/>
-                <a:ea typeface="Calibri"/>
-                <a:cs typeface="Calibri"/>
-              </a:defRPr>
-            </a:lvl8pPr>
-            <a:lvl9pPr>
-              <a:defRPr sz="2550" b="1">
-                <a:solidFill>
-                  <a:srgbClr val="E4572E"/>
-                </a:solidFill>
-                <a:latin typeface="Calibri"/>
-                <a:ea typeface="Calibri"/>
-                <a:cs typeface="Calibri"/>
-              </a:defRPr>
-            </a:lvl9pPr>
-          </a:lstStyle>
-          <a:p xmlns:a="http://schemas.openxmlformats.org/drawingml/2006/main">
-            <a:pPr>
-              <a:defRPr sz="2550" b="1">
-                <a:solidFill>
-                  <a:srgbClr val="E4572E"/>
-                </a:solidFill>
-                <a:latin typeface="Calibri"/>
-                <a:ea typeface="Calibri"/>
-                <a:cs typeface="Calibri"/>
-              </a:defRPr>
-            </a:pPr>
-            <a:r>
-              <a:rPr sz="2550" b="1">
-                <a:solidFill>
-                  <a:srgbClr val="E4572E"/>
-                </a:solidFill>
-                <a:latin typeface="Calibri"/>
-                <a:ea typeface="Calibri"/>
-                <a:cs typeface="Calibri"/>
-              </a:rPr>
-              <a:t>01</a:t>
-            </a:r>
-          </a:p>
-        </p:txBody>
-      </p:sp>
-      <p:sp>
-        <p:nvSpPr>
-          <p:cNvPr id="5" name="">
-            <a:extLst xmlns:a="http://schemas.openxmlformats.org/drawingml/2006/main">
-              <a:ext uri="{FF2B5EF4-FFF2-40B4-BE49-F238E27FC236}">
-                <a16:creationId xmlns:a16="http://schemas.microsoft.com/office/drawing/2014/main" id="{4C6FC36A-5891-4EC2-AEC0-336AC66BF701}"/>
-              </a:ext>
-            </a:extLst>
-          </p:cNvPr>
-          <p:cNvSpPr>
-            <a:spLocks xmlns:a="http://schemas.openxmlformats.org/drawingml/2006/main" noGrp="1"/>
-          </p:cNvSpPr>
-          <p:nvPr/>
-        </p:nvSpPr>
-        <p:spPr>
-          <a:xfrm xmlns:a="http://schemas.openxmlformats.org/drawingml/2006/main">
-            <a:off x="1381125" y="1724025"/>
-            <a:ext cx="10096500" cy="721519"/>
-          </a:xfrm>
-          <a:prstGeom xmlns:a="http://schemas.openxmlformats.org/drawingml/2006/main" prst="rect">
-            <a:avLst/>
-          </a:prstGeom>
-          <a:noFill xmlns:a="http://schemas.openxmlformats.org/drawingml/2006/main"/>
-          <a:ln xmlns:a="http://schemas.openxmlformats.org/drawingml/2006/main" w="0">
-            <a:noFill/>
-          </a:ln>
-        </p:spPr>
-        <p:txBody>
-          <a:bodyPr xmlns:a="http://schemas.openxmlformats.org/drawingml/2006/main">
-            <a:noAutofit/>
-          </a:bodyPr>
-          <a:lstStyle xmlns:a="http://schemas.openxmlformats.org/drawingml/2006/main">
-            <a:defPPr>
-              <a:defRPr sz="2250" b="0">
-                <a:solidFill>
-                  <a:srgbClr val="1C3144"/>
-                </a:solidFill>
-                <a:latin typeface="Calibri"/>
-                <a:ea typeface="Calibri"/>
-                <a:cs typeface="Calibri"/>
-              </a:defRPr>
-            </a:defPPr>
-            <a:lvl1pPr>
-              <a:defRPr sz="2250" b="0">
-                <a:solidFill>
-                  <a:srgbClr val="1C3144"/>
-                </a:solidFill>
-                <a:latin typeface="Calibri"/>
-                <a:ea typeface="Calibri"/>
-                <a:cs typeface="Calibri"/>
-              </a:defRPr>
-            </a:lvl1pPr>
-            <a:lvl2pPr>
-              <a:defRPr sz="2250" b="0">
-                <a:solidFill>
-                  <a:srgbClr val="1C3144"/>
-                </a:solidFill>
-                <a:latin typeface="Calibri"/>
-                <a:ea typeface="Calibri"/>
-                <a:cs typeface="Calibri"/>
-              </a:defRPr>
-            </a:lvl2pPr>
-            <a:lvl3pPr>
-              <a:defRPr sz="2250" b="0">
-                <a:solidFill>
-                  <a:srgbClr val="1C3144"/>
-                </a:solidFill>
-                <a:latin typeface="Calibri"/>
-                <a:ea typeface="Calibri"/>
-                <a:cs typeface="Calibri"/>
-              </a:defRPr>
-            </a:lvl3pPr>
-            <a:lvl4pPr>
-              <a:defRPr sz="2250" b="0">
-                <a:solidFill>
-                  <a:srgbClr val="1C3144"/>
-                </a:solidFill>
-                <a:latin typeface="Calibri"/>
-                <a:ea typeface="Calibri"/>
-                <a:cs typeface="Calibri"/>
-              </a:defRPr>
-            </a:lvl4pPr>
-            <a:lvl5pPr>
-              <a:defRPr sz="2250" b="0">
-                <a:solidFill>
-                  <a:srgbClr val="1C3144"/>
-                </a:solidFill>
-                <a:latin typeface="Calibri"/>
-                <a:ea typeface="Calibri"/>
-                <a:cs typeface="Calibri"/>
-              </a:defRPr>
-            </a:lvl5pPr>
-            <a:lvl6pPr>
-              <a:defRPr sz="2250" b="0">
-                <a:solidFill>
-                  <a:srgbClr val="1C3144"/>
-                </a:solidFill>
-                <a:latin typeface="Calibri"/>
-                <a:ea typeface="Calibri"/>
-                <a:cs typeface="Calibri"/>
-              </a:defRPr>
-            </a:lvl6pPr>
-            <a:lvl7pPr>
-              <a:defRPr sz="2250" b="0">
-                <a:solidFill>
-                  <a:srgbClr val="1C3144"/>
-                </a:solidFill>
-                <a:latin typeface="Calibri"/>
-                <a:ea typeface="Calibri"/>
-                <a:cs typeface="Calibri"/>
-              </a:defRPr>
-            </a:lvl7pPr>
-            <a:lvl8pPr>
-              <a:defRPr sz="2250" b="0">
-                <a:solidFill>
-                  <a:srgbClr val="1C3144"/>
-                </a:solidFill>
-                <a:latin typeface="Calibri"/>
-                <a:ea typeface="Calibri"/>
-                <a:cs typeface="Calibri"/>
-              </a:defRPr>
-            </a:lvl8pPr>
-            <a:lvl9pPr>
-              <a:defRPr sz="2250" b="0">
-                <a:solidFill>
-                  <a:srgbClr val="1C3144"/>
-                </a:solidFill>
-                <a:latin typeface="Calibri"/>
-                <a:ea typeface="Calibri"/>
-                <a:cs typeface="Calibri"/>
-              </a:defRPr>
-            </a:lvl9pPr>
-          </a:lstStyle>
-          <a:p xmlns:a="http://schemas.openxmlformats.org/drawingml/2006/main">
-            <a:pPr>
-              <a:defRPr sz="2250" b="0">
-                <a:solidFill>
-                  <a:srgbClr val="1C3144"/>
-                </a:solidFill>
-                <a:latin typeface="Calibri"/>
-                <a:ea typeface="Calibri"/>
-                <a:cs typeface="Calibri"/>
-              </a:defRPr>
-            </a:pPr>
-            <a:r>
-              <a:rPr sz="2250" b="0">
-                <a:solidFill>
-                  <a:srgbClr val="1C3144"/>
-                </a:solidFill>
-                <a:latin typeface="Calibri"/>
-                <a:ea typeface="Calibri"/>
-                <a:cs typeface="Calibri"/>
-              </a:rPr>
-              <a:t>Opens: 20 Nov 2026, 11:00 Kampala</a:t>
-            </a:r>
-          </a:p>
-        </p:txBody>
-      </p:sp>
-      <p:sp>
-        <p:nvSpPr>
-          <p:cNvPr id="6" name="">
-            <a:extLst xmlns:a="http://schemas.openxmlformats.org/drawingml/2006/main">
-              <a:ext uri="{FF2B5EF4-FFF2-40B4-BE49-F238E27FC236}">
-                <a16:creationId xmlns:a16="http://schemas.microsoft.com/office/drawing/2014/main" id="{83597FC5-CA70-4E0C-9F6B-EBC1578B4133}"/>
-              </a:ext>
-            </a:extLst>
-          </p:cNvPr>
-          <p:cNvSpPr>
-            <a:spLocks xmlns:a="http://schemas.openxmlformats.org/drawingml/2006/main" noGrp="1"/>
-          </p:cNvSpPr>
-          <p:nvPr/>
-        </p:nvSpPr>
-        <p:spPr>
-          <a:xfrm xmlns:a="http://schemas.openxmlformats.org/drawingml/2006/main">
-            <a:off x="590550" y="2521744"/>
-            <a:ext cx="619125" cy="571500"/>
-          </a:xfrm>
-          <a:prstGeom xmlns:a="http://schemas.openxmlformats.org/drawingml/2006/main" prst="rect">
-            <a:avLst/>
-          </a:prstGeom>
-          <a:noFill xmlns:a="http://schemas.openxmlformats.org/drawingml/2006/main"/>
-          <a:ln xmlns:a="http://schemas.openxmlformats.org/drawingml/2006/main" w="0">
-            <a:noFill/>
-          </a:ln>
-        </p:spPr>
-        <p:txBody>
-          <a:bodyPr xmlns:a="http://schemas.openxmlformats.org/drawingml/2006/main">
-            <a:noAutofit/>
-          </a:bodyPr>
-          <a:lstStyle xmlns:a="http://schemas.openxmlformats.org/drawingml/2006/main">
-            <a:defPPr>
-              <a:defRPr sz="2550" b="1">
-                <a:solidFill>
-                  <a:srgbClr val="E4572E"/>
-                </a:solidFill>
-                <a:latin typeface="Calibri"/>
-                <a:ea typeface="Calibri"/>
-                <a:cs typeface="Calibri"/>
-              </a:defRPr>
-            </a:defPPr>
-            <a:lvl1pPr>
-              <a:defRPr sz="2550" b="1">
-                <a:solidFill>
-                  <a:srgbClr val="E4572E"/>
-                </a:solidFill>
-                <a:latin typeface="Calibri"/>
-                <a:ea typeface="Calibri"/>
-                <a:cs typeface="Calibri"/>
-              </a:defRPr>
-            </a:lvl1pPr>
-            <a:lvl2pPr>
-              <a:defRPr sz="2550" b="1">
-                <a:solidFill>
-                  <a:srgbClr val="E4572E"/>
-                </a:solidFill>
-                <a:latin typeface="Calibri"/>
-                <a:ea typeface="Calibri"/>
-                <a:cs typeface="Calibri"/>
-              </a:defRPr>
-            </a:lvl2pPr>
-            <a:lvl3pPr>
-              <a:defRPr sz="2550" b="1">
-                <a:solidFill>
-                  <a:srgbClr val="E4572E"/>
-                </a:solidFill>
-                <a:latin typeface="Calibri"/>
-                <a:ea typeface="Calibri"/>
-                <a:cs typeface="Calibri"/>
-              </a:defRPr>
-            </a:lvl3pPr>
-            <a:lvl4pPr>
-              <a:defRPr sz="2550" b="1">
-                <a:solidFill>
-                  <a:srgbClr val="E4572E"/>
-                </a:solidFill>
-                <a:latin typeface="Calibri"/>
-                <a:ea typeface="Calibri"/>
-                <a:cs typeface="Calibri"/>
-              </a:defRPr>
-            </a:lvl4pPr>
-            <a:lvl5pPr>
-              <a:defRPr sz="2550" b="1">
-                <a:solidFill>
-                  <a:srgbClr val="E4572E"/>
-                </a:solidFill>
-                <a:latin typeface="Calibri"/>
-                <a:ea typeface="Calibri"/>
-                <a:cs typeface="Calibri"/>
-              </a:defRPr>
-            </a:lvl5pPr>
-            <a:lvl6pPr>
-              <a:defRPr sz="2550" b="1">
-                <a:solidFill>
-                  <a:srgbClr val="E4572E"/>
-                </a:solidFill>
-                <a:latin typeface="Calibri"/>
-                <a:ea typeface="Calibri"/>
-                <a:cs typeface="Calibri"/>
-              </a:defRPr>
-            </a:lvl6pPr>
-            <a:lvl7pPr>
-              <a:defRPr sz="2550" b="1">
-                <a:solidFill>
-                  <a:srgbClr val="E4572E"/>
-                </a:solidFill>
-                <a:latin typeface="Calibri"/>
-                <a:ea typeface="Calibri"/>
-                <a:cs typeface="Calibri"/>
-              </a:defRPr>
-            </a:lvl7pPr>
-            <a:lvl8pPr>
-              <a:defRPr sz="2550" b="1">
-                <a:solidFill>
-                  <a:srgbClr val="E4572E"/>
-                </a:solidFill>
-                <a:latin typeface="Calibri"/>
-                <a:ea typeface="Calibri"/>
-                <a:cs typeface="Calibri"/>
-              </a:defRPr>
-            </a:lvl8pPr>
-            <a:lvl9pPr>
-              <a:defRPr sz="2550" b="1">
-                <a:solidFill>
-                  <a:srgbClr val="E4572E"/>
-                </a:solidFill>
-                <a:latin typeface="Calibri"/>
-                <a:ea typeface="Calibri"/>
-                <a:cs typeface="Calibri"/>
-              </a:defRPr>
-            </a:lvl9pPr>
-          </a:lstStyle>
-          <a:p xmlns:a="http://schemas.openxmlformats.org/drawingml/2006/main">
-            <a:pPr>
-              <a:defRPr sz="2550" b="1">
-                <a:solidFill>
-                  <a:srgbClr val="E4572E"/>
-                </a:solidFill>
-                <a:latin typeface="Calibri"/>
-                <a:ea typeface="Calibri"/>
-                <a:cs typeface="Calibri"/>
-              </a:defRPr>
-            </a:pPr>
-            <a:r>
-              <a:rPr sz="2550" b="1">
-                <a:solidFill>
-                  <a:srgbClr val="E4572E"/>
-                </a:solidFill>
-                <a:latin typeface="Calibri"/>
-                <a:ea typeface="Calibri"/>
-                <a:cs typeface="Calibri"/>
-              </a:rPr>
-              <a:t>02</a:t>
-            </a:r>
-          </a:p>
-        </p:txBody>
-      </p:sp>
-      <p:sp>
-        <p:nvSpPr>
-          <p:cNvPr id="7" name="">
-            <a:extLst xmlns:a="http://schemas.openxmlformats.org/drawingml/2006/main">
-              <a:ext uri="{FF2B5EF4-FFF2-40B4-BE49-F238E27FC236}">
-                <a16:creationId xmlns:a16="http://schemas.microsoft.com/office/drawing/2014/main" id="{663F69BF-B681-4328-86D2-1285260B9F63}"/>
-              </a:ext>
-            </a:extLst>
-          </p:cNvPr>
-          <p:cNvSpPr>
-            <a:spLocks xmlns:a="http://schemas.openxmlformats.org/drawingml/2006/main" noGrp="1"/>
-          </p:cNvSpPr>
-          <p:nvPr/>
-        </p:nvSpPr>
-        <p:spPr>
-          <a:xfrm xmlns:a="http://schemas.openxmlformats.org/drawingml/2006/main">
-            <a:off x="1381125" y="2521744"/>
-            <a:ext cx="10096500" cy="721519"/>
-          </a:xfrm>
-          <a:prstGeom xmlns:a="http://schemas.openxmlformats.org/drawingml/2006/main" prst="rect">
-            <a:avLst/>
-          </a:prstGeom>
-          <a:noFill xmlns:a="http://schemas.openxmlformats.org/drawingml/2006/main"/>
-          <a:ln xmlns:a="http://schemas.openxmlformats.org/drawingml/2006/main" w="0">
-            <a:noFill/>
-          </a:ln>
-        </p:spPr>
-        <p:txBody>
-          <a:bodyPr xmlns:a="http://schemas.openxmlformats.org/drawingml/2006/main">
-            <a:noAutofit/>
-          </a:bodyPr>
-          <a:lstStyle xmlns:a="http://schemas.openxmlformats.org/drawingml/2006/main">
-            <a:defPPr>
-              <a:defRPr sz="2250" b="0">
-                <a:solidFill>
-                  <a:srgbClr val="1C3144"/>
-                </a:solidFill>
-                <a:latin typeface="Calibri"/>
-                <a:ea typeface="Calibri"/>
-                <a:cs typeface="Calibri"/>
-              </a:defRPr>
-            </a:defPPr>
-            <a:lvl1pPr>
-              <a:defRPr sz="2250" b="0">
-                <a:solidFill>
-                  <a:srgbClr val="1C3144"/>
-                </a:solidFill>
-                <a:latin typeface="Calibri"/>
-                <a:ea typeface="Calibri"/>
-                <a:cs typeface="Calibri"/>
-              </a:defRPr>
-            </a:lvl1pPr>
-            <a:lvl2pPr>
-              <a:defRPr sz="2250" b="0">
-                <a:solidFill>
-                  <a:srgbClr val="1C3144"/>
-                </a:solidFill>
-                <a:latin typeface="Calibri"/>
-                <a:ea typeface="Calibri"/>
-                <a:cs typeface="Calibri"/>
-              </a:defRPr>
-            </a:lvl2pPr>
-            <a:lvl3pPr>
-              <a:defRPr sz="2250" b="0">
-                <a:solidFill>
-                  <a:srgbClr val="1C3144"/>
-                </a:solidFill>
-                <a:latin typeface="Calibri"/>
-                <a:ea typeface="Calibri"/>
-                <a:cs typeface="Calibri"/>
-              </a:defRPr>
-            </a:lvl3pPr>
-            <a:lvl4pPr>
-              <a:defRPr sz="2250" b="0">
-                <a:solidFill>
-                  <a:srgbClr val="1C3144"/>
-                </a:solidFill>
-                <a:latin typeface="Calibri"/>
-                <a:ea typeface="Calibri"/>
-                <a:cs typeface="Calibri"/>
-              </a:defRPr>
-            </a:lvl4pPr>
-            <a:lvl5pPr>
-              <a:defRPr sz="2250" b="0">
-                <a:solidFill>
-                  <a:srgbClr val="1C3144"/>
-                </a:solidFill>
-                <a:latin typeface="Calibri"/>
-                <a:ea typeface="Calibri"/>
-                <a:cs typeface="Calibri"/>
-              </a:defRPr>
-            </a:lvl5pPr>
-            <a:lvl6pPr>
-              <a:defRPr sz="2250" b="0">
-                <a:solidFill>
-                  <a:srgbClr val="1C3144"/>
-                </a:solidFill>
-                <a:latin typeface="Calibri"/>
-                <a:ea typeface="Calibri"/>
-                <a:cs typeface="Calibri"/>
-              </a:defRPr>
-            </a:lvl6pPr>
-            <a:lvl7pPr>
-              <a:defRPr sz="2250" b="0">
-                <a:solidFill>
-                  <a:srgbClr val="1C3144"/>
-                </a:solidFill>
-                <a:latin typeface="Calibri"/>
-                <a:ea typeface="Calibri"/>
-                <a:cs typeface="Calibri"/>
-              </a:defRPr>
-            </a:lvl7pPr>
-            <a:lvl8pPr>
-              <a:defRPr sz="2250" b="0">
-                <a:solidFill>
-                  <a:srgbClr val="1C3144"/>
-                </a:solidFill>
-                <a:latin typeface="Calibri"/>
-                <a:ea typeface="Calibri"/>
-                <a:cs typeface="Calibri"/>
-              </a:defRPr>
-            </a:lvl8pPr>
-            <a:lvl9pPr>
-              <a:defRPr sz="2250" b="0">
-                <a:solidFill>
-                  <a:srgbClr val="1C3144"/>
-                </a:solidFill>
-                <a:latin typeface="Calibri"/>
-                <a:ea typeface="Calibri"/>
-                <a:cs typeface="Calibri"/>
-              </a:defRPr>
-            </a:lvl9pPr>
-          </a:lstStyle>
-          <a:p xmlns:a="http://schemas.openxmlformats.org/drawingml/2006/main">
-            <a:pPr>
-              <a:defRPr sz="2250" b="0">
-                <a:solidFill>
-                  <a:srgbClr val="1C3144"/>
-                </a:solidFill>
-                <a:latin typeface="Calibri"/>
-                <a:ea typeface="Calibri"/>
-                <a:cs typeface="Calibri"/>
-              </a:defRPr>
-            </a:pPr>
-            <a:r>
-              <a:rPr sz="2250" b="0">
-                <a:solidFill>
-                  <a:srgbClr val="1C3144"/>
-                </a:solidFill>
-                <a:latin typeface="Calibri"/>
-                <a:ea typeface="Calibri"/>
-                <a:cs typeface="Calibri"/>
-              </a:rPr>
-              <a:t>Deadline: 27 Nov 2026, 11:00 Kampala</a:t>
-            </a:r>
-          </a:p>
-        </p:txBody>
-      </p:sp>
-      <p:sp>
-        <p:nvSpPr>
-          <p:cNvPr id="8" name="">
-            <a:extLst xmlns:a="http://schemas.openxmlformats.org/drawingml/2006/main">
-              <a:ext uri="{FF2B5EF4-FFF2-40B4-BE49-F238E27FC236}">
-                <a16:creationId xmlns:a16="http://schemas.microsoft.com/office/drawing/2014/main" id="{09DD5228-0B31-44BB-9D56-A63350B8C0E4}"/>
-              </a:ext>
-            </a:extLst>
-          </p:cNvPr>
-          <p:cNvSpPr>
-            <a:spLocks xmlns:a="http://schemas.openxmlformats.org/drawingml/2006/main" noGrp="1"/>
-          </p:cNvSpPr>
-          <p:nvPr/>
-        </p:nvSpPr>
-        <p:spPr>
-          <a:xfrm xmlns:a="http://schemas.openxmlformats.org/drawingml/2006/main">
-            <a:off x="590550" y="3319463"/>
-            <a:ext cx="619125" cy="571500"/>
-          </a:xfrm>
-          <a:prstGeom xmlns:a="http://schemas.openxmlformats.org/drawingml/2006/main" prst="rect">
-            <a:avLst/>
-          </a:prstGeom>
-          <a:noFill xmlns:a="http://schemas.openxmlformats.org/drawingml/2006/main"/>
-          <a:ln xmlns:a="http://schemas.openxmlformats.org/drawingml/2006/main" w="0">
-            <a:noFill/>
-          </a:ln>
-        </p:spPr>
-        <p:txBody>
-          <a:bodyPr xmlns:a="http://schemas.openxmlformats.org/drawingml/2006/main">
-            <a:noAutofit/>
-          </a:bodyPr>
-          <a:lstStyle xmlns:a="http://schemas.openxmlformats.org/drawingml/2006/main">
-            <a:defPPr>
-              <a:defRPr sz="2550" b="1">
-                <a:solidFill>
-                  <a:srgbClr val="E4572E"/>
-                </a:solidFill>
-                <a:latin typeface="Calibri"/>
-                <a:ea typeface="Calibri"/>
-                <a:cs typeface="Calibri"/>
-              </a:defRPr>
-            </a:defPPr>
-            <a:lvl1pPr>
-              <a:defRPr sz="2550" b="1">
-                <a:solidFill>
-                  <a:srgbClr val="E4572E"/>
-                </a:solidFill>
-                <a:latin typeface="Calibri"/>
-                <a:ea typeface="Calibri"/>
-                <a:cs typeface="Calibri"/>
-              </a:defRPr>
-            </a:lvl1pPr>
-            <a:lvl2pPr>
-              <a:defRPr sz="2550" b="1">
-                <a:solidFill>
-                  <a:srgbClr val="E4572E"/>
-                </a:solidFill>
-                <a:latin typeface="Calibri"/>
-                <a:ea typeface="Calibri"/>
-                <a:cs typeface="Calibri"/>
-              </a:defRPr>
-            </a:lvl2pPr>
-            <a:lvl3pPr>
-              <a:defRPr sz="2550" b="1">
-                <a:solidFill>
-                  <a:srgbClr val="E4572E"/>
-                </a:solidFill>
-                <a:latin typeface="Calibri"/>
-                <a:ea typeface="Calibri"/>
-                <a:cs typeface="Calibri"/>
-              </a:defRPr>
-            </a:lvl3pPr>
-            <a:lvl4pPr>
-              <a:defRPr sz="2550" b="1">
-                <a:solidFill>
-                  <a:srgbClr val="E4572E"/>
-                </a:solidFill>
-                <a:latin typeface="Calibri"/>
-                <a:ea typeface="Calibri"/>
-                <a:cs typeface="Calibri"/>
-              </a:defRPr>
-            </a:lvl4pPr>
-            <a:lvl5pPr>
-              <a:defRPr sz="2550" b="1">
-                <a:solidFill>
-                  <a:srgbClr val="E4572E"/>
-                </a:solidFill>
-                <a:latin typeface="Calibri"/>
-                <a:ea typeface="Calibri"/>
-                <a:cs typeface="Calibri"/>
-              </a:defRPr>
-            </a:lvl5pPr>
-            <a:lvl6pPr>
-              <a:defRPr sz="2550" b="1">
-                <a:solidFill>
-                  <a:srgbClr val="E4572E"/>
-                </a:solidFill>
-                <a:latin typeface="Calibri"/>
-                <a:ea typeface="Calibri"/>
-                <a:cs typeface="Calibri"/>
-              </a:defRPr>
-            </a:lvl6pPr>
-            <a:lvl7pPr>
-              <a:defRPr sz="2550" b="1">
-                <a:solidFill>
-                  <a:srgbClr val="E4572E"/>
-                </a:solidFill>
-                <a:latin typeface="Calibri"/>
-                <a:ea typeface="Calibri"/>
-                <a:cs typeface="Calibri"/>
-              </a:defRPr>
-            </a:lvl7pPr>
-            <a:lvl8pPr>
-              <a:defRPr sz="2550" b="1">
-                <a:solidFill>
-                  <a:srgbClr val="E4572E"/>
-                </a:solidFill>
-                <a:latin typeface="Calibri"/>
-                <a:ea typeface="Calibri"/>
-                <a:cs typeface="Calibri"/>
-              </a:defRPr>
-            </a:lvl8pPr>
-            <a:lvl9pPr>
-              <a:defRPr sz="2550" b="1">
-                <a:solidFill>
-                  <a:srgbClr val="E4572E"/>
-                </a:solidFill>
-                <a:latin typeface="Calibri"/>
-                <a:ea typeface="Calibri"/>
-                <a:cs typeface="Calibri"/>
-              </a:defRPr>
-            </a:lvl9pPr>
-          </a:lstStyle>
-          <a:p xmlns:a="http://schemas.openxmlformats.org/drawingml/2006/main">
-            <a:pPr>
-              <a:defRPr sz="2550" b="1">
-                <a:solidFill>
-                  <a:srgbClr val="E4572E"/>
-                </a:solidFill>
-                <a:latin typeface="Calibri"/>
-                <a:ea typeface="Calibri"/>
-                <a:cs typeface="Calibri"/>
-              </a:defRPr>
-            </a:pPr>
-            <a:r>
-              <a:rPr sz="2550" b="1">
-                <a:solidFill>
-                  <a:srgbClr val="E4572E"/>
-                </a:solidFill>
-                <a:latin typeface="Calibri"/>
-                <a:ea typeface="Calibri"/>
-                <a:cs typeface="Calibri"/>
-              </a:rPr>
-              <a:t>03</a:t>
-            </a:r>
-          </a:p>
-        </p:txBody>
-      </p:sp>
-      <p:sp>
-        <p:nvSpPr>
-          <p:cNvPr id="9" name="">
-            <a:extLst xmlns:a="http://schemas.openxmlformats.org/drawingml/2006/main">
-              <a:ext uri="{FF2B5EF4-FFF2-40B4-BE49-F238E27FC236}">
-                <a16:creationId xmlns:a16="http://schemas.microsoft.com/office/drawing/2014/main" id="{FF432E11-EFFC-4BB3-A5B1-331E4E756BA8}"/>
-              </a:ext>
-            </a:extLst>
-          </p:cNvPr>
-          <p:cNvSpPr>
-            <a:spLocks xmlns:a="http://schemas.openxmlformats.org/drawingml/2006/main" noGrp="1"/>
-          </p:cNvSpPr>
-          <p:nvPr/>
-        </p:nvSpPr>
-        <p:spPr>
-          <a:xfrm xmlns:a="http://schemas.openxmlformats.org/drawingml/2006/main">
-            <a:off x="1381125" y="3319463"/>
-            <a:ext cx="10096500" cy="721519"/>
-          </a:xfrm>
-          <a:prstGeom xmlns:a="http://schemas.openxmlformats.org/drawingml/2006/main" prst="rect">
-            <a:avLst/>
-          </a:prstGeom>
-          <a:noFill xmlns:a="http://schemas.openxmlformats.org/drawingml/2006/main"/>
-          <a:ln xmlns:a="http://schemas.openxmlformats.org/drawingml/2006/main" w="0">
-            <a:noFill/>
-          </a:ln>
-        </p:spPr>
-        <p:txBody>
-          <a:bodyPr xmlns:a="http://schemas.openxmlformats.org/drawingml/2006/main">
-            <a:noAutofit/>
-          </a:bodyPr>
-          <a:lstStyle xmlns:a="http://schemas.openxmlformats.org/drawingml/2006/main">
-            <a:defPPr>
-              <a:defRPr sz="2250" b="0">
-                <a:solidFill>
-                  <a:srgbClr val="1C3144"/>
-                </a:solidFill>
-                <a:latin typeface="Calibri"/>
-                <a:ea typeface="Calibri"/>
-                <a:cs typeface="Calibri"/>
-              </a:defRPr>
-            </a:defPPr>
-            <a:lvl1pPr>
-              <a:defRPr sz="2250" b="0">
-                <a:solidFill>
-                  <a:srgbClr val="1C3144"/>
-                </a:solidFill>
-                <a:latin typeface="Calibri"/>
-                <a:ea typeface="Calibri"/>
-                <a:cs typeface="Calibri"/>
-              </a:defRPr>
-            </a:lvl1pPr>
-            <a:lvl2pPr>
-              <a:defRPr sz="2250" b="0">
-                <a:solidFill>
-                  <a:srgbClr val="1C3144"/>
-                </a:solidFill>
-                <a:latin typeface="Calibri"/>
-                <a:ea typeface="Calibri"/>
-                <a:cs typeface="Calibri"/>
-              </a:defRPr>
-            </a:lvl2pPr>
-            <a:lvl3pPr>
-              <a:defRPr sz="2250" b="0">
-                <a:solidFill>
-                  <a:srgbClr val="1C3144"/>
-                </a:solidFill>
-                <a:latin typeface="Calibri"/>
-                <a:ea typeface="Calibri"/>
-                <a:cs typeface="Calibri"/>
-              </a:defRPr>
-            </a:lvl3pPr>
-            <a:lvl4pPr>
-              <a:defRPr sz="2250" b="0">
-                <a:solidFill>
-                  <a:srgbClr val="1C3144"/>
-                </a:solidFill>
-                <a:latin typeface="Calibri"/>
-                <a:ea typeface="Calibri"/>
-                <a:cs typeface="Calibri"/>
-              </a:defRPr>
-            </a:lvl4pPr>
-            <a:lvl5pPr>
-              <a:defRPr sz="2250" b="0">
-                <a:solidFill>
-                  <a:srgbClr val="1C3144"/>
-                </a:solidFill>
-                <a:latin typeface="Calibri"/>
-                <a:ea typeface="Calibri"/>
-                <a:cs typeface="Calibri"/>
-              </a:defRPr>
-            </a:lvl5pPr>
-            <a:lvl6pPr>
-              <a:defRPr sz="2250" b="0">
-                <a:solidFill>
-                  <a:srgbClr val="1C3144"/>
-                </a:solidFill>
-                <a:latin typeface="Calibri"/>
-                <a:ea typeface="Calibri"/>
-                <a:cs typeface="Calibri"/>
-              </a:defRPr>
-            </a:lvl6pPr>
-            <a:lvl7pPr>
-              <a:defRPr sz="2250" b="0">
-                <a:solidFill>
-                  <a:srgbClr val="1C3144"/>
-                </a:solidFill>
-                <a:latin typeface="Calibri"/>
-                <a:ea typeface="Calibri"/>
-                <a:cs typeface="Calibri"/>
-              </a:defRPr>
-            </a:lvl7pPr>
-            <a:lvl8pPr>
-              <a:defRPr sz="2250" b="0">
-                <a:solidFill>
-                  <a:srgbClr val="1C3144"/>
-                </a:solidFill>
-                <a:latin typeface="Calibri"/>
-                <a:ea typeface="Calibri"/>
-                <a:cs typeface="Calibri"/>
-              </a:defRPr>
-            </a:lvl8pPr>
-            <a:lvl9pPr>
-              <a:defRPr sz="2250" b="0">
-                <a:solidFill>
-                  <a:srgbClr val="1C3144"/>
-                </a:solidFill>
-                <a:latin typeface="Calibri"/>
-                <a:ea typeface="Calibri"/>
-                <a:cs typeface="Calibri"/>
-              </a:defRPr>
-            </a:lvl9pPr>
-          </a:lstStyle>
-          <a:p xmlns:a="http://schemas.openxmlformats.org/drawingml/2006/main">
-            <a:pPr>
-              <a:defRPr sz="2250" b="0">
-                <a:solidFill>
-                  <a:srgbClr val="1C3144"/>
-                </a:solidFill>
-                <a:latin typeface="Calibri"/>
-                <a:ea typeface="Calibri"/>
-                <a:cs typeface="Calibri"/>
-              </a:defRPr>
-            </a:pPr>
-            <a:r>
-              <a:rPr sz="2250" b="0">
-                <a:solidFill>
-                  <a:srgbClr val="1C3144"/>
-                </a:solidFill>
-                <a:latin typeface="Calibri"/>
-                <a:ea typeface="Calibri"/>
-                <a:cs typeface="Calibri"/>
-              </a:rPr>
-              <a:t>Use your full Student Registration Number in the form.</a:t>
-            </a:r>
-          </a:p>
-        </p:txBody>
-      </p:sp>
-      <p:sp>
-        <p:nvSpPr>
-          <p:cNvPr id="10" name="">
-            <a:extLst xmlns:a="http://schemas.openxmlformats.org/drawingml/2006/main">
-              <a:ext uri="{FF2B5EF4-FFF2-40B4-BE49-F238E27FC236}">
-                <a16:creationId xmlns:a16="http://schemas.microsoft.com/office/drawing/2014/main" id="{FC7EFC75-2B71-446C-9A53-44D39BDCD88E}"/>
-              </a:ext>
-            </a:extLst>
-          </p:cNvPr>
-          <p:cNvSpPr>
-            <a:spLocks xmlns:a="http://schemas.openxmlformats.org/drawingml/2006/main" noGrp="1"/>
-          </p:cNvSpPr>
-          <p:nvPr/>
-        </p:nvSpPr>
-        <p:spPr>
-          <a:xfrm xmlns:a="http://schemas.openxmlformats.org/drawingml/2006/main">
-            <a:off x="590550" y="4117181"/>
-            <a:ext cx="619125" cy="571500"/>
-          </a:xfrm>
-          <a:prstGeom xmlns:a="http://schemas.openxmlformats.org/drawingml/2006/main" prst="rect">
-            <a:avLst/>
-          </a:prstGeom>
-          <a:noFill xmlns:a="http://schemas.openxmlformats.org/drawingml/2006/main"/>
-          <a:ln xmlns:a="http://schemas.openxmlformats.org/drawingml/2006/main" w="0">
-            <a:noFill/>
-          </a:ln>
-        </p:spPr>
-        <p:txBody>
-          <a:bodyPr xmlns:a="http://schemas.openxmlformats.org/drawingml/2006/main">
-            <a:noAutofit/>
-          </a:bodyPr>
-          <a:lstStyle xmlns:a="http://schemas.openxmlformats.org/drawingml/2006/main">
-            <a:defPPr>
-              <a:defRPr sz="2550" b="1">
-                <a:solidFill>
-                  <a:srgbClr val="E4572E"/>
-                </a:solidFill>
-                <a:latin typeface="Calibri"/>
-                <a:ea typeface="Calibri"/>
-                <a:cs typeface="Calibri"/>
-              </a:defRPr>
-            </a:defPPr>
-            <a:lvl1pPr>
-              <a:defRPr sz="2550" b="1">
-                <a:solidFill>
-                  <a:srgbClr val="E4572E"/>
-                </a:solidFill>
-                <a:latin typeface="Calibri"/>
-                <a:ea typeface="Calibri"/>
-                <a:cs typeface="Calibri"/>
-              </a:defRPr>
-            </a:lvl1pPr>
-            <a:lvl2pPr>
-              <a:defRPr sz="2550" b="1">
-                <a:solidFill>
-                  <a:srgbClr val="E4572E"/>
-                </a:solidFill>
-                <a:latin typeface="Calibri"/>
-                <a:ea typeface="Calibri"/>
-                <a:cs typeface="Calibri"/>
-              </a:defRPr>
-            </a:lvl2pPr>
-            <a:lvl3pPr>
-              <a:defRPr sz="2550" b="1">
-                <a:solidFill>
-                  <a:srgbClr val="E4572E"/>
-                </a:solidFill>
-                <a:latin typeface="Calibri"/>
-                <a:ea typeface="Calibri"/>
-                <a:cs typeface="Calibri"/>
-              </a:defRPr>
-            </a:lvl3pPr>
-            <a:lvl4pPr>
-              <a:defRPr sz="2550" b="1">
-                <a:solidFill>
-                  <a:srgbClr val="E4572E"/>
-                </a:solidFill>
-                <a:latin typeface="Calibri"/>
-                <a:ea typeface="Calibri"/>
-                <a:cs typeface="Calibri"/>
-              </a:defRPr>
-            </a:lvl4pPr>
-            <a:lvl5pPr>
-              <a:defRPr sz="2550" b="1">
-                <a:solidFill>
-                  <a:srgbClr val="E4572E"/>
-                </a:solidFill>
-                <a:latin typeface="Calibri"/>
-                <a:ea typeface="Calibri"/>
-                <a:cs typeface="Calibri"/>
-              </a:defRPr>
-            </a:lvl5pPr>
-            <a:lvl6pPr>
-              <a:defRPr sz="2550" b="1">
-                <a:solidFill>
-                  <a:srgbClr val="E4572E"/>
-                </a:solidFill>
-                <a:latin typeface="Calibri"/>
-                <a:ea typeface="Calibri"/>
-                <a:cs typeface="Calibri"/>
-              </a:defRPr>
-            </a:lvl6pPr>
-            <a:lvl7pPr>
-              <a:defRPr sz="2550" b="1">
-                <a:solidFill>
-                  <a:srgbClr val="E4572E"/>
-                </a:solidFill>
-                <a:latin typeface="Calibri"/>
-                <a:ea typeface="Calibri"/>
-                <a:cs typeface="Calibri"/>
-              </a:defRPr>
-            </a:lvl7pPr>
-            <a:lvl8pPr>
-              <a:defRPr sz="2550" b="1">
-                <a:solidFill>
-                  <a:srgbClr val="E4572E"/>
-                </a:solidFill>
-                <a:latin typeface="Calibri"/>
-                <a:ea typeface="Calibri"/>
-                <a:cs typeface="Calibri"/>
-              </a:defRPr>
-            </a:lvl8pPr>
-            <a:lvl9pPr>
-              <a:defRPr sz="2550" b="1">
-                <a:solidFill>
-                  <a:srgbClr val="E4572E"/>
-                </a:solidFill>
-                <a:latin typeface="Calibri"/>
-                <a:ea typeface="Calibri"/>
-                <a:cs typeface="Calibri"/>
-              </a:defRPr>
-            </a:lvl9pPr>
-          </a:lstStyle>
-          <a:p xmlns:a="http://schemas.openxmlformats.org/drawingml/2006/main">
-            <a:pPr>
-              <a:defRPr sz="2550" b="1">
-                <a:solidFill>
-                  <a:srgbClr val="E4572E"/>
-                </a:solidFill>
-                <a:latin typeface="Calibri"/>
-                <a:ea typeface="Calibri"/>
-                <a:cs typeface="Calibri"/>
-              </a:defRPr>
-            </a:pPr>
-            <a:r>
-              <a:rPr sz="2550" b="1">
-                <a:solidFill>
-                  <a:srgbClr val="E4572E"/>
-                </a:solidFill>
-                <a:latin typeface="Calibri"/>
-                <a:ea typeface="Calibri"/>
-                <a:cs typeface="Calibri"/>
-              </a:rPr>
-              <a:t>04</a:t>
-            </a:r>
-          </a:p>
-        </p:txBody>
-      </p:sp>
-      <p:sp>
-        <p:nvSpPr>
-          <p:cNvPr id="11" name="">
-            <a:extLst xmlns:a="http://schemas.openxmlformats.org/drawingml/2006/main">
-              <a:ext uri="{FF2B5EF4-FFF2-40B4-BE49-F238E27FC236}">
-                <a16:creationId xmlns:a16="http://schemas.microsoft.com/office/drawing/2014/main" id="{FE09BB81-D583-4BFD-A46F-209B6FC33237}"/>
-              </a:ext>
-            </a:extLst>
-          </p:cNvPr>
-          <p:cNvSpPr>
-            <a:spLocks xmlns:a="http://schemas.openxmlformats.org/drawingml/2006/main" noGrp="1"/>
-          </p:cNvSpPr>
-          <p:nvPr/>
-        </p:nvSpPr>
-        <p:spPr>
-          <a:xfrm xmlns:a="http://schemas.openxmlformats.org/drawingml/2006/main">
-            <a:off x="1381125" y="4117181"/>
-            <a:ext cx="10096500" cy="721519"/>
-          </a:xfrm>
-          <a:prstGeom xmlns:a="http://schemas.openxmlformats.org/drawingml/2006/main" prst="rect">
-            <a:avLst/>
-          </a:prstGeom>
-          <a:noFill xmlns:a="http://schemas.openxmlformats.org/drawingml/2006/main"/>
-          <a:ln xmlns:a="http://schemas.openxmlformats.org/drawingml/2006/main" w="0">
-            <a:noFill/>
-          </a:ln>
-        </p:spPr>
-        <p:txBody>
-          <a:bodyPr xmlns:a="http://schemas.openxmlformats.org/drawingml/2006/main">
-            <a:noAutofit/>
-          </a:bodyPr>
-          <a:lstStyle xmlns:a="http://schemas.openxmlformats.org/drawingml/2006/main">
-            <a:defPPr>
-              <a:defRPr sz="2250" b="0">
-                <a:solidFill>
-                  <a:srgbClr val="1C3144"/>
-                </a:solidFill>
-                <a:latin typeface="Calibri"/>
-                <a:ea typeface="Calibri"/>
-                <a:cs typeface="Calibri"/>
-              </a:defRPr>
-            </a:defPPr>
-            <a:lvl1pPr>
-              <a:defRPr sz="2250" b="0">
-                <a:solidFill>
-                  <a:srgbClr val="1C3144"/>
-                </a:solidFill>
-                <a:latin typeface="Calibri"/>
-                <a:ea typeface="Calibri"/>
-                <a:cs typeface="Calibri"/>
-              </a:defRPr>
-            </a:lvl1pPr>
-            <a:lvl2pPr>
-              <a:defRPr sz="2250" b="0">
-                <a:solidFill>
-                  <a:srgbClr val="1C3144"/>
-                </a:solidFill>
-                <a:latin typeface="Calibri"/>
-                <a:ea typeface="Calibri"/>
-                <a:cs typeface="Calibri"/>
-              </a:defRPr>
-            </a:lvl2pPr>
-            <a:lvl3pPr>
-              <a:defRPr sz="2250" b="0">
-                <a:solidFill>
-                  <a:srgbClr val="1C3144"/>
-                </a:solidFill>
-                <a:latin typeface="Calibri"/>
-                <a:ea typeface="Calibri"/>
-                <a:cs typeface="Calibri"/>
-              </a:defRPr>
-            </a:lvl3pPr>
-            <a:lvl4pPr>
-              <a:defRPr sz="2250" b="0">
-                <a:solidFill>
-                  <a:srgbClr val="1C3144"/>
-                </a:solidFill>
-                <a:latin typeface="Calibri"/>
-                <a:ea typeface="Calibri"/>
-                <a:cs typeface="Calibri"/>
-              </a:defRPr>
-            </a:lvl4pPr>
-            <a:lvl5pPr>
-              <a:defRPr sz="2250" b="0">
-                <a:solidFill>
-                  <a:srgbClr val="1C3144"/>
-                </a:solidFill>
-                <a:latin typeface="Calibri"/>
-                <a:ea typeface="Calibri"/>
-                <a:cs typeface="Calibri"/>
-              </a:defRPr>
-            </a:lvl5pPr>
-            <a:lvl6pPr>
-              <a:defRPr sz="2250" b="0">
-                <a:solidFill>
-                  <a:srgbClr val="1C3144"/>
-                </a:solidFill>
-                <a:latin typeface="Calibri"/>
-                <a:ea typeface="Calibri"/>
-                <a:cs typeface="Calibri"/>
-              </a:defRPr>
-            </a:lvl6pPr>
-            <a:lvl7pPr>
-              <a:defRPr sz="2250" b="0">
-                <a:solidFill>
-                  <a:srgbClr val="1C3144"/>
-                </a:solidFill>
-                <a:latin typeface="Calibri"/>
-                <a:ea typeface="Calibri"/>
-                <a:cs typeface="Calibri"/>
-              </a:defRPr>
-            </a:lvl7pPr>
-            <a:lvl8pPr>
-              <a:defRPr sz="2250" b="0">
-                <a:solidFill>
-                  <a:srgbClr val="1C3144"/>
-                </a:solidFill>
-                <a:latin typeface="Calibri"/>
-                <a:ea typeface="Calibri"/>
-                <a:cs typeface="Calibri"/>
-              </a:defRPr>
-            </a:lvl8pPr>
-            <a:lvl9pPr>
-              <a:defRPr sz="2250" b="0">
-                <a:solidFill>
-                  <a:srgbClr val="1C3144"/>
-                </a:solidFill>
-                <a:latin typeface="Calibri"/>
-                <a:ea typeface="Calibri"/>
-                <a:cs typeface="Calibri"/>
-              </a:defRPr>
-            </a:lvl9pPr>
-          </a:lstStyle>
-          <a:p xmlns:a="http://schemas.openxmlformats.org/drawingml/2006/main">
-            <a:pPr>
-              <a:defRPr sz="2250" b="0">
-                <a:solidFill>
-                  <a:srgbClr val="1C3144"/>
-                </a:solidFill>
-                <a:latin typeface="Calibri"/>
-                <a:ea typeface="Calibri"/>
-                <a:cs typeface="Calibri"/>
-              </a:defRPr>
-            </a:pPr>
-            <a:r>
-              <a:rPr sz="2250" b="0">
-                <a:solidFill>
-                  <a:srgbClr val="1C3144"/>
-                </a:solidFill>
-                <a:latin typeface="Calibri"/>
-                <a:ea typeface="Calibri"/>
-                <a:cs typeface="Calibri"/>
-              </a:rPr>
-              <a:t>Keep the submitted files and confirmation.</a:t>
-            </a:r>
-          </a:p>
-        </p:txBody>
-      </p:sp>
-      <p:sp>
-        <p:nvSpPr>
-          <p:cNvPr id="12" name="">
-            <a:extLst xmlns:a="http://schemas.openxmlformats.org/drawingml/2006/main">
-              <a:ext uri="{FF2B5EF4-FFF2-40B4-BE49-F238E27FC236}">
-                <a16:creationId xmlns:a16="http://schemas.microsoft.com/office/drawing/2014/main" id="{83B03F35-6685-40EE-B5BC-0EFDDA668D51}"/>
-              </a:ext>
-            </a:extLst>
-          </p:cNvPr>
-          <p:cNvSpPr>
-            <a:spLocks xmlns:a="http://schemas.openxmlformats.org/drawingml/2006/main" noGrp="1"/>
-          </p:cNvSpPr>
-          <p:nvPr/>
-        </p:nvSpPr>
-        <p:spPr>
-          <a:xfrm xmlns:a="http://schemas.openxmlformats.org/drawingml/2006/main">
-            <a:off x="590550" y="5143500"/>
-            <a:ext cx="11010900" cy="657225"/>
-          </a:xfrm>
-          <a:prstGeom xmlns:a="http://schemas.openxmlformats.org/drawingml/2006/main" prst="rect">
-            <a:avLst/>
-          </a:prstGeom>
-          <a:solidFill xmlns:a="http://schemas.openxmlformats.org/drawingml/2006/main">
-            <a:srgbClr val="E5F1EE"/>
-          </a:solidFill>
-          <a:ln xmlns:a="http://schemas.openxmlformats.org/drawingml/2006/main" w="0">
-            <a:noFill/>
-          </a:ln>
-        </p:spPr>
-        <p:txBody xmlns:a="http://schemas.openxmlformats.org/drawingml/2006/main">
-          <a:bodyPr/>
-          <a:p/>
-        </p:txBody>
-      </p:sp>
-      <p:sp>
-        <p:nvSpPr>
-          <p:cNvPr id="13" name="">
-            <a:extLst xmlns:a="http://schemas.openxmlformats.org/drawingml/2006/main">
-              <a:ext uri="{FF2B5EF4-FFF2-40B4-BE49-F238E27FC236}">
-                <a16:creationId xmlns:a16="http://schemas.microsoft.com/office/drawing/2014/main" id="{E8B10B18-8815-4263-993D-6CFA00E98C19}"/>
-              </a:ext>
-            </a:extLst>
-          </p:cNvPr>
-          <p:cNvSpPr>
-            <a:spLocks xmlns:a="http://schemas.openxmlformats.org/drawingml/2006/main" noGrp="1"/>
-          </p:cNvSpPr>
-          <p:nvPr/>
-        </p:nvSpPr>
-        <p:spPr>
-          <a:xfrm xmlns:a="http://schemas.openxmlformats.org/drawingml/2006/main">
-            <a:off x="800100" y="5267325"/>
-            <a:ext cx="10572750" cy="457200"/>
-          </a:xfrm>
-          <a:prstGeom xmlns:a="http://schemas.openxmlformats.org/drawingml/2006/main" prst="rect">
-            <a:avLst/>
-          </a:prstGeom>
-          <a:noFill xmlns:a="http://schemas.openxmlformats.org/drawingml/2006/main"/>
-          <a:ln xmlns:a="http://schemas.openxmlformats.org/drawingml/2006/main" w="0">
-            <a:noFill/>
-          </a:ln>
-        </p:spPr>
-        <p:txBody>
-          <a:bodyPr xmlns:a="http://schemas.openxmlformats.org/drawingml/2006/main">
-            <a:noAutofit/>
-          </a:bodyPr>
-          <a:lstStyle xmlns:a="http://schemas.openxmlformats.org/drawingml/2006/main">
-            <a:defPPr>
-              <a:defRPr sz="2250" b="1">
-                <a:solidFill>
-                  <a:srgbClr val="2E7D6F"/>
-                </a:solidFill>
-                <a:latin typeface="Calibri"/>
-                <a:ea typeface="Calibri"/>
-                <a:cs typeface="Calibri"/>
-              </a:defRPr>
-            </a:defPPr>
-            <a:lvl1pPr>
-              <a:defRPr sz="2250" b="1">
-                <a:solidFill>
-                  <a:srgbClr val="2E7D6F"/>
-                </a:solidFill>
-                <a:latin typeface="Calibri"/>
-                <a:ea typeface="Calibri"/>
-                <a:cs typeface="Calibri"/>
-              </a:defRPr>
-            </a:lvl1pPr>
-            <a:lvl2pPr>
-              <a:defRPr sz="2250" b="1">
-                <a:solidFill>
-                  <a:srgbClr val="2E7D6F"/>
-                </a:solidFill>
-                <a:latin typeface="Calibri"/>
-                <a:ea typeface="Calibri"/>
-                <a:cs typeface="Calibri"/>
-              </a:defRPr>
-            </a:lvl2pPr>
-            <a:lvl3pPr>
-              <a:defRPr sz="2250" b="1">
-                <a:solidFill>
-                  <a:srgbClr val="2E7D6F"/>
-                </a:solidFill>
-                <a:latin typeface="Calibri"/>
-                <a:ea typeface="Calibri"/>
-                <a:cs typeface="Calibri"/>
-              </a:defRPr>
-            </a:lvl3pPr>
-            <a:lvl4pPr>
-              <a:defRPr sz="2250" b="1">
-                <a:solidFill>
-                  <a:srgbClr val="2E7D6F"/>
-                </a:solidFill>
-                <a:latin typeface="Calibri"/>
-                <a:ea typeface="Calibri"/>
-                <a:cs typeface="Calibri"/>
-              </a:defRPr>
-            </a:lvl4pPr>
-            <a:lvl5pPr>
-              <a:defRPr sz="2250" b="1">
-                <a:solidFill>
-                  <a:srgbClr val="2E7D6F"/>
-                </a:solidFill>
-                <a:latin typeface="Calibri"/>
-                <a:ea typeface="Calibri"/>
-                <a:cs typeface="Calibri"/>
-              </a:defRPr>
-            </a:lvl5pPr>
-            <a:lvl6pPr>
-              <a:defRPr sz="2250" b="1">
-                <a:solidFill>
-                  <a:srgbClr val="2E7D6F"/>
-                </a:solidFill>
-                <a:latin typeface="Calibri"/>
-                <a:ea typeface="Calibri"/>
-                <a:cs typeface="Calibri"/>
-              </a:defRPr>
-            </a:lvl6pPr>
-            <a:lvl7pPr>
-              <a:defRPr sz="2250" b="1">
-                <a:solidFill>
-                  <a:srgbClr val="2E7D6F"/>
-                </a:solidFill>
-                <a:latin typeface="Calibri"/>
-                <a:ea typeface="Calibri"/>
-                <a:cs typeface="Calibri"/>
-              </a:defRPr>
-            </a:lvl7pPr>
-            <a:lvl8pPr>
-              <a:defRPr sz="2250" b="1">
-                <a:solidFill>
-                  <a:srgbClr val="2E7D6F"/>
-                </a:solidFill>
-                <a:latin typeface="Calibri"/>
-                <a:ea typeface="Calibri"/>
-                <a:cs typeface="Calibri"/>
-              </a:defRPr>
-            </a:lvl8pPr>
-            <a:lvl9pPr>
-              <a:defRPr sz="2250" b="1">
-                <a:solidFill>
-                  <a:srgbClr val="2E7D6F"/>
-                </a:solidFill>
-                <a:latin typeface="Calibri"/>
-                <a:ea typeface="Calibri"/>
-                <a:cs typeface="Calibri"/>
-              </a:defRPr>
-            </a:lvl9pPr>
-          </a:lstStyle>
-          <a:p xmlns:a="http://schemas.openxmlformats.org/drawingml/2006/main">
-            <a:pPr>
-              <a:defRPr sz="2250" b="1">
-                <a:solidFill>
-                  <a:srgbClr val="2E7D6F"/>
-                </a:solidFill>
-                <a:latin typeface="Calibri"/>
-                <a:ea typeface="Calibri"/>
-                <a:cs typeface="Calibri"/>
-              </a:defRPr>
-            </a:pPr>
-            <a:r>
-              <a:rPr sz="2250" b="1">
-                <a:solidFill>
-                  <a:srgbClr val="2E7D6F"/>
-                </a:solidFill>
-                <a:latin typeface="Calibri"/>
-                <a:ea typeface="Calibri"/>
-                <a:cs typeface="Calibri"/>
-                <a:hlinkClick xmlns:r="http://schemas.openxmlformats.org/officeDocument/2006/relationships" r:id="R5aed0304b33f45a9"/>
-              </a:rPr>
-              <a:t>Open W11 assignment form</a:t>
-            </a:r>
-          </a:p>
-        </p:txBody>
-      </p:sp>
-      <p:sp>
-        <p:nvSpPr>
-          <p:cNvPr id="14" name="">
-            <a:extLst xmlns:a="http://schemas.openxmlformats.org/drawingml/2006/main">
-              <a:ext uri="{FF2B5EF4-FFF2-40B4-BE49-F238E27FC236}">
-                <a16:creationId xmlns:a16="http://schemas.microsoft.com/office/drawing/2014/main" id="{157B726C-F4FF-4E5C-8F16-5BC143A0359E}"/>
-              </a:ext>
-            </a:extLst>
-          </p:cNvPr>
-          <p:cNvSpPr>
-            <a:spLocks xmlns:a="http://schemas.openxmlformats.org/drawingml/2006/main" noGrp="1"/>
-          </p:cNvSpPr>
-          <p:nvPr/>
-        </p:nvSpPr>
-        <p:spPr>
-          <a:xfrm xmlns:a="http://schemas.openxmlformats.org/drawingml/2006/main">
-            <a:off x="685800" y="5972175"/>
-            <a:ext cx="10668000" cy="304800"/>
-          </a:xfrm>
-          <a:prstGeom xmlns:a="http://schemas.openxmlformats.org/drawingml/2006/main" prst="rect">
-            <a:avLst/>
-          </a:prstGeom>
-          <a:noFill xmlns:a="http://schemas.openxmlformats.org/drawingml/2006/main"/>
-          <a:ln xmlns:a="http://schemas.openxmlformats.org/drawingml/2006/main" w="0">
-            <a:noFill/>
-          </a:ln>
-        </p:spPr>
-        <p:txBody>
-          <a:bodyPr xmlns:a="http://schemas.openxmlformats.org/drawingml/2006/main">
-            <a:noAutofit/>
-          </a:bodyPr>
-          <a:lstStyle xmlns:a="http://schemas.openxmlformats.org/drawingml/2006/main">
-            <a:defPPr>
-              <a:defRPr sz="1275" b="0">
-                <a:solidFill>
-                  <a:srgbClr val="6B7A8A"/>
-                </a:solidFill>
-                <a:latin typeface="Calibri"/>
-                <a:ea typeface="Calibri"/>
-                <a:cs typeface="Calibri"/>
-              </a:defRPr>
-            </a:defPPr>
-            <a:lvl1pPr>
-              <a:defRPr sz="1275" b="0">
-                <a:solidFill>
-                  <a:srgbClr val="6B7A8A"/>
-                </a:solidFill>
-                <a:latin typeface="Calibri"/>
-                <a:ea typeface="Calibri"/>
-                <a:cs typeface="Calibri"/>
-              </a:defRPr>
-            </a:lvl1pPr>
-            <a:lvl2pPr>
-              <a:defRPr sz="1275" b="0">
-                <a:solidFill>
-                  <a:srgbClr val="6B7A8A"/>
-                </a:solidFill>
-                <a:latin typeface="Calibri"/>
-                <a:ea typeface="Calibri"/>
-                <a:cs typeface="Calibri"/>
-              </a:defRPr>
-            </a:lvl2pPr>
-            <a:lvl3pPr>
-              <a:defRPr sz="1275" b="0">
-                <a:solidFill>
-                  <a:srgbClr val="6B7A8A"/>
-                </a:solidFill>
-                <a:latin typeface="Calibri"/>
-                <a:ea typeface="Calibri"/>
-                <a:cs typeface="Calibri"/>
-              </a:defRPr>
-            </a:lvl3pPr>
-            <a:lvl4pPr>
-              <a:defRPr sz="1275" b="0">
-                <a:solidFill>
-                  <a:srgbClr val="6B7A8A"/>
-                </a:solidFill>
-                <a:latin typeface="Calibri"/>
-                <a:ea typeface="Calibri"/>
-                <a:cs typeface="Calibri"/>
-              </a:defRPr>
-            </a:lvl4pPr>
-            <a:lvl5pPr>
-              <a:defRPr sz="1275" b="0">
-                <a:solidFill>
-                  <a:srgbClr val="6B7A8A"/>
-                </a:solidFill>
-                <a:latin typeface="Calibri"/>
-                <a:ea typeface="Calibri"/>
-                <a:cs typeface="Calibri"/>
-              </a:defRPr>
-            </a:lvl5pPr>
-            <a:lvl6pPr>
-              <a:defRPr sz="1275" b="0">
-                <a:solidFill>
-                  <a:srgbClr val="6B7A8A"/>
-                </a:solidFill>
-                <a:latin typeface="Calibri"/>
-                <a:ea typeface="Calibri"/>
-                <a:cs typeface="Calibri"/>
-              </a:defRPr>
-            </a:lvl6pPr>
-            <a:lvl7pPr>
-              <a:defRPr sz="1275" b="0">
-                <a:solidFill>
-                  <a:srgbClr val="6B7A8A"/>
-                </a:solidFill>
-                <a:latin typeface="Calibri"/>
-                <a:ea typeface="Calibri"/>
-                <a:cs typeface="Calibri"/>
-              </a:defRPr>
-            </a:lvl7pPr>
-            <a:lvl8pPr>
-              <a:defRPr sz="1275" b="0">
-                <a:solidFill>
-                  <a:srgbClr val="6B7A8A"/>
-                </a:solidFill>
-                <a:latin typeface="Calibri"/>
-                <a:ea typeface="Calibri"/>
-                <a:cs typeface="Calibri"/>
-              </a:defRPr>
-            </a:lvl8pPr>
-            <a:lvl9pPr>
-              <a:defRPr sz="1275" b="0">
-                <a:solidFill>
-                  <a:srgbClr val="6B7A8A"/>
-                </a:solidFill>
-                <a:latin typeface="Calibri"/>
-                <a:ea typeface="Calibri"/>
-                <a:cs typeface="Calibri"/>
-              </a:defRPr>
-            </a:lvl9pPr>
-          </a:lstStyle>
-          <a:p xmlns:a="http://schemas.openxmlformats.org/drawingml/2006/main">
-            <a:pPr>
-              <a:defRPr sz="1275" b="0">
-                <a:solidFill>
-                  <a:srgbClr val="6B7A8A"/>
-                </a:solidFill>
-                <a:latin typeface="Calibri"/>
-                <a:ea typeface="Calibri"/>
-                <a:cs typeface="Calibri"/>
-              </a:defRPr>
-            </a:pPr>
-            <a:r>
-              <a:rPr sz="1275" b="0">
-                <a:solidFill>
-                  <a:srgbClr val="6B7A8A"/>
-                </a:solidFill>
-                <a:latin typeface="Calibri"/>
-                <a:ea typeface="Calibri"/>
-                <a:cs typeface="Calibri"/>
-              </a:rPr>
-              <a:t>https://docs.google.com/forms/d/e/1FAIpQLSeQJ_LsZgtIRbakN-KW4e4dx5rru2iqg6HwaaKoAQbKW7bh8Q/viewform</a:t>
-            </a:r>
-          </a:p>
-        </p:txBody>
-      </p:sp>
-      <p:sp>
-        <p:nvSpPr>
-          <p:cNvPr id="15" name="">
-            <a:extLst xmlns:a="http://schemas.openxmlformats.org/drawingml/2006/main">
-              <a:ext uri="{FF2B5EF4-FFF2-40B4-BE49-F238E27FC236}">
-                <a16:creationId xmlns:a16="http://schemas.microsoft.com/office/drawing/2014/main" id="{117310D3-FA8E-458E-BECF-2E69689E95EE}"/>
-              </a:ext>
-            </a:extLst>
-          </p:cNvPr>
-          <p:cNvSpPr>
-            <a:spLocks xmlns:a="http://schemas.openxmlformats.org/drawingml/2006/main" noGrp="1"/>
-          </p:cNvSpPr>
-          <p:nvPr/>
-        </p:nvSpPr>
-        <p:spPr>
-          <a:xfrm xmlns:a="http://schemas.openxmlformats.org/drawingml/2006/main">
-            <a:off x="590550" y="6524625"/>
-            <a:ext cx="10810875" cy="219075"/>
-          </a:xfrm>
-          <a:prstGeom xmlns:a="http://schemas.openxmlformats.org/drawingml/2006/main" prst="rect">
-            <a:avLst/>
-          </a:prstGeom>
-          <a:noFill xmlns:a="http://schemas.openxmlformats.org/drawingml/2006/main"/>
-          <a:ln xmlns:a="http://schemas.openxmlformats.org/drawingml/2006/main" w="0">
-            <a:noFill/>
-          </a:ln>
-        </p:spPr>
-        <p:txBody>
-          <a:bodyPr xmlns:a="http://schemas.openxmlformats.org/drawingml/2006/main">
-            <a:noAutofit/>
-          </a:bodyPr>
-          <a:lstStyle xmlns:a="http://schemas.openxmlformats.org/drawingml/2006/main">
-            <a:defPPr>
-              <a:defRPr sz="1200" b="0">
-                <a:solidFill>
-                  <a:srgbClr val="6B7A8A"/>
-                </a:solidFill>
-                <a:latin typeface="Calibri"/>
-                <a:ea typeface="Calibri"/>
-                <a:cs typeface="Calibri"/>
-              </a:defRPr>
-            </a:defPPr>
-            <a:lvl1pPr>
-              <a:defRPr sz="1200" b="0">
-                <a:solidFill>
-                  <a:srgbClr val="6B7A8A"/>
-                </a:solidFill>
-                <a:latin typeface="Calibri"/>
-                <a:ea typeface="Calibri"/>
-                <a:cs typeface="Calibri"/>
-              </a:defRPr>
-            </a:lvl1pPr>
-            <a:lvl2pPr>
-              <a:defRPr sz="1200" b="0">
-                <a:solidFill>
-                  <a:srgbClr val="6B7A8A"/>
-                </a:solidFill>
-                <a:latin typeface="Calibri"/>
-                <a:ea typeface="Calibri"/>
-                <a:cs typeface="Calibri"/>
-              </a:defRPr>
-            </a:lvl2pPr>
-            <a:lvl3pPr>
-              <a:defRPr sz="1200" b="0">
-                <a:solidFill>
-                  <a:srgbClr val="6B7A8A"/>
-                </a:solidFill>
-                <a:latin typeface="Calibri"/>
-                <a:ea typeface="Calibri"/>
-                <a:cs typeface="Calibri"/>
-              </a:defRPr>
-            </a:lvl3pPr>
-            <a:lvl4pPr>
-              <a:defRPr sz="1200" b="0">
-                <a:solidFill>
-                  <a:srgbClr val="6B7A8A"/>
-                </a:solidFill>
-                <a:latin typeface="Calibri"/>
-                <a:ea typeface="Calibri"/>
-                <a:cs typeface="Calibri"/>
-              </a:defRPr>
-            </a:lvl4pPr>
-            <a:lvl5pPr>
-              <a:defRPr sz="1200" b="0">
-                <a:solidFill>
-                  <a:srgbClr val="6B7A8A"/>
-                </a:solidFill>
-                <a:latin typeface="Calibri"/>
-                <a:ea typeface="Calibri"/>
-                <a:cs typeface="Calibri"/>
-              </a:defRPr>
-            </a:lvl5pPr>
-            <a:lvl6pPr>
-              <a:defRPr sz="1200" b="0">
-                <a:solidFill>
-                  <a:srgbClr val="6B7A8A"/>
-                </a:solidFill>
-                <a:latin typeface="Calibri"/>
-                <a:ea typeface="Calibri"/>
-                <a:cs typeface="Calibri"/>
-              </a:defRPr>
-            </a:lvl6pPr>
-            <a:lvl7pPr>
-              <a:defRPr sz="1200" b="0">
-                <a:solidFill>
-                  <a:srgbClr val="6B7A8A"/>
-                </a:solidFill>
-                <a:latin typeface="Calibri"/>
-                <a:ea typeface="Calibri"/>
-                <a:cs typeface="Calibri"/>
-              </a:defRPr>
-            </a:lvl7pPr>
-            <a:lvl8pPr>
-              <a:defRPr sz="1200" b="0">
-                <a:solidFill>
-                  <a:srgbClr val="6B7A8A"/>
-                </a:solidFill>
-                <a:latin typeface="Calibri"/>
-                <a:ea typeface="Calibri"/>
-                <a:cs typeface="Calibri"/>
-              </a:defRPr>
-            </a:lvl8pPr>
-            <a:lvl9pPr>
-              <a:defRPr sz="1200" b="0">
-                <a:solidFill>
-                  <a:srgbClr val="6B7A8A"/>
-                </a:solidFill>
-                <a:latin typeface="Calibri"/>
-                <a:ea typeface="Calibri"/>
-                <a:cs typeface="Calibri"/>
-              </a:defRPr>
-            </a:lvl9pPr>
-          </a:lstStyle>
-          <a:p xmlns:a="http://schemas.openxmlformats.org/drawingml/2006/main">
-            <a:pPr>
-              <a:defRPr sz="1200" b="0">
-                <a:solidFill>
-                  <a:srgbClr val="6B7A8A"/>
-                </a:solidFill>
-                <a:latin typeface="Calibri"/>
-                <a:ea typeface="Calibri"/>
-                <a:cs typeface="Calibri"/>
-              </a:defRPr>
-            </a:pPr>
-            <a:r>
-              <a:rPr sz="1200" b="0">
-                <a:solidFill>
-                  <a:srgbClr val="6B7A8A"/>
-                </a:solidFill>
-                <a:latin typeface="Calibri"/>
-                <a:ea typeface="Calibri"/>
-                <a:cs typeface="Calibri"/>
-              </a:rPr>
-              <a:t>CML3111   Week 11   36</a:t>
-            </a:r>
-          </a:p>
-        </p:txBody>
-      </p:sp>
-    </p:spTree>
-    <p:extLst>
-      <p:ext uri="{BB962C8B-B14F-4D97-AF65-F5344CB8AC3E}">
-        <p14:creationId xmlns:p14="http://schemas.microsoft.com/office/powerpoint/2010/main" val="95233936"/>
       </p:ext>
     </p:extLst>
   </p:cSld>
@@ -39330,7 +37423,7 @@
     <p:bg>
       <p:bgPr>
         <a:solidFill xmlns:a="http://schemas.openxmlformats.org/drawingml/2006/main">
-          <a:srgbClr val="FFFFFF"/>
+          <a:srgbClr val="1C3144"/>
         </a:solidFill>
       </p:bgPr>
     </p:bg>
@@ -39345,44 +37438,10 @@
       </p:grpSpPr>
       <p:sp>
         <p:nvSpPr>
-          <p:cNvPr id="18" name="">
+          <p:cNvPr id="7" name="">
             <a:extLst xmlns:a="http://schemas.openxmlformats.org/drawingml/2006/main">
               <a:ext uri="{FF2B5EF4-FFF2-40B4-BE49-F238E27FC236}">
-                <a16:creationId xmlns:a16="http://schemas.microsoft.com/office/drawing/2014/main" id="{FF3651F2-535A-4308-9294-6B7927B8C58C}"/>
-              </a:ext>
-            </a:extLst>
-          </p:cNvPr>
-          <p:cNvSpPr>
-            <a:spLocks xmlns:a="http://schemas.openxmlformats.org/drawingml/2006/main" noGrp="1"/>
-          </p:cNvSpPr>
-          <p:nvPr/>
-        </p:nvSpPr>
-        <p:spPr>
-          <a:xfrm xmlns:a="http://schemas.openxmlformats.org/drawingml/2006/main">
-            <a:off x="0" y="0"/>
-            <a:ext cx="12191695" cy="1390650"/>
-          </a:xfrm>
-          <a:prstGeom xmlns:a="http://schemas.openxmlformats.org/drawingml/2006/main" prst="rect">
-            <a:avLst/>
-          </a:prstGeom>
-          <a:solidFill xmlns:a="http://schemas.openxmlformats.org/drawingml/2006/main">
-            <a:srgbClr val="1C3144"/>
-          </a:solidFill>
-          <a:ln xmlns:a="http://schemas.openxmlformats.org/drawingml/2006/main" w="0">
-            <a:noFill/>
-          </a:ln>
-        </p:spPr>
-        <p:txBody xmlns:a="http://schemas.openxmlformats.org/drawingml/2006/main">
-          <a:bodyPr/>
-          <a:p/>
-        </p:txBody>
-      </p:sp>
-      <p:sp>
-        <p:nvSpPr>
-          <p:cNvPr id="2" name="">
-            <a:extLst xmlns:a="http://schemas.openxmlformats.org/drawingml/2006/main">
-              <a:ext uri="{FF2B5EF4-FFF2-40B4-BE49-F238E27FC236}">
-                <a16:creationId xmlns:a16="http://schemas.microsoft.com/office/drawing/2014/main" id="{A96869F0-7F74-40CB-8D59-5D627397C5FE}"/>
+                <a16:creationId xmlns:a16="http://schemas.microsoft.com/office/drawing/2014/main" id="{85E91886-BEBC-4C8A-9B53-B20FF923A4E4}"/>
               </a:ext>
             </a:extLst>
           </p:cNvPr>
@@ -39530,17 +37589,17 @@
                 <a:ea typeface="Calibri"/>
                 <a:cs typeface="Calibri"/>
               </a:rPr>
-              <a:t>QUIZ ACCESS</a:t>
+              <a:t>INDIVIDUAL EXIT CHECK</a:t>
             </a:r>
           </a:p>
         </p:txBody>
       </p:sp>
       <p:sp>
         <p:nvSpPr>
-          <p:cNvPr id="3" name="">
+          <p:cNvPr id="2" name="">
             <a:extLst xmlns:a="http://schemas.openxmlformats.org/drawingml/2006/main">
               <a:ext uri="{FF2B5EF4-FFF2-40B4-BE49-F238E27FC236}">
-                <a16:creationId xmlns:a16="http://schemas.microsoft.com/office/drawing/2014/main" id="{F327460F-5382-4DAB-B350-449FEFDAF9F7}"/>
+                <a16:creationId xmlns:a16="http://schemas.microsoft.com/office/drawing/2014/main" id="{53150502-F7CE-4BC9-87C8-E200B3EF53E4}"/>
               </a:ext>
             </a:extLst>
           </p:cNvPr>
@@ -39688,17 +37747,17 @@
                 <a:ea typeface="Calibri"/>
                 <a:cs typeface="Calibri"/>
               </a:rPr>
-              <a:t>Week 11 quiz</a:t>
+              <a:t>Revision and submission checklist</a:t>
             </a:r>
           </a:p>
         </p:txBody>
       </p:sp>
       <p:sp>
         <p:nvSpPr>
-          <p:cNvPr id="4" name="">
+          <p:cNvPr id="3" name="">
             <a:extLst xmlns:a="http://schemas.openxmlformats.org/drawingml/2006/main">
               <a:ext uri="{FF2B5EF4-FFF2-40B4-BE49-F238E27FC236}">
-                <a16:creationId xmlns:a16="http://schemas.microsoft.com/office/drawing/2014/main" id="{263CC46A-D087-4C04-84DB-16AE84C060D1}"/>
+                <a16:creationId xmlns:a16="http://schemas.microsoft.com/office/drawing/2014/main" id="{73ECFDAD-74BD-4B38-90FE-A9A16DD76CD8}"/>
               </a:ext>
             </a:extLst>
           </p:cNvPr>
@@ -39709,8 +37768,8 @@
         </p:nvSpPr>
         <p:spPr>
           <a:xfrm xmlns:a="http://schemas.openxmlformats.org/drawingml/2006/main">
-            <a:off x="590550" y="1724025"/>
-            <a:ext cx="619125" cy="571500"/>
+            <a:off x="619125" y="1619250"/>
+            <a:ext cx="2857500" cy="495300"/>
           </a:xfrm>
           <a:prstGeom xmlns:a="http://schemas.openxmlformats.org/drawingml/2006/main" prst="rect">
             <a:avLst/>
@@ -39726,7 +37785,7 @@
           </a:bodyPr>
           <a:lstStyle xmlns:a="http://schemas.openxmlformats.org/drawingml/2006/main">
             <a:defPPr>
-              <a:defRPr sz="2550" b="1">
+              <a:defRPr sz="1950" b="1">
                 <a:solidFill>
                   <a:srgbClr val="E4572E"/>
                 </a:solidFill>
@@ -39736,7 +37795,7 @@
               </a:defRPr>
             </a:defPPr>
             <a:lvl1pPr>
-              <a:defRPr sz="2550" b="1">
+              <a:defRPr sz="1950" b="1">
                 <a:solidFill>
                   <a:srgbClr val="E4572E"/>
                 </a:solidFill>
@@ -39746,7 +37805,7 @@
               </a:defRPr>
             </a:lvl1pPr>
             <a:lvl2pPr>
-              <a:defRPr sz="2550" b="1">
+              <a:defRPr sz="1950" b="1">
                 <a:solidFill>
                   <a:srgbClr val="E4572E"/>
                 </a:solidFill>
@@ -39756,7 +37815,7 @@
               </a:defRPr>
             </a:lvl2pPr>
             <a:lvl3pPr>
-              <a:defRPr sz="2550" b="1">
+              <a:defRPr sz="1950" b="1">
                 <a:solidFill>
                   <a:srgbClr val="E4572E"/>
                 </a:solidFill>
@@ -39766,7 +37825,7 @@
               </a:defRPr>
             </a:lvl3pPr>
             <a:lvl4pPr>
-              <a:defRPr sz="2550" b="1">
+              <a:defRPr sz="1950" b="1">
                 <a:solidFill>
                   <a:srgbClr val="E4572E"/>
                 </a:solidFill>
@@ -39776,7 +37835,7 @@
               </a:defRPr>
             </a:lvl4pPr>
             <a:lvl5pPr>
-              <a:defRPr sz="2550" b="1">
+              <a:defRPr sz="1950" b="1">
                 <a:solidFill>
                   <a:srgbClr val="E4572E"/>
                 </a:solidFill>
@@ -39786,7 +37845,7 @@
               </a:defRPr>
             </a:lvl5pPr>
             <a:lvl6pPr>
-              <a:defRPr sz="2550" b="1">
+              <a:defRPr sz="1950" b="1">
                 <a:solidFill>
                   <a:srgbClr val="E4572E"/>
                 </a:solidFill>
@@ -39796,7 +37855,7 @@
               </a:defRPr>
             </a:lvl6pPr>
             <a:lvl7pPr>
-              <a:defRPr sz="2550" b="1">
+              <a:defRPr sz="1950" b="1">
                 <a:solidFill>
                   <a:srgbClr val="E4572E"/>
                 </a:solidFill>
@@ -39806,7 +37865,7 @@
               </a:defRPr>
             </a:lvl7pPr>
             <a:lvl8pPr>
-              <a:defRPr sz="2550" b="1">
+              <a:defRPr sz="1950" b="1">
                 <a:solidFill>
                   <a:srgbClr val="E4572E"/>
                 </a:solidFill>
@@ -39816,7 +37875,7 @@
               </a:defRPr>
             </a:lvl8pPr>
             <a:lvl9pPr>
-              <a:defRPr sz="2550" b="1">
+              <a:defRPr sz="1950" b="1">
                 <a:solidFill>
                   <a:srgbClr val="E4572E"/>
                 </a:solidFill>
@@ -39828,7 +37887,7 @@
           </a:lstStyle>
           <a:p xmlns:a="http://schemas.openxmlformats.org/drawingml/2006/main">
             <a:pPr>
-              <a:defRPr sz="2550" b="1">
+              <a:defRPr sz="1950" b="1">
                 <a:solidFill>
                   <a:srgbClr val="E4572E"/>
                 </a:solidFill>
@@ -39838,7 +37897,7 @@
               </a:defRPr>
             </a:pPr>
             <a:r>
-              <a:rPr sz="2550" b="1">
+              <a:rPr sz="1950" b="1">
                 <a:solidFill>
                   <a:srgbClr val="E4572E"/>
                 </a:solidFill>
@@ -39846,17 +37905,17 @@
                 <a:ea typeface="Calibri"/>
                 <a:cs typeface="Calibri"/>
               </a:rPr>
-              <a:t>01</a:t>
+              <a:t>EXPLAIN IT</a:t>
             </a:r>
           </a:p>
         </p:txBody>
       </p:sp>
       <p:sp>
         <p:nvSpPr>
-          <p:cNvPr id="5" name="">
+          <p:cNvPr id="4" name="">
             <a:extLst xmlns:a="http://schemas.openxmlformats.org/drawingml/2006/main">
               <a:ext uri="{FF2B5EF4-FFF2-40B4-BE49-F238E27FC236}">
-                <a16:creationId xmlns:a16="http://schemas.microsoft.com/office/drawing/2014/main" id="{477FEA99-6C78-4977-BD46-A0B570609219}"/>
+                <a16:creationId xmlns:a16="http://schemas.microsoft.com/office/drawing/2014/main" id="{C893E17A-38D9-4956-BB86-9C6B8EDD7997}"/>
               </a:ext>
             </a:extLst>
           </p:cNvPr>
@@ -39867,8 +37926,8 @@
         </p:nvSpPr>
         <p:spPr>
           <a:xfrm xmlns:a="http://schemas.openxmlformats.org/drawingml/2006/main">
-            <a:off x="1381125" y="1724025"/>
-            <a:ext cx="7143750" cy="721519"/>
+            <a:off x="619125" y="2295525"/>
+            <a:ext cx="10810875" cy="3095625"/>
           </a:xfrm>
           <a:prstGeom xmlns:a="http://schemas.openxmlformats.org/drawingml/2006/main" prst="rect">
             <a:avLst/>
@@ -39884,9 +37943,9 @@
           </a:bodyPr>
           <a:lstStyle xmlns:a="http://schemas.openxmlformats.org/drawingml/2006/main">
             <a:defPPr>
-              <a:defRPr sz="2250" b="0">
-                <a:solidFill>
-                  <a:srgbClr val="1C3144"/>
+              <a:defRPr sz="2850" b="0">
+                <a:solidFill>
+                  <a:srgbClr val="FFFFFF"/>
                 </a:solidFill>
                 <a:latin typeface="Calibri"/>
                 <a:ea typeface="Calibri"/>
@@ -39894,9 +37953,9 @@
               </a:defRPr>
             </a:defPPr>
             <a:lvl1pPr>
-              <a:defRPr sz="2250" b="0">
-                <a:solidFill>
-                  <a:srgbClr val="1C3144"/>
+              <a:defRPr sz="2850" b="0">
+                <a:solidFill>
+                  <a:srgbClr val="FFFFFF"/>
                 </a:solidFill>
                 <a:latin typeface="Calibri"/>
                 <a:ea typeface="Calibri"/>
@@ -39904,9 +37963,9 @@
               </a:defRPr>
             </a:lvl1pPr>
             <a:lvl2pPr>
-              <a:defRPr sz="2250" b="0">
-                <a:solidFill>
-                  <a:srgbClr val="1C3144"/>
+              <a:defRPr sz="2850" b="0">
+                <a:solidFill>
+                  <a:srgbClr val="FFFFFF"/>
                 </a:solidFill>
                 <a:latin typeface="Calibri"/>
                 <a:ea typeface="Calibri"/>
@@ -39914,9 +37973,9 @@
               </a:defRPr>
             </a:lvl2pPr>
             <a:lvl3pPr>
-              <a:defRPr sz="2250" b="0">
-                <a:solidFill>
-                  <a:srgbClr val="1C3144"/>
+              <a:defRPr sz="2850" b="0">
+                <a:solidFill>
+                  <a:srgbClr val="FFFFFF"/>
                 </a:solidFill>
                 <a:latin typeface="Calibri"/>
                 <a:ea typeface="Calibri"/>
@@ -39924,9 +37983,9 @@
               </a:defRPr>
             </a:lvl3pPr>
             <a:lvl4pPr>
-              <a:defRPr sz="2250" b="0">
-                <a:solidFill>
-                  <a:srgbClr val="1C3144"/>
+              <a:defRPr sz="2850" b="0">
+                <a:solidFill>
+                  <a:srgbClr val="FFFFFF"/>
                 </a:solidFill>
                 <a:latin typeface="Calibri"/>
                 <a:ea typeface="Calibri"/>
@@ -39934,9 +37993,9 @@
               </a:defRPr>
             </a:lvl4pPr>
             <a:lvl5pPr>
-              <a:defRPr sz="2250" b="0">
-                <a:solidFill>
-                  <a:srgbClr val="1C3144"/>
+              <a:defRPr sz="2850" b="0">
+                <a:solidFill>
+                  <a:srgbClr val="FFFFFF"/>
                 </a:solidFill>
                 <a:latin typeface="Calibri"/>
                 <a:ea typeface="Calibri"/>
@@ -39944,9 +38003,9 @@
               </a:defRPr>
             </a:lvl5pPr>
             <a:lvl6pPr>
-              <a:defRPr sz="2250" b="0">
-                <a:solidFill>
-                  <a:srgbClr val="1C3144"/>
+              <a:defRPr sz="2850" b="0">
+                <a:solidFill>
+                  <a:srgbClr val="FFFFFF"/>
                 </a:solidFill>
                 <a:latin typeface="Calibri"/>
                 <a:ea typeface="Calibri"/>
@@ -39954,9 +38013,9 @@
               </a:defRPr>
             </a:lvl6pPr>
             <a:lvl7pPr>
-              <a:defRPr sz="2250" b="0">
-                <a:solidFill>
-                  <a:srgbClr val="1C3144"/>
+              <a:defRPr sz="2850" b="0">
+                <a:solidFill>
+                  <a:srgbClr val="FFFFFF"/>
                 </a:solidFill>
                 <a:latin typeface="Calibri"/>
                 <a:ea typeface="Calibri"/>
@@ -39964,9 +38023,9 @@
               </a:defRPr>
             </a:lvl7pPr>
             <a:lvl8pPr>
-              <a:defRPr sz="2250" b="0">
-                <a:solidFill>
-                  <a:srgbClr val="1C3144"/>
+              <a:defRPr sz="2850" b="0">
+                <a:solidFill>
+                  <a:srgbClr val="FFFFFF"/>
                 </a:solidFill>
                 <a:latin typeface="Calibri"/>
                 <a:ea typeface="Calibri"/>
@@ -39974,9 +38033,9 @@
               </a:defRPr>
             </a:lvl8pPr>
             <a:lvl9pPr>
-              <a:defRPr sz="2250" b="0">
-                <a:solidFill>
-                  <a:srgbClr val="1C3144"/>
+              <a:defRPr sz="2850" b="0">
+                <a:solidFill>
+                  <a:srgbClr val="FFFFFF"/>
                 </a:solidFill>
                 <a:latin typeface="Calibri"/>
                 <a:ea typeface="Calibri"/>
@@ -39986,9 +38045,9 @@
           </a:lstStyle>
           <a:p xmlns:a="http://schemas.openxmlformats.org/drawingml/2006/main">
             <a:pPr>
-              <a:defRPr sz="2250" b="0">
-                <a:solidFill>
-                  <a:srgbClr val="1C3144"/>
+              <a:defRPr sz="2850" b="0">
+                <a:solidFill>
+                  <a:srgbClr val="FFFFFF"/>
                 </a:solidFill>
                 <a:latin typeface="Calibri"/>
                 <a:ea typeface="Calibri"/>
@@ -39996,25 +38055,54 @@
               </a:defRPr>
             </a:pPr>
             <a:r>
-              <a:rPr sz="2250" b="0">
-                <a:solidFill>
-                  <a:srgbClr val="1C3144"/>
+              <a:rPr sz="2850" b="0">
+                <a:solidFill>
+                  <a:srgbClr val="FFFFFF"/>
                 </a:solidFill>
                 <a:latin typeface="Calibri"/>
                 <a:ea typeface="Calibri"/>
                 <a:cs typeface="Calibri"/>
               </a:rPr>
-              <a:t>Answer individually after the lecturer activates the quiz.</a:t>
+              <a:t>Explain to a classmate why load divided by 100 is a derived feature, how you would decide whether to keep a new feature, and why a repair note written after a fault cannot be an input.</a:t>
+            </a:r>
+          </a:p>
+          <a:p xmlns:a="http://schemas.openxmlformats.org/drawingml/2006/main">
+            <a:r>
+              <a:rPr/>
+              <a:t/>
+            </a:r>
+          </a:p>
+          <a:p xmlns:a="http://schemas.openxmlformats.org/drawingml/2006/main">
+            <a:pPr>
+              <a:defRPr sz="2850" b="0">
+                <a:solidFill>
+                  <a:srgbClr val="FFFFFF"/>
+                </a:solidFill>
+                <a:latin typeface="Calibri"/>
+                <a:ea typeface="Calibri"/>
+                <a:cs typeface="Calibri"/>
+              </a:defRPr>
+            </a:pPr>
+            <a:r>
+              <a:rPr sz="2850" b="0">
+                <a:solidFill>
+                  <a:srgbClr val="FFFFFF"/>
+                </a:solidFill>
+                <a:latin typeface="Calibri"/>
+                <a:ea typeface="Calibri"/>
+                <a:cs typeface="Calibri"/>
+              </a:rPr>
+              <a:t>Keep raw data unchanged. Restart and run all cells before you hand in your Block 2 notebooks.</a:t>
             </a:r>
           </a:p>
         </p:txBody>
       </p:sp>
       <p:sp>
         <p:nvSpPr>
-          <p:cNvPr id="6" name="">
+          <p:cNvPr id="5" name="">
             <a:extLst xmlns:a="http://schemas.openxmlformats.org/drawingml/2006/main">
               <a:ext uri="{FF2B5EF4-FFF2-40B4-BE49-F238E27FC236}">
-                <a16:creationId xmlns:a16="http://schemas.microsoft.com/office/drawing/2014/main" id="{DDC7A919-1A86-4F8F-8DFB-28420FA6C5D2}"/>
+                <a16:creationId xmlns:a16="http://schemas.microsoft.com/office/drawing/2014/main" id="{6D87BB01-7580-4AF3-B91E-CCB3987A28CE}"/>
               </a:ext>
             </a:extLst>
           </p:cNvPr>
@@ -40025,8 +38113,8 @@
         </p:nvSpPr>
         <p:spPr>
           <a:xfrm xmlns:a="http://schemas.openxmlformats.org/drawingml/2006/main">
-            <a:off x="590550" y="2521744"/>
-            <a:ext cx="619125" cy="571500"/>
+            <a:off x="619125" y="5791200"/>
+            <a:ext cx="10810875" cy="542925"/>
           </a:xfrm>
           <a:prstGeom xmlns:a="http://schemas.openxmlformats.org/drawingml/2006/main" prst="rect">
             <a:avLst/>
@@ -40042,9 +38130,9 @@
           </a:bodyPr>
           <a:lstStyle xmlns:a="http://schemas.openxmlformats.org/drawingml/2006/main">
             <a:defPPr>
-              <a:defRPr sz="2550" b="1">
-                <a:solidFill>
-                  <a:srgbClr val="E4572E"/>
+              <a:defRPr sz="1800" b="0">
+                <a:solidFill>
+                  <a:srgbClr val="BBCDD9"/>
                 </a:solidFill>
                 <a:latin typeface="Calibri"/>
                 <a:ea typeface="Calibri"/>
@@ -40052,9 +38140,9 @@
               </a:defRPr>
             </a:defPPr>
             <a:lvl1pPr>
-              <a:defRPr sz="2550" b="1">
-                <a:solidFill>
-                  <a:srgbClr val="E4572E"/>
+              <a:defRPr sz="1800" b="0">
+                <a:solidFill>
+                  <a:srgbClr val="BBCDD9"/>
                 </a:solidFill>
                 <a:latin typeface="Calibri"/>
                 <a:ea typeface="Calibri"/>
@@ -40062,9 +38150,9 @@
               </a:defRPr>
             </a:lvl1pPr>
             <a:lvl2pPr>
-              <a:defRPr sz="2550" b="1">
-                <a:solidFill>
-                  <a:srgbClr val="E4572E"/>
+              <a:defRPr sz="1800" b="0">
+                <a:solidFill>
+                  <a:srgbClr val="BBCDD9"/>
                 </a:solidFill>
                 <a:latin typeface="Calibri"/>
                 <a:ea typeface="Calibri"/>
@@ -40072,9 +38160,9 @@
               </a:defRPr>
             </a:lvl2pPr>
             <a:lvl3pPr>
-              <a:defRPr sz="2550" b="1">
-                <a:solidFill>
-                  <a:srgbClr val="E4572E"/>
+              <a:defRPr sz="1800" b="0">
+                <a:solidFill>
+                  <a:srgbClr val="BBCDD9"/>
                 </a:solidFill>
                 <a:latin typeface="Calibri"/>
                 <a:ea typeface="Calibri"/>
@@ -40082,9 +38170,9 @@
               </a:defRPr>
             </a:lvl3pPr>
             <a:lvl4pPr>
-              <a:defRPr sz="2550" b="1">
-                <a:solidFill>
-                  <a:srgbClr val="E4572E"/>
+              <a:defRPr sz="1800" b="0">
+                <a:solidFill>
+                  <a:srgbClr val="BBCDD9"/>
                 </a:solidFill>
                 <a:latin typeface="Calibri"/>
                 <a:ea typeface="Calibri"/>
@@ -40092,9 +38180,9 @@
               </a:defRPr>
             </a:lvl4pPr>
             <a:lvl5pPr>
-              <a:defRPr sz="2550" b="1">
-                <a:solidFill>
-                  <a:srgbClr val="E4572E"/>
+              <a:defRPr sz="1800" b="0">
+                <a:solidFill>
+                  <a:srgbClr val="BBCDD9"/>
                 </a:solidFill>
                 <a:latin typeface="Calibri"/>
                 <a:ea typeface="Calibri"/>
@@ -40102,9 +38190,9 @@
               </a:defRPr>
             </a:lvl5pPr>
             <a:lvl6pPr>
-              <a:defRPr sz="2550" b="1">
-                <a:solidFill>
-                  <a:srgbClr val="E4572E"/>
+              <a:defRPr sz="1800" b="0">
+                <a:solidFill>
+                  <a:srgbClr val="BBCDD9"/>
                 </a:solidFill>
                 <a:latin typeface="Calibri"/>
                 <a:ea typeface="Calibri"/>
@@ -40112,9 +38200,9 @@
               </a:defRPr>
             </a:lvl6pPr>
             <a:lvl7pPr>
-              <a:defRPr sz="2550" b="1">
-                <a:solidFill>
-                  <a:srgbClr val="E4572E"/>
+              <a:defRPr sz="1800" b="0">
+                <a:solidFill>
+                  <a:srgbClr val="BBCDD9"/>
                 </a:solidFill>
                 <a:latin typeface="Calibri"/>
                 <a:ea typeface="Calibri"/>
@@ -40122,9 +38210,9 @@
               </a:defRPr>
             </a:lvl7pPr>
             <a:lvl8pPr>
-              <a:defRPr sz="2550" b="1">
-                <a:solidFill>
-                  <a:srgbClr val="E4572E"/>
+              <a:defRPr sz="1800" b="0">
+                <a:solidFill>
+                  <a:srgbClr val="BBCDD9"/>
                 </a:solidFill>
                 <a:latin typeface="Calibri"/>
                 <a:ea typeface="Calibri"/>
@@ -40132,9 +38220,9 @@
               </a:defRPr>
             </a:lvl8pPr>
             <a:lvl9pPr>
-              <a:defRPr sz="2550" b="1">
-                <a:solidFill>
-                  <a:srgbClr val="E4572E"/>
+              <a:defRPr sz="1800" b="0">
+                <a:solidFill>
+                  <a:srgbClr val="BBCDD9"/>
                 </a:solidFill>
                 <a:latin typeface="Calibri"/>
                 <a:ea typeface="Calibri"/>
@@ -40144,9 +38232,9 @@
           </a:lstStyle>
           <a:p xmlns:a="http://schemas.openxmlformats.org/drawingml/2006/main">
             <a:pPr>
-              <a:defRPr sz="2550" b="1">
-                <a:solidFill>
-                  <a:srgbClr val="E4572E"/>
+              <a:defRPr sz="1800" b="0">
+                <a:solidFill>
+                  <a:srgbClr val="BBCDD9"/>
                 </a:solidFill>
                 <a:latin typeface="Calibri"/>
                 <a:ea typeface="Calibri"/>
@@ -40154,1352 +38242,25 @@
               </a:defRPr>
             </a:pPr>
             <a:r>
-              <a:rPr sz="2550" b="1">
-                <a:solidFill>
-                  <a:srgbClr val="E4572E"/>
+              <a:rPr sz="1800" b="0">
+                <a:solidFill>
+                  <a:srgbClr val="BBCDD9"/>
                 </a:solidFill>
                 <a:latin typeface="Calibri"/>
                 <a:ea typeface="Calibri"/>
                 <a:cs typeface="Calibri"/>
               </a:rPr>
-              <a:t>02</a:t>
+              <a:t>Point to your evidence. Save your work.</a:t>
             </a:r>
           </a:p>
         </p:txBody>
       </p:sp>
       <p:sp>
         <p:nvSpPr>
-          <p:cNvPr id="7" name="">
+          <p:cNvPr id="6" name="">
             <a:extLst xmlns:a="http://schemas.openxmlformats.org/drawingml/2006/main">
               <a:ext uri="{FF2B5EF4-FFF2-40B4-BE49-F238E27FC236}">
-                <a16:creationId xmlns:a16="http://schemas.microsoft.com/office/drawing/2014/main" id="{0FA5E039-1E3B-481E-9D84-6A54DF2F7056}"/>
-              </a:ext>
-            </a:extLst>
-          </p:cNvPr>
-          <p:cNvSpPr>
-            <a:spLocks xmlns:a="http://schemas.openxmlformats.org/drawingml/2006/main" noGrp="1"/>
-          </p:cNvSpPr>
-          <p:nvPr/>
-        </p:nvSpPr>
-        <p:spPr>
-          <a:xfrm xmlns:a="http://schemas.openxmlformats.org/drawingml/2006/main">
-            <a:off x="1381125" y="2521744"/>
-            <a:ext cx="7143750" cy="721519"/>
-          </a:xfrm>
-          <a:prstGeom xmlns:a="http://schemas.openxmlformats.org/drawingml/2006/main" prst="rect">
-            <a:avLst/>
-          </a:prstGeom>
-          <a:noFill xmlns:a="http://schemas.openxmlformats.org/drawingml/2006/main"/>
-          <a:ln xmlns:a="http://schemas.openxmlformats.org/drawingml/2006/main" w="0">
-            <a:noFill/>
-          </a:ln>
-        </p:spPr>
-        <p:txBody>
-          <a:bodyPr xmlns:a="http://schemas.openxmlformats.org/drawingml/2006/main">
-            <a:noAutofit/>
-          </a:bodyPr>
-          <a:lstStyle xmlns:a="http://schemas.openxmlformats.org/drawingml/2006/main">
-            <a:defPPr>
-              <a:defRPr sz="2250" b="0">
-                <a:solidFill>
-                  <a:srgbClr val="1C3144"/>
-                </a:solidFill>
-                <a:latin typeface="Calibri"/>
-                <a:ea typeface="Calibri"/>
-                <a:cs typeface="Calibri"/>
-              </a:defRPr>
-            </a:defPPr>
-            <a:lvl1pPr>
-              <a:defRPr sz="2250" b="0">
-                <a:solidFill>
-                  <a:srgbClr val="1C3144"/>
-                </a:solidFill>
-                <a:latin typeface="Calibri"/>
-                <a:ea typeface="Calibri"/>
-                <a:cs typeface="Calibri"/>
-              </a:defRPr>
-            </a:lvl1pPr>
-            <a:lvl2pPr>
-              <a:defRPr sz="2250" b="0">
-                <a:solidFill>
-                  <a:srgbClr val="1C3144"/>
-                </a:solidFill>
-                <a:latin typeface="Calibri"/>
-                <a:ea typeface="Calibri"/>
-                <a:cs typeface="Calibri"/>
-              </a:defRPr>
-            </a:lvl2pPr>
-            <a:lvl3pPr>
-              <a:defRPr sz="2250" b="0">
-                <a:solidFill>
-                  <a:srgbClr val="1C3144"/>
-                </a:solidFill>
-                <a:latin typeface="Calibri"/>
-                <a:ea typeface="Calibri"/>
-                <a:cs typeface="Calibri"/>
-              </a:defRPr>
-            </a:lvl3pPr>
-            <a:lvl4pPr>
-              <a:defRPr sz="2250" b="0">
-                <a:solidFill>
-                  <a:srgbClr val="1C3144"/>
-                </a:solidFill>
-                <a:latin typeface="Calibri"/>
-                <a:ea typeface="Calibri"/>
-                <a:cs typeface="Calibri"/>
-              </a:defRPr>
-            </a:lvl4pPr>
-            <a:lvl5pPr>
-              <a:defRPr sz="2250" b="0">
-                <a:solidFill>
-                  <a:srgbClr val="1C3144"/>
-                </a:solidFill>
-                <a:latin typeface="Calibri"/>
-                <a:ea typeface="Calibri"/>
-                <a:cs typeface="Calibri"/>
-              </a:defRPr>
-            </a:lvl5pPr>
-            <a:lvl6pPr>
-              <a:defRPr sz="2250" b="0">
-                <a:solidFill>
-                  <a:srgbClr val="1C3144"/>
-                </a:solidFill>
-                <a:latin typeface="Calibri"/>
-                <a:ea typeface="Calibri"/>
-                <a:cs typeface="Calibri"/>
-              </a:defRPr>
-            </a:lvl6pPr>
-            <a:lvl7pPr>
-              <a:defRPr sz="2250" b="0">
-                <a:solidFill>
-                  <a:srgbClr val="1C3144"/>
-                </a:solidFill>
-                <a:latin typeface="Calibri"/>
-                <a:ea typeface="Calibri"/>
-                <a:cs typeface="Calibri"/>
-              </a:defRPr>
-            </a:lvl7pPr>
-            <a:lvl8pPr>
-              <a:defRPr sz="2250" b="0">
-                <a:solidFill>
-                  <a:srgbClr val="1C3144"/>
-                </a:solidFill>
-                <a:latin typeface="Calibri"/>
-                <a:ea typeface="Calibri"/>
-                <a:cs typeface="Calibri"/>
-              </a:defRPr>
-            </a:lvl8pPr>
-            <a:lvl9pPr>
-              <a:defRPr sz="2250" b="0">
-                <a:solidFill>
-                  <a:srgbClr val="1C3144"/>
-                </a:solidFill>
-                <a:latin typeface="Calibri"/>
-                <a:ea typeface="Calibri"/>
-                <a:cs typeface="Calibri"/>
-              </a:defRPr>
-            </a:lvl9pPr>
-          </a:lstStyle>
-          <a:p xmlns:a="http://schemas.openxmlformats.org/drawingml/2006/main">
-            <a:pPr>
-              <a:defRPr sz="2250" b="0">
-                <a:solidFill>
-                  <a:srgbClr val="1C3144"/>
-                </a:solidFill>
-                <a:latin typeface="Calibri"/>
-                <a:ea typeface="Calibri"/>
-                <a:cs typeface="Calibri"/>
-              </a:defRPr>
-            </a:pPr>
-            <a:r>
-              <a:rPr sz="2250" b="0">
-                <a:solidFill>
-                  <a:srgbClr val="1C3144"/>
-                </a:solidFill>
-                <a:latin typeface="Calibri"/>
-                <a:ea typeface="Calibri"/>
-                <a:cs typeface="Calibri"/>
-              </a:rPr>
-              <a:t>Available for 24 hours from activation.</a:t>
-            </a:r>
-          </a:p>
-        </p:txBody>
-      </p:sp>
-      <p:sp>
-        <p:nvSpPr>
-          <p:cNvPr id="8" name="">
-            <a:extLst xmlns:a="http://schemas.openxmlformats.org/drawingml/2006/main">
-              <a:ext uri="{FF2B5EF4-FFF2-40B4-BE49-F238E27FC236}">
-                <a16:creationId xmlns:a16="http://schemas.microsoft.com/office/drawing/2014/main" id="{1EEC8679-6443-45B4-A760-CAF685A036CD}"/>
-              </a:ext>
-            </a:extLst>
-          </p:cNvPr>
-          <p:cNvSpPr>
-            <a:spLocks xmlns:a="http://schemas.openxmlformats.org/drawingml/2006/main" noGrp="1"/>
-          </p:cNvSpPr>
-          <p:nvPr/>
-        </p:nvSpPr>
-        <p:spPr>
-          <a:xfrm xmlns:a="http://schemas.openxmlformats.org/drawingml/2006/main">
-            <a:off x="590550" y="3319463"/>
-            <a:ext cx="619125" cy="571500"/>
-          </a:xfrm>
-          <a:prstGeom xmlns:a="http://schemas.openxmlformats.org/drawingml/2006/main" prst="rect">
-            <a:avLst/>
-          </a:prstGeom>
-          <a:noFill xmlns:a="http://schemas.openxmlformats.org/drawingml/2006/main"/>
-          <a:ln xmlns:a="http://schemas.openxmlformats.org/drawingml/2006/main" w="0">
-            <a:noFill/>
-          </a:ln>
-        </p:spPr>
-        <p:txBody>
-          <a:bodyPr xmlns:a="http://schemas.openxmlformats.org/drawingml/2006/main">
-            <a:noAutofit/>
-          </a:bodyPr>
-          <a:lstStyle xmlns:a="http://schemas.openxmlformats.org/drawingml/2006/main">
-            <a:defPPr>
-              <a:defRPr sz="2550" b="1">
-                <a:solidFill>
-                  <a:srgbClr val="E4572E"/>
-                </a:solidFill>
-                <a:latin typeface="Calibri"/>
-                <a:ea typeface="Calibri"/>
-                <a:cs typeface="Calibri"/>
-              </a:defRPr>
-            </a:defPPr>
-            <a:lvl1pPr>
-              <a:defRPr sz="2550" b="1">
-                <a:solidFill>
-                  <a:srgbClr val="E4572E"/>
-                </a:solidFill>
-                <a:latin typeface="Calibri"/>
-                <a:ea typeface="Calibri"/>
-                <a:cs typeface="Calibri"/>
-              </a:defRPr>
-            </a:lvl1pPr>
-            <a:lvl2pPr>
-              <a:defRPr sz="2550" b="1">
-                <a:solidFill>
-                  <a:srgbClr val="E4572E"/>
-                </a:solidFill>
-                <a:latin typeface="Calibri"/>
-                <a:ea typeface="Calibri"/>
-                <a:cs typeface="Calibri"/>
-              </a:defRPr>
-            </a:lvl2pPr>
-            <a:lvl3pPr>
-              <a:defRPr sz="2550" b="1">
-                <a:solidFill>
-                  <a:srgbClr val="E4572E"/>
-                </a:solidFill>
-                <a:latin typeface="Calibri"/>
-                <a:ea typeface="Calibri"/>
-                <a:cs typeface="Calibri"/>
-              </a:defRPr>
-            </a:lvl3pPr>
-            <a:lvl4pPr>
-              <a:defRPr sz="2550" b="1">
-                <a:solidFill>
-                  <a:srgbClr val="E4572E"/>
-                </a:solidFill>
-                <a:latin typeface="Calibri"/>
-                <a:ea typeface="Calibri"/>
-                <a:cs typeface="Calibri"/>
-              </a:defRPr>
-            </a:lvl4pPr>
-            <a:lvl5pPr>
-              <a:defRPr sz="2550" b="1">
-                <a:solidFill>
-                  <a:srgbClr val="E4572E"/>
-                </a:solidFill>
-                <a:latin typeface="Calibri"/>
-                <a:ea typeface="Calibri"/>
-                <a:cs typeface="Calibri"/>
-              </a:defRPr>
-            </a:lvl5pPr>
-            <a:lvl6pPr>
-              <a:defRPr sz="2550" b="1">
-                <a:solidFill>
-                  <a:srgbClr val="E4572E"/>
-                </a:solidFill>
-                <a:latin typeface="Calibri"/>
-                <a:ea typeface="Calibri"/>
-                <a:cs typeface="Calibri"/>
-              </a:defRPr>
-            </a:lvl6pPr>
-            <a:lvl7pPr>
-              <a:defRPr sz="2550" b="1">
-                <a:solidFill>
-                  <a:srgbClr val="E4572E"/>
-                </a:solidFill>
-                <a:latin typeface="Calibri"/>
-                <a:ea typeface="Calibri"/>
-                <a:cs typeface="Calibri"/>
-              </a:defRPr>
-            </a:lvl7pPr>
-            <a:lvl8pPr>
-              <a:defRPr sz="2550" b="1">
-                <a:solidFill>
-                  <a:srgbClr val="E4572E"/>
-                </a:solidFill>
-                <a:latin typeface="Calibri"/>
-                <a:ea typeface="Calibri"/>
-                <a:cs typeface="Calibri"/>
-              </a:defRPr>
-            </a:lvl8pPr>
-            <a:lvl9pPr>
-              <a:defRPr sz="2550" b="1">
-                <a:solidFill>
-                  <a:srgbClr val="E4572E"/>
-                </a:solidFill>
-                <a:latin typeface="Calibri"/>
-                <a:ea typeface="Calibri"/>
-                <a:cs typeface="Calibri"/>
-              </a:defRPr>
-            </a:lvl9pPr>
-          </a:lstStyle>
-          <a:p xmlns:a="http://schemas.openxmlformats.org/drawingml/2006/main">
-            <a:pPr>
-              <a:defRPr sz="2550" b="1">
-                <a:solidFill>
-                  <a:srgbClr val="E4572E"/>
-                </a:solidFill>
-                <a:latin typeface="Calibri"/>
-                <a:ea typeface="Calibri"/>
-                <a:cs typeface="Calibri"/>
-              </a:defRPr>
-            </a:pPr>
-            <a:r>
-              <a:rPr sz="2550" b="1">
-                <a:solidFill>
-                  <a:srgbClr val="E4572E"/>
-                </a:solidFill>
-                <a:latin typeface="Calibri"/>
-                <a:ea typeface="Calibri"/>
-                <a:cs typeface="Calibri"/>
-              </a:rPr>
-              <a:t>03</a:t>
-            </a:r>
-          </a:p>
-        </p:txBody>
-      </p:sp>
-      <p:sp>
-        <p:nvSpPr>
-          <p:cNvPr id="9" name="">
-            <a:extLst xmlns:a="http://schemas.openxmlformats.org/drawingml/2006/main">
-              <a:ext uri="{FF2B5EF4-FFF2-40B4-BE49-F238E27FC236}">
-                <a16:creationId xmlns:a16="http://schemas.microsoft.com/office/drawing/2014/main" id="{10D52B3F-31DF-40F7-8BB3-F372885AA610}"/>
-              </a:ext>
-            </a:extLst>
-          </p:cNvPr>
-          <p:cNvSpPr>
-            <a:spLocks xmlns:a="http://schemas.openxmlformats.org/drawingml/2006/main" noGrp="1"/>
-          </p:cNvSpPr>
-          <p:nvPr/>
-        </p:nvSpPr>
-        <p:spPr>
-          <a:xfrm xmlns:a="http://schemas.openxmlformats.org/drawingml/2006/main">
-            <a:off x="1381125" y="3319463"/>
-            <a:ext cx="7143750" cy="721519"/>
-          </a:xfrm>
-          <a:prstGeom xmlns:a="http://schemas.openxmlformats.org/drawingml/2006/main" prst="rect">
-            <a:avLst/>
-          </a:prstGeom>
-          <a:noFill xmlns:a="http://schemas.openxmlformats.org/drawingml/2006/main"/>
-          <a:ln xmlns:a="http://schemas.openxmlformats.org/drawingml/2006/main" w="0">
-            <a:noFill/>
-          </a:ln>
-        </p:spPr>
-        <p:txBody>
-          <a:bodyPr xmlns:a="http://schemas.openxmlformats.org/drawingml/2006/main">
-            <a:noAutofit/>
-          </a:bodyPr>
-          <a:lstStyle xmlns:a="http://schemas.openxmlformats.org/drawingml/2006/main">
-            <a:defPPr>
-              <a:defRPr sz="2250" b="0">
-                <a:solidFill>
-                  <a:srgbClr val="1C3144"/>
-                </a:solidFill>
-                <a:latin typeface="Calibri"/>
-                <a:ea typeface="Calibri"/>
-                <a:cs typeface="Calibri"/>
-              </a:defRPr>
-            </a:defPPr>
-            <a:lvl1pPr>
-              <a:defRPr sz="2250" b="0">
-                <a:solidFill>
-                  <a:srgbClr val="1C3144"/>
-                </a:solidFill>
-                <a:latin typeface="Calibri"/>
-                <a:ea typeface="Calibri"/>
-                <a:cs typeface="Calibri"/>
-              </a:defRPr>
-            </a:lvl1pPr>
-            <a:lvl2pPr>
-              <a:defRPr sz="2250" b="0">
-                <a:solidFill>
-                  <a:srgbClr val="1C3144"/>
-                </a:solidFill>
-                <a:latin typeface="Calibri"/>
-                <a:ea typeface="Calibri"/>
-                <a:cs typeface="Calibri"/>
-              </a:defRPr>
-            </a:lvl2pPr>
-            <a:lvl3pPr>
-              <a:defRPr sz="2250" b="0">
-                <a:solidFill>
-                  <a:srgbClr val="1C3144"/>
-                </a:solidFill>
-                <a:latin typeface="Calibri"/>
-                <a:ea typeface="Calibri"/>
-                <a:cs typeface="Calibri"/>
-              </a:defRPr>
-            </a:lvl3pPr>
-            <a:lvl4pPr>
-              <a:defRPr sz="2250" b="0">
-                <a:solidFill>
-                  <a:srgbClr val="1C3144"/>
-                </a:solidFill>
-                <a:latin typeface="Calibri"/>
-                <a:ea typeface="Calibri"/>
-                <a:cs typeface="Calibri"/>
-              </a:defRPr>
-            </a:lvl4pPr>
-            <a:lvl5pPr>
-              <a:defRPr sz="2250" b="0">
-                <a:solidFill>
-                  <a:srgbClr val="1C3144"/>
-                </a:solidFill>
-                <a:latin typeface="Calibri"/>
-                <a:ea typeface="Calibri"/>
-                <a:cs typeface="Calibri"/>
-              </a:defRPr>
-            </a:lvl5pPr>
-            <a:lvl6pPr>
-              <a:defRPr sz="2250" b="0">
-                <a:solidFill>
-                  <a:srgbClr val="1C3144"/>
-                </a:solidFill>
-                <a:latin typeface="Calibri"/>
-                <a:ea typeface="Calibri"/>
-                <a:cs typeface="Calibri"/>
-              </a:defRPr>
-            </a:lvl6pPr>
-            <a:lvl7pPr>
-              <a:defRPr sz="2250" b="0">
-                <a:solidFill>
-                  <a:srgbClr val="1C3144"/>
-                </a:solidFill>
-                <a:latin typeface="Calibri"/>
-                <a:ea typeface="Calibri"/>
-                <a:cs typeface="Calibri"/>
-              </a:defRPr>
-            </a:lvl7pPr>
-            <a:lvl8pPr>
-              <a:defRPr sz="2250" b="0">
-                <a:solidFill>
-                  <a:srgbClr val="1C3144"/>
-                </a:solidFill>
-                <a:latin typeface="Calibri"/>
-                <a:ea typeface="Calibri"/>
-                <a:cs typeface="Calibri"/>
-              </a:defRPr>
-            </a:lvl8pPr>
-            <a:lvl9pPr>
-              <a:defRPr sz="2250" b="0">
-                <a:solidFill>
-                  <a:srgbClr val="1C3144"/>
-                </a:solidFill>
-                <a:latin typeface="Calibri"/>
-                <a:ea typeface="Calibri"/>
-                <a:cs typeface="Calibri"/>
-              </a:defRPr>
-            </a:lvl9pPr>
-          </a:lstStyle>
-          <a:p xmlns:a="http://schemas.openxmlformats.org/drawingml/2006/main">
-            <a:pPr>
-              <a:defRPr sz="2250" b="0">
-                <a:solidFill>
-                  <a:srgbClr val="1C3144"/>
-                </a:solidFill>
-                <a:latin typeface="Calibri"/>
-                <a:ea typeface="Calibri"/>
-                <a:cs typeface="Calibri"/>
-              </a:defRPr>
-            </a:pPr>
-            <a:r>
-              <a:rPr sz="2250" b="0">
-                <a:solidFill>
-                  <a:srgbClr val="1C3144"/>
-                </a:solidFill>
-                <a:latin typeface="Calibri"/>
-                <a:ea typeface="Calibri"/>
-                <a:cs typeface="Calibri"/>
-              </a:rPr>
-              <a:t>Use your Student Registration Number and registered account.</a:t>
-            </a:r>
-          </a:p>
-        </p:txBody>
-      </p:sp>
-      <p:sp>
-        <p:nvSpPr>
-          <p:cNvPr id="10" name="">
-            <a:extLst xmlns:a="http://schemas.openxmlformats.org/drawingml/2006/main">
-              <a:ext uri="{FF2B5EF4-FFF2-40B4-BE49-F238E27FC236}">
-                <a16:creationId xmlns:a16="http://schemas.microsoft.com/office/drawing/2014/main" id="{2D8F1911-E1A9-4DD0-8027-152033CB4340}"/>
-              </a:ext>
-            </a:extLst>
-          </p:cNvPr>
-          <p:cNvSpPr>
-            <a:spLocks xmlns:a="http://schemas.openxmlformats.org/drawingml/2006/main" noGrp="1"/>
-          </p:cNvSpPr>
-          <p:nvPr/>
-        </p:nvSpPr>
-        <p:spPr>
-          <a:xfrm xmlns:a="http://schemas.openxmlformats.org/drawingml/2006/main">
-            <a:off x="590550" y="4117181"/>
-            <a:ext cx="619125" cy="571500"/>
-          </a:xfrm>
-          <a:prstGeom xmlns:a="http://schemas.openxmlformats.org/drawingml/2006/main" prst="rect">
-            <a:avLst/>
-          </a:prstGeom>
-          <a:noFill xmlns:a="http://schemas.openxmlformats.org/drawingml/2006/main"/>
-          <a:ln xmlns:a="http://schemas.openxmlformats.org/drawingml/2006/main" w="0">
-            <a:noFill/>
-          </a:ln>
-        </p:spPr>
-        <p:txBody>
-          <a:bodyPr xmlns:a="http://schemas.openxmlformats.org/drawingml/2006/main">
-            <a:noAutofit/>
-          </a:bodyPr>
-          <a:lstStyle xmlns:a="http://schemas.openxmlformats.org/drawingml/2006/main">
-            <a:defPPr>
-              <a:defRPr sz="2550" b="1">
-                <a:solidFill>
-                  <a:srgbClr val="E4572E"/>
-                </a:solidFill>
-                <a:latin typeface="Calibri"/>
-                <a:ea typeface="Calibri"/>
-                <a:cs typeface="Calibri"/>
-              </a:defRPr>
-            </a:defPPr>
-            <a:lvl1pPr>
-              <a:defRPr sz="2550" b="1">
-                <a:solidFill>
-                  <a:srgbClr val="E4572E"/>
-                </a:solidFill>
-                <a:latin typeface="Calibri"/>
-                <a:ea typeface="Calibri"/>
-                <a:cs typeface="Calibri"/>
-              </a:defRPr>
-            </a:lvl1pPr>
-            <a:lvl2pPr>
-              <a:defRPr sz="2550" b="1">
-                <a:solidFill>
-                  <a:srgbClr val="E4572E"/>
-                </a:solidFill>
-                <a:latin typeface="Calibri"/>
-                <a:ea typeface="Calibri"/>
-                <a:cs typeface="Calibri"/>
-              </a:defRPr>
-            </a:lvl2pPr>
-            <a:lvl3pPr>
-              <a:defRPr sz="2550" b="1">
-                <a:solidFill>
-                  <a:srgbClr val="E4572E"/>
-                </a:solidFill>
-                <a:latin typeface="Calibri"/>
-                <a:ea typeface="Calibri"/>
-                <a:cs typeface="Calibri"/>
-              </a:defRPr>
-            </a:lvl3pPr>
-            <a:lvl4pPr>
-              <a:defRPr sz="2550" b="1">
-                <a:solidFill>
-                  <a:srgbClr val="E4572E"/>
-                </a:solidFill>
-                <a:latin typeface="Calibri"/>
-                <a:ea typeface="Calibri"/>
-                <a:cs typeface="Calibri"/>
-              </a:defRPr>
-            </a:lvl4pPr>
-            <a:lvl5pPr>
-              <a:defRPr sz="2550" b="1">
-                <a:solidFill>
-                  <a:srgbClr val="E4572E"/>
-                </a:solidFill>
-                <a:latin typeface="Calibri"/>
-                <a:ea typeface="Calibri"/>
-                <a:cs typeface="Calibri"/>
-              </a:defRPr>
-            </a:lvl5pPr>
-            <a:lvl6pPr>
-              <a:defRPr sz="2550" b="1">
-                <a:solidFill>
-                  <a:srgbClr val="E4572E"/>
-                </a:solidFill>
-                <a:latin typeface="Calibri"/>
-                <a:ea typeface="Calibri"/>
-                <a:cs typeface="Calibri"/>
-              </a:defRPr>
-            </a:lvl6pPr>
-            <a:lvl7pPr>
-              <a:defRPr sz="2550" b="1">
-                <a:solidFill>
-                  <a:srgbClr val="E4572E"/>
-                </a:solidFill>
-                <a:latin typeface="Calibri"/>
-                <a:ea typeface="Calibri"/>
-                <a:cs typeface="Calibri"/>
-              </a:defRPr>
-            </a:lvl7pPr>
-            <a:lvl8pPr>
-              <a:defRPr sz="2550" b="1">
-                <a:solidFill>
-                  <a:srgbClr val="E4572E"/>
-                </a:solidFill>
-                <a:latin typeface="Calibri"/>
-                <a:ea typeface="Calibri"/>
-                <a:cs typeface="Calibri"/>
-              </a:defRPr>
-            </a:lvl8pPr>
-            <a:lvl9pPr>
-              <a:defRPr sz="2550" b="1">
-                <a:solidFill>
-                  <a:srgbClr val="E4572E"/>
-                </a:solidFill>
-                <a:latin typeface="Calibri"/>
-                <a:ea typeface="Calibri"/>
-                <a:cs typeface="Calibri"/>
-              </a:defRPr>
-            </a:lvl9pPr>
-          </a:lstStyle>
-          <a:p xmlns:a="http://schemas.openxmlformats.org/drawingml/2006/main">
-            <a:pPr>
-              <a:defRPr sz="2550" b="1">
-                <a:solidFill>
-                  <a:srgbClr val="E4572E"/>
-                </a:solidFill>
-                <a:latin typeface="Calibri"/>
-                <a:ea typeface="Calibri"/>
-                <a:cs typeface="Calibri"/>
-              </a:defRPr>
-            </a:pPr>
-            <a:r>
-              <a:rPr sz="2550" b="1">
-                <a:solidFill>
-                  <a:srgbClr val="E4572E"/>
-                </a:solidFill>
-                <a:latin typeface="Calibri"/>
-                <a:ea typeface="Calibri"/>
-                <a:cs typeface="Calibri"/>
-              </a:rPr>
-              <a:t>04</a:t>
-            </a:r>
-          </a:p>
-        </p:txBody>
-      </p:sp>
-      <p:sp>
-        <p:nvSpPr>
-          <p:cNvPr id="11" name="">
-            <a:extLst xmlns:a="http://schemas.openxmlformats.org/drawingml/2006/main">
-              <a:ext uri="{FF2B5EF4-FFF2-40B4-BE49-F238E27FC236}">
-                <a16:creationId xmlns:a16="http://schemas.microsoft.com/office/drawing/2014/main" id="{B97DD24D-E6B9-40EE-A11E-5FD0753C5AA0}"/>
-              </a:ext>
-            </a:extLst>
-          </p:cNvPr>
-          <p:cNvSpPr>
-            <a:spLocks xmlns:a="http://schemas.openxmlformats.org/drawingml/2006/main" noGrp="1"/>
-          </p:cNvSpPr>
-          <p:nvPr/>
-        </p:nvSpPr>
-        <p:spPr>
-          <a:xfrm xmlns:a="http://schemas.openxmlformats.org/drawingml/2006/main">
-            <a:off x="1381125" y="4117181"/>
-            <a:ext cx="7143750" cy="721519"/>
-          </a:xfrm>
-          <a:prstGeom xmlns:a="http://schemas.openxmlformats.org/drawingml/2006/main" prst="rect">
-            <a:avLst/>
-          </a:prstGeom>
-          <a:noFill xmlns:a="http://schemas.openxmlformats.org/drawingml/2006/main"/>
-          <a:ln xmlns:a="http://schemas.openxmlformats.org/drawingml/2006/main" w="0">
-            <a:noFill/>
-          </a:ln>
-        </p:spPr>
-        <p:txBody>
-          <a:bodyPr xmlns:a="http://schemas.openxmlformats.org/drawingml/2006/main">
-            <a:noAutofit/>
-          </a:bodyPr>
-          <a:lstStyle xmlns:a="http://schemas.openxmlformats.org/drawingml/2006/main">
-            <a:defPPr>
-              <a:defRPr sz="2250" b="0">
-                <a:solidFill>
-                  <a:srgbClr val="1C3144"/>
-                </a:solidFill>
-                <a:latin typeface="Calibri"/>
-                <a:ea typeface="Calibri"/>
-                <a:cs typeface="Calibri"/>
-              </a:defRPr>
-            </a:defPPr>
-            <a:lvl1pPr>
-              <a:defRPr sz="2250" b="0">
-                <a:solidFill>
-                  <a:srgbClr val="1C3144"/>
-                </a:solidFill>
-                <a:latin typeface="Calibri"/>
-                <a:ea typeface="Calibri"/>
-                <a:cs typeface="Calibri"/>
-              </a:defRPr>
-            </a:lvl1pPr>
-            <a:lvl2pPr>
-              <a:defRPr sz="2250" b="0">
-                <a:solidFill>
-                  <a:srgbClr val="1C3144"/>
-                </a:solidFill>
-                <a:latin typeface="Calibri"/>
-                <a:ea typeface="Calibri"/>
-                <a:cs typeface="Calibri"/>
-              </a:defRPr>
-            </a:lvl2pPr>
-            <a:lvl3pPr>
-              <a:defRPr sz="2250" b="0">
-                <a:solidFill>
-                  <a:srgbClr val="1C3144"/>
-                </a:solidFill>
-                <a:latin typeface="Calibri"/>
-                <a:ea typeface="Calibri"/>
-                <a:cs typeface="Calibri"/>
-              </a:defRPr>
-            </a:lvl3pPr>
-            <a:lvl4pPr>
-              <a:defRPr sz="2250" b="0">
-                <a:solidFill>
-                  <a:srgbClr val="1C3144"/>
-                </a:solidFill>
-                <a:latin typeface="Calibri"/>
-                <a:ea typeface="Calibri"/>
-                <a:cs typeface="Calibri"/>
-              </a:defRPr>
-            </a:lvl4pPr>
-            <a:lvl5pPr>
-              <a:defRPr sz="2250" b="0">
-                <a:solidFill>
-                  <a:srgbClr val="1C3144"/>
-                </a:solidFill>
-                <a:latin typeface="Calibri"/>
-                <a:ea typeface="Calibri"/>
-                <a:cs typeface="Calibri"/>
-              </a:defRPr>
-            </a:lvl5pPr>
-            <a:lvl6pPr>
-              <a:defRPr sz="2250" b="0">
-                <a:solidFill>
-                  <a:srgbClr val="1C3144"/>
-                </a:solidFill>
-                <a:latin typeface="Calibri"/>
-                <a:ea typeface="Calibri"/>
-                <a:cs typeface="Calibri"/>
-              </a:defRPr>
-            </a:lvl6pPr>
-            <a:lvl7pPr>
-              <a:defRPr sz="2250" b="0">
-                <a:solidFill>
-                  <a:srgbClr val="1C3144"/>
-                </a:solidFill>
-                <a:latin typeface="Calibri"/>
-                <a:ea typeface="Calibri"/>
-                <a:cs typeface="Calibri"/>
-              </a:defRPr>
-            </a:lvl7pPr>
-            <a:lvl8pPr>
-              <a:defRPr sz="2250" b="0">
-                <a:solidFill>
-                  <a:srgbClr val="1C3144"/>
-                </a:solidFill>
-                <a:latin typeface="Calibri"/>
-                <a:ea typeface="Calibri"/>
-                <a:cs typeface="Calibri"/>
-              </a:defRPr>
-            </a:lvl8pPr>
-            <a:lvl9pPr>
-              <a:defRPr sz="2250" b="0">
-                <a:solidFill>
-                  <a:srgbClr val="1C3144"/>
-                </a:solidFill>
-                <a:latin typeface="Calibri"/>
-                <a:ea typeface="Calibri"/>
-                <a:cs typeface="Calibri"/>
-              </a:defRPr>
-            </a:lvl9pPr>
-          </a:lstStyle>
-          <a:p xmlns:a="http://schemas.openxmlformats.org/drawingml/2006/main">
-            <a:pPr>
-              <a:defRPr sz="2250" b="0">
-                <a:solidFill>
-                  <a:srgbClr val="1C3144"/>
-                </a:solidFill>
-                <a:latin typeface="Calibri"/>
-                <a:ea typeface="Calibri"/>
-                <a:cs typeface="Calibri"/>
-              </a:defRPr>
-            </a:pPr>
-            <a:r>
-              <a:rPr sz="2250" b="0">
-                <a:solidFill>
-                  <a:srgbClr val="1C3144"/>
-                </a:solidFill>
-                <a:latin typeface="Calibri"/>
-                <a:ea typeface="Calibri"/>
-                <a:cs typeface="Calibri"/>
-              </a:rPr>
-              <a:t>Check the announced quiz closing time.</a:t>
-            </a:r>
-          </a:p>
-        </p:txBody>
-      </p:sp>
-      <p:pic>
-        <p:nvPicPr>
-          <p:cNvPr id="12" name="">
-            <a:extLst xmlns:a="http://schemas.openxmlformats.org/drawingml/2006/main">
-              <a:ext uri="{FF2B5EF4-FFF2-40B4-BE49-F238E27FC236}">
-                <a16:creationId xmlns:a16="http://schemas.microsoft.com/office/drawing/2014/main" id="{69AF8ABE-5D67-440C-B735-F1F1D117B97E}"/>
-              </a:ext>
-            </a:extLst>
-          </p:cNvPr>
-          <p:cNvPicPr>
-            <a:picLocks xmlns:a="http://schemas.openxmlformats.org/drawingml/2006/main" noChangeAspect="1"/>
-          </p:cNvPicPr>
-          <p:nvPr/>
-        </p:nvPicPr>
-        <p:blipFill>
-          <a:blip xmlns:r="http://schemas.openxmlformats.org/officeDocument/2006/relationships" xmlns:a="http://schemas.openxmlformats.org/drawingml/2006/main" r:embed="R37aff94988e54350"/>
-          <a:stretch xmlns:a="http://schemas.openxmlformats.org/drawingml/2006/main"/>
-        </p:blipFill>
-        <p:spPr>
-          <a:xfrm xmlns:a="http://schemas.openxmlformats.org/drawingml/2006/main">
-            <a:off x="9134475" y="2095500"/>
-            <a:ext cx="2190750" cy="2190750"/>
-          </a:xfrm>
-          <a:prstGeom xmlns:a="http://schemas.openxmlformats.org/drawingml/2006/main" prst="rect">
-            <a:avLst/>
-          </a:prstGeom>
-        </p:spPr>
-      </p:pic>
-      <p:sp>
-        <p:nvSpPr>
-          <p:cNvPr id="13" name="">
-            <a:extLst xmlns:a="http://schemas.openxmlformats.org/drawingml/2006/main">
-              <a:ext uri="{FF2B5EF4-FFF2-40B4-BE49-F238E27FC236}">
-                <a16:creationId xmlns:a16="http://schemas.microsoft.com/office/drawing/2014/main" id="{366335CB-089C-4A75-BD35-0F3907F26DA0}"/>
-              </a:ext>
-            </a:extLst>
-          </p:cNvPr>
-          <p:cNvSpPr>
-            <a:spLocks xmlns:a="http://schemas.openxmlformats.org/drawingml/2006/main" noGrp="1"/>
-          </p:cNvSpPr>
-          <p:nvPr/>
-        </p:nvSpPr>
-        <p:spPr>
-          <a:xfrm xmlns:a="http://schemas.openxmlformats.org/drawingml/2006/main">
-            <a:off x="9239250" y="4400550"/>
-            <a:ext cx="2190750" cy="381000"/>
-          </a:xfrm>
-          <a:prstGeom xmlns:a="http://schemas.openxmlformats.org/drawingml/2006/main" prst="rect">
-            <a:avLst/>
-          </a:prstGeom>
-          <a:noFill xmlns:a="http://schemas.openxmlformats.org/drawingml/2006/main"/>
-          <a:ln xmlns:a="http://schemas.openxmlformats.org/drawingml/2006/main" w="0">
-            <a:noFill/>
-          </a:ln>
-        </p:spPr>
-        <p:txBody>
-          <a:bodyPr xmlns:a="http://schemas.openxmlformats.org/drawingml/2006/main">
-            <a:noAutofit/>
-          </a:bodyPr>
-          <a:lstStyle xmlns:a="http://schemas.openxmlformats.org/drawingml/2006/main">
-            <a:defPPr>
-              <a:defRPr sz="2100" b="1">
-                <a:solidFill>
-                  <a:srgbClr val="E4572E"/>
-                </a:solidFill>
-                <a:latin typeface="Calibri"/>
-                <a:ea typeface="Calibri"/>
-                <a:cs typeface="Calibri"/>
-              </a:defRPr>
-            </a:defPPr>
-            <a:lvl1pPr>
-              <a:defRPr sz="2100" b="1">
-                <a:solidFill>
-                  <a:srgbClr val="E4572E"/>
-                </a:solidFill>
-                <a:latin typeface="Calibri"/>
-                <a:ea typeface="Calibri"/>
-                <a:cs typeface="Calibri"/>
-              </a:defRPr>
-            </a:lvl1pPr>
-            <a:lvl2pPr>
-              <a:defRPr sz="2100" b="1">
-                <a:solidFill>
-                  <a:srgbClr val="E4572E"/>
-                </a:solidFill>
-                <a:latin typeface="Calibri"/>
-                <a:ea typeface="Calibri"/>
-                <a:cs typeface="Calibri"/>
-              </a:defRPr>
-            </a:lvl2pPr>
-            <a:lvl3pPr>
-              <a:defRPr sz="2100" b="1">
-                <a:solidFill>
-                  <a:srgbClr val="E4572E"/>
-                </a:solidFill>
-                <a:latin typeface="Calibri"/>
-                <a:ea typeface="Calibri"/>
-                <a:cs typeface="Calibri"/>
-              </a:defRPr>
-            </a:lvl3pPr>
-            <a:lvl4pPr>
-              <a:defRPr sz="2100" b="1">
-                <a:solidFill>
-                  <a:srgbClr val="E4572E"/>
-                </a:solidFill>
-                <a:latin typeface="Calibri"/>
-                <a:ea typeface="Calibri"/>
-                <a:cs typeface="Calibri"/>
-              </a:defRPr>
-            </a:lvl4pPr>
-            <a:lvl5pPr>
-              <a:defRPr sz="2100" b="1">
-                <a:solidFill>
-                  <a:srgbClr val="E4572E"/>
-                </a:solidFill>
-                <a:latin typeface="Calibri"/>
-                <a:ea typeface="Calibri"/>
-                <a:cs typeface="Calibri"/>
-              </a:defRPr>
-            </a:lvl5pPr>
-            <a:lvl6pPr>
-              <a:defRPr sz="2100" b="1">
-                <a:solidFill>
-                  <a:srgbClr val="E4572E"/>
-                </a:solidFill>
-                <a:latin typeface="Calibri"/>
-                <a:ea typeface="Calibri"/>
-                <a:cs typeface="Calibri"/>
-              </a:defRPr>
-            </a:lvl6pPr>
-            <a:lvl7pPr>
-              <a:defRPr sz="2100" b="1">
-                <a:solidFill>
-                  <a:srgbClr val="E4572E"/>
-                </a:solidFill>
-                <a:latin typeface="Calibri"/>
-                <a:ea typeface="Calibri"/>
-                <a:cs typeface="Calibri"/>
-              </a:defRPr>
-            </a:lvl7pPr>
-            <a:lvl8pPr>
-              <a:defRPr sz="2100" b="1">
-                <a:solidFill>
-                  <a:srgbClr val="E4572E"/>
-                </a:solidFill>
-                <a:latin typeface="Calibri"/>
-                <a:ea typeface="Calibri"/>
-                <a:cs typeface="Calibri"/>
-              </a:defRPr>
-            </a:lvl8pPr>
-            <a:lvl9pPr>
-              <a:defRPr sz="2100" b="1">
-                <a:solidFill>
-                  <a:srgbClr val="E4572E"/>
-                </a:solidFill>
-                <a:latin typeface="Calibri"/>
-                <a:ea typeface="Calibri"/>
-                <a:cs typeface="Calibri"/>
-              </a:defRPr>
-            </a:lvl9pPr>
-          </a:lstStyle>
-          <a:p xmlns:a="http://schemas.openxmlformats.org/drawingml/2006/main">
-            <a:pPr>
-              <a:defRPr sz="2100" b="1">
-                <a:solidFill>
-                  <a:srgbClr val="E4572E"/>
-                </a:solidFill>
-                <a:latin typeface="Calibri"/>
-                <a:ea typeface="Calibri"/>
-                <a:cs typeface="Calibri"/>
-              </a:defRPr>
-            </a:pPr>
-            <a:r>
-              <a:rPr sz="2100" b="1">
-                <a:solidFill>
-                  <a:srgbClr val="E4572E"/>
-                </a:solidFill>
-                <a:latin typeface="Calibri"/>
-                <a:ea typeface="Calibri"/>
-                <a:cs typeface="Calibri"/>
-              </a:rPr>
-              <a:t>24 HOURS</a:t>
-            </a:r>
-          </a:p>
-        </p:txBody>
-      </p:sp>
-      <p:sp>
-        <p:nvSpPr>
-          <p:cNvPr id="14" name="">
-            <a:extLst xmlns:a="http://schemas.openxmlformats.org/drawingml/2006/main">
-              <a:ext uri="{FF2B5EF4-FFF2-40B4-BE49-F238E27FC236}">
-                <a16:creationId xmlns:a16="http://schemas.microsoft.com/office/drawing/2014/main" id="{E2FEFC9B-8A86-4CBB-B434-0E9C13E17313}"/>
-              </a:ext>
-            </a:extLst>
-          </p:cNvPr>
-          <p:cNvSpPr>
-            <a:spLocks xmlns:a="http://schemas.openxmlformats.org/drawingml/2006/main" noGrp="1"/>
-          </p:cNvSpPr>
-          <p:nvPr/>
-        </p:nvSpPr>
-        <p:spPr>
-          <a:xfrm xmlns:a="http://schemas.openxmlformats.org/drawingml/2006/main">
-            <a:off x="590550" y="5143500"/>
-            <a:ext cx="11010900" cy="657225"/>
-          </a:xfrm>
-          <a:prstGeom xmlns:a="http://schemas.openxmlformats.org/drawingml/2006/main" prst="rect">
-            <a:avLst/>
-          </a:prstGeom>
-          <a:solidFill xmlns:a="http://schemas.openxmlformats.org/drawingml/2006/main">
-            <a:srgbClr val="E5F1EE"/>
-          </a:solidFill>
-          <a:ln xmlns:a="http://schemas.openxmlformats.org/drawingml/2006/main" w="0">
-            <a:noFill/>
-          </a:ln>
-        </p:spPr>
-        <p:txBody xmlns:a="http://schemas.openxmlformats.org/drawingml/2006/main">
-          <a:bodyPr/>
-          <a:p/>
-        </p:txBody>
-      </p:sp>
-      <p:sp>
-        <p:nvSpPr>
-          <p:cNvPr id="15" name="">
-            <a:extLst xmlns:a="http://schemas.openxmlformats.org/drawingml/2006/main">
-              <a:ext uri="{FF2B5EF4-FFF2-40B4-BE49-F238E27FC236}">
-                <a16:creationId xmlns:a16="http://schemas.microsoft.com/office/drawing/2014/main" id="{8DEED411-581C-48C5-863F-FC4D420BAD0B}"/>
-              </a:ext>
-            </a:extLst>
-          </p:cNvPr>
-          <p:cNvSpPr>
-            <a:spLocks xmlns:a="http://schemas.openxmlformats.org/drawingml/2006/main" noGrp="1"/>
-          </p:cNvSpPr>
-          <p:nvPr/>
-        </p:nvSpPr>
-        <p:spPr>
-          <a:xfrm xmlns:a="http://schemas.openxmlformats.org/drawingml/2006/main">
-            <a:off x="800100" y="5267325"/>
-            <a:ext cx="10572750" cy="457200"/>
-          </a:xfrm>
-          <a:prstGeom xmlns:a="http://schemas.openxmlformats.org/drawingml/2006/main" prst="rect">
-            <a:avLst/>
-          </a:prstGeom>
-          <a:noFill xmlns:a="http://schemas.openxmlformats.org/drawingml/2006/main"/>
-          <a:ln xmlns:a="http://schemas.openxmlformats.org/drawingml/2006/main" w="0">
-            <a:noFill/>
-          </a:ln>
-        </p:spPr>
-        <p:txBody>
-          <a:bodyPr xmlns:a="http://schemas.openxmlformats.org/drawingml/2006/main">
-            <a:noAutofit/>
-          </a:bodyPr>
-          <a:lstStyle xmlns:a="http://schemas.openxmlformats.org/drawingml/2006/main">
-            <a:defPPr>
-              <a:defRPr sz="2250" b="1">
-                <a:solidFill>
-                  <a:srgbClr val="2E7D6F"/>
-                </a:solidFill>
-                <a:latin typeface="Calibri"/>
-                <a:ea typeface="Calibri"/>
-                <a:cs typeface="Calibri"/>
-              </a:defRPr>
-            </a:defPPr>
-            <a:lvl1pPr>
-              <a:defRPr sz="2250" b="1">
-                <a:solidFill>
-                  <a:srgbClr val="2E7D6F"/>
-                </a:solidFill>
-                <a:latin typeface="Calibri"/>
-                <a:ea typeface="Calibri"/>
-                <a:cs typeface="Calibri"/>
-              </a:defRPr>
-            </a:lvl1pPr>
-            <a:lvl2pPr>
-              <a:defRPr sz="2250" b="1">
-                <a:solidFill>
-                  <a:srgbClr val="2E7D6F"/>
-                </a:solidFill>
-                <a:latin typeface="Calibri"/>
-                <a:ea typeface="Calibri"/>
-                <a:cs typeface="Calibri"/>
-              </a:defRPr>
-            </a:lvl2pPr>
-            <a:lvl3pPr>
-              <a:defRPr sz="2250" b="1">
-                <a:solidFill>
-                  <a:srgbClr val="2E7D6F"/>
-                </a:solidFill>
-                <a:latin typeface="Calibri"/>
-                <a:ea typeface="Calibri"/>
-                <a:cs typeface="Calibri"/>
-              </a:defRPr>
-            </a:lvl3pPr>
-            <a:lvl4pPr>
-              <a:defRPr sz="2250" b="1">
-                <a:solidFill>
-                  <a:srgbClr val="2E7D6F"/>
-                </a:solidFill>
-                <a:latin typeface="Calibri"/>
-                <a:ea typeface="Calibri"/>
-                <a:cs typeface="Calibri"/>
-              </a:defRPr>
-            </a:lvl4pPr>
-            <a:lvl5pPr>
-              <a:defRPr sz="2250" b="1">
-                <a:solidFill>
-                  <a:srgbClr val="2E7D6F"/>
-                </a:solidFill>
-                <a:latin typeface="Calibri"/>
-                <a:ea typeface="Calibri"/>
-                <a:cs typeface="Calibri"/>
-              </a:defRPr>
-            </a:lvl5pPr>
-            <a:lvl6pPr>
-              <a:defRPr sz="2250" b="1">
-                <a:solidFill>
-                  <a:srgbClr val="2E7D6F"/>
-                </a:solidFill>
-                <a:latin typeface="Calibri"/>
-                <a:ea typeface="Calibri"/>
-                <a:cs typeface="Calibri"/>
-              </a:defRPr>
-            </a:lvl6pPr>
-            <a:lvl7pPr>
-              <a:defRPr sz="2250" b="1">
-                <a:solidFill>
-                  <a:srgbClr val="2E7D6F"/>
-                </a:solidFill>
-                <a:latin typeface="Calibri"/>
-                <a:ea typeface="Calibri"/>
-                <a:cs typeface="Calibri"/>
-              </a:defRPr>
-            </a:lvl7pPr>
-            <a:lvl8pPr>
-              <a:defRPr sz="2250" b="1">
-                <a:solidFill>
-                  <a:srgbClr val="2E7D6F"/>
-                </a:solidFill>
-                <a:latin typeface="Calibri"/>
-                <a:ea typeface="Calibri"/>
-                <a:cs typeface="Calibri"/>
-              </a:defRPr>
-            </a:lvl8pPr>
-            <a:lvl9pPr>
-              <a:defRPr sz="2250" b="1">
-                <a:solidFill>
-                  <a:srgbClr val="2E7D6F"/>
-                </a:solidFill>
-                <a:latin typeface="Calibri"/>
-                <a:ea typeface="Calibri"/>
-                <a:cs typeface="Calibri"/>
-              </a:defRPr>
-            </a:lvl9pPr>
-          </a:lstStyle>
-          <a:p xmlns:a="http://schemas.openxmlformats.org/drawingml/2006/main">
-            <a:pPr>
-              <a:defRPr sz="2250" b="1">
-                <a:solidFill>
-                  <a:srgbClr val="2E7D6F"/>
-                </a:solidFill>
-                <a:latin typeface="Calibri"/>
-                <a:ea typeface="Calibri"/>
-                <a:cs typeface="Calibri"/>
-              </a:defRPr>
-            </a:pPr>
-            <a:r>
-              <a:rPr sz="2250" b="1">
-                <a:solidFill>
-                  <a:srgbClr val="2E7D6F"/>
-                </a:solidFill>
-                <a:latin typeface="Calibri"/>
-                <a:ea typeface="Calibri"/>
-                <a:cs typeface="Calibri"/>
-                <a:hlinkClick xmlns:r="http://schemas.openxmlformats.org/officeDocument/2006/relationships" r:id="R7cc15a2984604de8"/>
-              </a:rPr>
-              <a:t>Open this week’s quiz</a:t>
-            </a:r>
-          </a:p>
-        </p:txBody>
-      </p:sp>
-      <p:sp>
-        <p:nvSpPr>
-          <p:cNvPr id="16" name="">
-            <a:extLst xmlns:a="http://schemas.openxmlformats.org/drawingml/2006/main">
-              <a:ext uri="{FF2B5EF4-FFF2-40B4-BE49-F238E27FC236}">
-                <a16:creationId xmlns:a16="http://schemas.microsoft.com/office/drawing/2014/main" id="{A15E4C57-3952-451F-B516-0DE2C38BE568}"/>
-              </a:ext>
-            </a:extLst>
-          </p:cNvPr>
-          <p:cNvSpPr>
-            <a:spLocks xmlns:a="http://schemas.openxmlformats.org/drawingml/2006/main" noGrp="1"/>
-          </p:cNvSpPr>
-          <p:nvPr/>
-        </p:nvSpPr>
-        <p:spPr>
-          <a:xfrm xmlns:a="http://schemas.openxmlformats.org/drawingml/2006/main">
-            <a:off x="685800" y="5972175"/>
-            <a:ext cx="10668000" cy="304800"/>
-          </a:xfrm>
-          <a:prstGeom xmlns:a="http://schemas.openxmlformats.org/drawingml/2006/main" prst="rect">
-            <a:avLst/>
-          </a:prstGeom>
-          <a:noFill xmlns:a="http://schemas.openxmlformats.org/drawingml/2006/main"/>
-          <a:ln xmlns:a="http://schemas.openxmlformats.org/drawingml/2006/main" w="0">
-            <a:noFill/>
-          </a:ln>
-        </p:spPr>
-        <p:txBody>
-          <a:bodyPr xmlns:a="http://schemas.openxmlformats.org/drawingml/2006/main">
-            <a:noAutofit/>
-          </a:bodyPr>
-          <a:lstStyle xmlns:a="http://schemas.openxmlformats.org/drawingml/2006/main">
-            <a:defPPr>
-              <a:defRPr sz="1275" b="0">
-                <a:solidFill>
-                  <a:srgbClr val="6B7A8A"/>
-                </a:solidFill>
-                <a:latin typeface="Calibri"/>
-                <a:ea typeface="Calibri"/>
-                <a:cs typeface="Calibri"/>
-              </a:defRPr>
-            </a:defPPr>
-            <a:lvl1pPr>
-              <a:defRPr sz="1275" b="0">
-                <a:solidFill>
-                  <a:srgbClr val="6B7A8A"/>
-                </a:solidFill>
-                <a:latin typeface="Calibri"/>
-                <a:ea typeface="Calibri"/>
-                <a:cs typeface="Calibri"/>
-              </a:defRPr>
-            </a:lvl1pPr>
-            <a:lvl2pPr>
-              <a:defRPr sz="1275" b="0">
-                <a:solidFill>
-                  <a:srgbClr val="6B7A8A"/>
-                </a:solidFill>
-                <a:latin typeface="Calibri"/>
-                <a:ea typeface="Calibri"/>
-                <a:cs typeface="Calibri"/>
-              </a:defRPr>
-            </a:lvl2pPr>
-            <a:lvl3pPr>
-              <a:defRPr sz="1275" b="0">
-                <a:solidFill>
-                  <a:srgbClr val="6B7A8A"/>
-                </a:solidFill>
-                <a:latin typeface="Calibri"/>
-                <a:ea typeface="Calibri"/>
-                <a:cs typeface="Calibri"/>
-              </a:defRPr>
-            </a:lvl3pPr>
-            <a:lvl4pPr>
-              <a:defRPr sz="1275" b="0">
-                <a:solidFill>
-                  <a:srgbClr val="6B7A8A"/>
-                </a:solidFill>
-                <a:latin typeface="Calibri"/>
-                <a:ea typeface="Calibri"/>
-                <a:cs typeface="Calibri"/>
-              </a:defRPr>
-            </a:lvl4pPr>
-            <a:lvl5pPr>
-              <a:defRPr sz="1275" b="0">
-                <a:solidFill>
-                  <a:srgbClr val="6B7A8A"/>
-                </a:solidFill>
-                <a:latin typeface="Calibri"/>
-                <a:ea typeface="Calibri"/>
-                <a:cs typeface="Calibri"/>
-              </a:defRPr>
-            </a:lvl5pPr>
-            <a:lvl6pPr>
-              <a:defRPr sz="1275" b="0">
-                <a:solidFill>
-                  <a:srgbClr val="6B7A8A"/>
-                </a:solidFill>
-                <a:latin typeface="Calibri"/>
-                <a:ea typeface="Calibri"/>
-                <a:cs typeface="Calibri"/>
-              </a:defRPr>
-            </a:lvl6pPr>
-            <a:lvl7pPr>
-              <a:defRPr sz="1275" b="0">
-                <a:solidFill>
-                  <a:srgbClr val="6B7A8A"/>
-                </a:solidFill>
-                <a:latin typeface="Calibri"/>
-                <a:ea typeface="Calibri"/>
-                <a:cs typeface="Calibri"/>
-              </a:defRPr>
-            </a:lvl7pPr>
-            <a:lvl8pPr>
-              <a:defRPr sz="1275" b="0">
-                <a:solidFill>
-                  <a:srgbClr val="6B7A8A"/>
-                </a:solidFill>
-                <a:latin typeface="Calibri"/>
-                <a:ea typeface="Calibri"/>
-                <a:cs typeface="Calibri"/>
-              </a:defRPr>
-            </a:lvl8pPr>
-            <a:lvl9pPr>
-              <a:defRPr sz="1275" b="0">
-                <a:solidFill>
-                  <a:srgbClr val="6B7A8A"/>
-                </a:solidFill>
-                <a:latin typeface="Calibri"/>
-                <a:ea typeface="Calibri"/>
-                <a:cs typeface="Calibri"/>
-              </a:defRPr>
-            </a:lvl9pPr>
-          </a:lstStyle>
-          <a:p xmlns:a="http://schemas.openxmlformats.org/drawingml/2006/main">
-            <a:pPr>
-              <a:defRPr sz="1275" b="0">
-                <a:solidFill>
-                  <a:srgbClr val="6B7A8A"/>
-                </a:solidFill>
-                <a:latin typeface="Calibri"/>
-                <a:ea typeface="Calibri"/>
-                <a:cs typeface="Calibri"/>
-              </a:defRPr>
-            </a:pPr>
-            <a:r>
-              <a:rPr sz="1275" b="0">
-                <a:solidFill>
-                  <a:srgbClr val="6B7A8A"/>
-                </a:solidFill>
-                <a:latin typeface="Calibri"/>
-                <a:ea typeface="Calibri"/>
-                <a:cs typeface="Calibri"/>
-              </a:rPr>
-              <a:t>https://forms.gle/32Y9ttL1XWaqbGMNA</a:t>
-            </a:r>
-          </a:p>
-        </p:txBody>
-      </p:sp>
-      <p:sp>
-        <p:nvSpPr>
-          <p:cNvPr id="17" name="">
-            <a:extLst xmlns:a="http://schemas.openxmlformats.org/drawingml/2006/main">
-              <a:ext uri="{FF2B5EF4-FFF2-40B4-BE49-F238E27FC236}">
-                <a16:creationId xmlns:a16="http://schemas.microsoft.com/office/drawing/2014/main" id="{8700F934-26F7-4C17-B07E-713F05D87F23}"/>
+                <a16:creationId xmlns:a16="http://schemas.microsoft.com/office/drawing/2014/main" id="{0D9E57B8-8DAB-4AA0-B6BB-8920C6DB3C35}"/>
               </a:ext>
             </a:extLst>
           </p:cNvPr>
@@ -41529,7 +38290,7 @@
             <a:defPPr>
               <a:defRPr sz="1200" b="0">
                 <a:solidFill>
-                  <a:srgbClr val="6B7A8A"/>
+                  <a:srgbClr val="BBCDD9"/>
                 </a:solidFill>
                 <a:latin typeface="Calibri"/>
                 <a:ea typeface="Calibri"/>
@@ -41539,7 +38300,7 @@
             <a:lvl1pPr>
               <a:defRPr sz="1200" b="0">
                 <a:solidFill>
-                  <a:srgbClr val="6B7A8A"/>
+                  <a:srgbClr val="BBCDD9"/>
                 </a:solidFill>
                 <a:latin typeface="Calibri"/>
                 <a:ea typeface="Calibri"/>
@@ -41549,7 +38310,7 @@
             <a:lvl2pPr>
               <a:defRPr sz="1200" b="0">
                 <a:solidFill>
-                  <a:srgbClr val="6B7A8A"/>
+                  <a:srgbClr val="BBCDD9"/>
                 </a:solidFill>
                 <a:latin typeface="Calibri"/>
                 <a:ea typeface="Calibri"/>
@@ -41559,7 +38320,7 @@
             <a:lvl3pPr>
               <a:defRPr sz="1200" b="0">
                 <a:solidFill>
-                  <a:srgbClr val="6B7A8A"/>
+                  <a:srgbClr val="BBCDD9"/>
                 </a:solidFill>
                 <a:latin typeface="Calibri"/>
                 <a:ea typeface="Calibri"/>
@@ -41569,7 +38330,7 @@
             <a:lvl4pPr>
               <a:defRPr sz="1200" b="0">
                 <a:solidFill>
-                  <a:srgbClr val="6B7A8A"/>
+                  <a:srgbClr val="BBCDD9"/>
                 </a:solidFill>
                 <a:latin typeface="Calibri"/>
                 <a:ea typeface="Calibri"/>
@@ -41579,7 +38340,7 @@
             <a:lvl5pPr>
               <a:defRPr sz="1200" b="0">
                 <a:solidFill>
-                  <a:srgbClr val="6B7A8A"/>
+                  <a:srgbClr val="BBCDD9"/>
                 </a:solidFill>
                 <a:latin typeface="Calibri"/>
                 <a:ea typeface="Calibri"/>
@@ -41589,7 +38350,7 @@
             <a:lvl6pPr>
               <a:defRPr sz="1200" b="0">
                 <a:solidFill>
-                  <a:srgbClr val="6B7A8A"/>
+                  <a:srgbClr val="BBCDD9"/>
                 </a:solidFill>
                 <a:latin typeface="Calibri"/>
                 <a:ea typeface="Calibri"/>
@@ -41599,7 +38360,7 @@
             <a:lvl7pPr>
               <a:defRPr sz="1200" b="0">
                 <a:solidFill>
-                  <a:srgbClr val="6B7A8A"/>
+                  <a:srgbClr val="BBCDD9"/>
                 </a:solidFill>
                 <a:latin typeface="Calibri"/>
                 <a:ea typeface="Calibri"/>
@@ -41609,7 +38370,7 @@
             <a:lvl8pPr>
               <a:defRPr sz="1200" b="0">
                 <a:solidFill>
-                  <a:srgbClr val="6B7A8A"/>
+                  <a:srgbClr val="BBCDD9"/>
                 </a:solidFill>
                 <a:latin typeface="Calibri"/>
                 <a:ea typeface="Calibri"/>
@@ -41619,7 +38380,7 @@
             <a:lvl9pPr>
               <a:defRPr sz="1200" b="0">
                 <a:solidFill>
-                  <a:srgbClr val="6B7A8A"/>
+                  <a:srgbClr val="BBCDD9"/>
                 </a:solidFill>
                 <a:latin typeface="Calibri"/>
                 <a:ea typeface="Calibri"/>
@@ -41631,7 +38392,7 @@
             <a:pPr>
               <a:defRPr sz="1200" b="0">
                 <a:solidFill>
-                  <a:srgbClr val="6B7A8A"/>
+                  <a:srgbClr val="BBCDD9"/>
                 </a:solidFill>
                 <a:latin typeface="Calibri"/>
                 <a:ea typeface="Calibri"/>
@@ -41641,7 +38402,7 @@
             <a:r>
               <a:rPr sz="1200" b="0">
                 <a:solidFill>
-                  <a:srgbClr val="6B7A8A"/>
+                  <a:srgbClr val="BBCDD9"/>
                 </a:solidFill>
                 <a:latin typeface="Calibri"/>
                 <a:ea typeface="Calibri"/>
@@ -41655,7 +38416,7 @@
     </p:spTree>
     <p:extLst>
       <p:ext uri="{BB962C8B-B14F-4D97-AF65-F5344CB8AC3E}">
-        <p14:creationId xmlns:p14="http://schemas.microsoft.com/office/powerpoint/2010/main" val="589235089"/>
+        <p14:creationId xmlns:p14="http://schemas.microsoft.com/office/powerpoint/2010/main" val="1185571863"/>
       </p:ext>
     </p:extLst>
   </p:cSld>
@@ -42583,1011 +39344,6 @@
 </p:sld>
 </file>
 
-<file path=ppt/slides/slide40.xml><?xml version="1.0" encoding="utf-8"?>
-<p:sld xmlns:p="http://schemas.openxmlformats.org/presentationml/2006/main">
-  <p:cSld>
-    <p:bg>
-      <p:bgPr>
-        <a:solidFill xmlns:a="http://schemas.openxmlformats.org/drawingml/2006/main">
-          <a:srgbClr val="1C3144"/>
-        </a:solidFill>
-      </p:bgPr>
-    </p:bg>
-    <p:spTree>
-      <p:nvGrpSpPr>
-        <p:cNvPr id="1" name=""/>
-        <p:cNvGrpSpPr/>
-        <p:nvPr/>
-      </p:nvGrpSpPr>
-      <p:grpSpPr>
-        <a:xfrm xmlns:a="http://schemas.openxmlformats.org/drawingml/2006/main"/>
-      </p:grpSpPr>
-      <p:sp>
-        <p:nvSpPr>
-          <p:cNvPr id="7" name="">
-            <a:extLst xmlns:a="http://schemas.openxmlformats.org/drawingml/2006/main">
-              <a:ext uri="{FF2B5EF4-FFF2-40B4-BE49-F238E27FC236}">
-                <a16:creationId xmlns:a16="http://schemas.microsoft.com/office/drawing/2014/main" id="{85E91886-BEBC-4C8A-9B53-B20FF923A4E4}"/>
-              </a:ext>
-            </a:extLst>
-          </p:cNvPr>
-          <p:cNvSpPr>
-            <a:spLocks xmlns:a="http://schemas.openxmlformats.org/drawingml/2006/main" noGrp="1"/>
-          </p:cNvSpPr>
-          <p:nvPr/>
-        </p:nvSpPr>
-        <p:spPr>
-          <a:xfrm xmlns:a="http://schemas.openxmlformats.org/drawingml/2006/main">
-            <a:off x="590550" y="180975"/>
-            <a:ext cx="11049000" cy="285750"/>
-          </a:xfrm>
-          <a:prstGeom xmlns:a="http://schemas.openxmlformats.org/drawingml/2006/main" prst="rect">
-            <a:avLst/>
-          </a:prstGeom>
-          <a:noFill xmlns:a="http://schemas.openxmlformats.org/drawingml/2006/main"/>
-          <a:ln xmlns:a="http://schemas.openxmlformats.org/drawingml/2006/main" w="0">
-            <a:noFill/>
-          </a:ln>
-        </p:spPr>
-        <p:txBody>
-          <a:bodyPr xmlns:a="http://schemas.openxmlformats.org/drawingml/2006/main">
-            <a:noAutofit/>
-          </a:bodyPr>
-          <a:lstStyle xmlns:a="http://schemas.openxmlformats.org/drawingml/2006/main">
-            <a:defPPr>
-              <a:defRPr sz="1500" b="1">
-                <a:solidFill>
-                  <a:srgbClr val="E4572E"/>
-                </a:solidFill>
-                <a:latin typeface="Calibri"/>
-                <a:ea typeface="Calibri"/>
-                <a:cs typeface="Calibri"/>
-              </a:defRPr>
-            </a:defPPr>
-            <a:lvl1pPr>
-              <a:defRPr sz="1500" b="1">
-                <a:solidFill>
-                  <a:srgbClr val="E4572E"/>
-                </a:solidFill>
-                <a:latin typeface="Calibri"/>
-                <a:ea typeface="Calibri"/>
-                <a:cs typeface="Calibri"/>
-              </a:defRPr>
-            </a:lvl1pPr>
-            <a:lvl2pPr>
-              <a:defRPr sz="1500" b="1">
-                <a:solidFill>
-                  <a:srgbClr val="E4572E"/>
-                </a:solidFill>
-                <a:latin typeface="Calibri"/>
-                <a:ea typeface="Calibri"/>
-                <a:cs typeface="Calibri"/>
-              </a:defRPr>
-            </a:lvl2pPr>
-            <a:lvl3pPr>
-              <a:defRPr sz="1500" b="1">
-                <a:solidFill>
-                  <a:srgbClr val="E4572E"/>
-                </a:solidFill>
-                <a:latin typeface="Calibri"/>
-                <a:ea typeface="Calibri"/>
-                <a:cs typeface="Calibri"/>
-              </a:defRPr>
-            </a:lvl3pPr>
-            <a:lvl4pPr>
-              <a:defRPr sz="1500" b="1">
-                <a:solidFill>
-                  <a:srgbClr val="E4572E"/>
-                </a:solidFill>
-                <a:latin typeface="Calibri"/>
-                <a:ea typeface="Calibri"/>
-                <a:cs typeface="Calibri"/>
-              </a:defRPr>
-            </a:lvl4pPr>
-            <a:lvl5pPr>
-              <a:defRPr sz="1500" b="1">
-                <a:solidFill>
-                  <a:srgbClr val="E4572E"/>
-                </a:solidFill>
-                <a:latin typeface="Calibri"/>
-                <a:ea typeface="Calibri"/>
-                <a:cs typeface="Calibri"/>
-              </a:defRPr>
-            </a:lvl5pPr>
-            <a:lvl6pPr>
-              <a:defRPr sz="1500" b="1">
-                <a:solidFill>
-                  <a:srgbClr val="E4572E"/>
-                </a:solidFill>
-                <a:latin typeface="Calibri"/>
-                <a:ea typeface="Calibri"/>
-                <a:cs typeface="Calibri"/>
-              </a:defRPr>
-            </a:lvl6pPr>
-            <a:lvl7pPr>
-              <a:defRPr sz="1500" b="1">
-                <a:solidFill>
-                  <a:srgbClr val="E4572E"/>
-                </a:solidFill>
-                <a:latin typeface="Calibri"/>
-                <a:ea typeface="Calibri"/>
-                <a:cs typeface="Calibri"/>
-              </a:defRPr>
-            </a:lvl7pPr>
-            <a:lvl8pPr>
-              <a:defRPr sz="1500" b="1">
-                <a:solidFill>
-                  <a:srgbClr val="E4572E"/>
-                </a:solidFill>
-                <a:latin typeface="Calibri"/>
-                <a:ea typeface="Calibri"/>
-                <a:cs typeface="Calibri"/>
-              </a:defRPr>
-            </a:lvl8pPr>
-            <a:lvl9pPr>
-              <a:defRPr sz="1500" b="1">
-                <a:solidFill>
-                  <a:srgbClr val="E4572E"/>
-                </a:solidFill>
-                <a:latin typeface="Calibri"/>
-                <a:ea typeface="Calibri"/>
-                <a:cs typeface="Calibri"/>
-              </a:defRPr>
-            </a:lvl9pPr>
-          </a:lstStyle>
-          <a:p xmlns:a="http://schemas.openxmlformats.org/drawingml/2006/main">
-            <a:pPr>
-              <a:defRPr sz="1500" b="1">
-                <a:solidFill>
-                  <a:srgbClr val="E4572E"/>
-                </a:solidFill>
-                <a:latin typeface="Calibri"/>
-                <a:ea typeface="Calibri"/>
-                <a:cs typeface="Calibri"/>
-              </a:defRPr>
-            </a:pPr>
-            <a:r>
-              <a:rPr sz="1500" b="1">
-                <a:solidFill>
-                  <a:srgbClr val="E4572E"/>
-                </a:solidFill>
-                <a:latin typeface="Calibri"/>
-                <a:ea typeface="Calibri"/>
-                <a:cs typeface="Calibri"/>
-              </a:rPr>
-              <a:t>INDIVIDUAL EXIT CHECK</a:t>
-            </a:r>
-          </a:p>
-        </p:txBody>
-      </p:sp>
-      <p:sp>
-        <p:nvSpPr>
-          <p:cNvPr id="2" name="">
-            <a:extLst xmlns:a="http://schemas.openxmlformats.org/drawingml/2006/main">
-              <a:ext uri="{FF2B5EF4-FFF2-40B4-BE49-F238E27FC236}">
-                <a16:creationId xmlns:a16="http://schemas.microsoft.com/office/drawing/2014/main" id="{53150502-F7CE-4BC9-87C8-E200B3EF53E4}"/>
-              </a:ext>
-            </a:extLst>
-          </p:cNvPr>
-          <p:cNvSpPr>
-            <a:spLocks xmlns:a="http://schemas.openxmlformats.org/drawingml/2006/main" noGrp="1"/>
-          </p:cNvSpPr>
-          <p:nvPr/>
-        </p:nvSpPr>
-        <p:spPr>
-          <a:xfrm xmlns:a="http://schemas.openxmlformats.org/drawingml/2006/main">
-            <a:off x="590550" y="523875"/>
-            <a:ext cx="11049000" cy="809625"/>
-          </a:xfrm>
-          <a:prstGeom xmlns:a="http://schemas.openxmlformats.org/drawingml/2006/main" prst="rect">
-            <a:avLst/>
-          </a:prstGeom>
-          <a:noFill xmlns:a="http://schemas.openxmlformats.org/drawingml/2006/main"/>
-          <a:ln xmlns:a="http://schemas.openxmlformats.org/drawingml/2006/main" w="0">
-            <a:noFill/>
-          </a:ln>
-        </p:spPr>
-        <p:txBody>
-          <a:bodyPr xmlns:a="http://schemas.openxmlformats.org/drawingml/2006/main">
-            <a:noAutofit/>
-          </a:bodyPr>
-          <a:lstStyle xmlns:a="http://schemas.openxmlformats.org/drawingml/2006/main">
-            <a:defPPr>
-              <a:defRPr sz="3150" b="1">
-                <a:solidFill>
-                  <a:srgbClr val="FFFFFF"/>
-                </a:solidFill>
-                <a:latin typeface="Calibri"/>
-                <a:ea typeface="Calibri"/>
-                <a:cs typeface="Calibri"/>
-              </a:defRPr>
-            </a:defPPr>
-            <a:lvl1pPr>
-              <a:defRPr sz="3150" b="1">
-                <a:solidFill>
-                  <a:srgbClr val="FFFFFF"/>
-                </a:solidFill>
-                <a:latin typeface="Calibri"/>
-                <a:ea typeface="Calibri"/>
-                <a:cs typeface="Calibri"/>
-              </a:defRPr>
-            </a:lvl1pPr>
-            <a:lvl2pPr>
-              <a:defRPr sz="3150" b="1">
-                <a:solidFill>
-                  <a:srgbClr val="FFFFFF"/>
-                </a:solidFill>
-                <a:latin typeface="Calibri"/>
-                <a:ea typeface="Calibri"/>
-                <a:cs typeface="Calibri"/>
-              </a:defRPr>
-            </a:lvl2pPr>
-            <a:lvl3pPr>
-              <a:defRPr sz="3150" b="1">
-                <a:solidFill>
-                  <a:srgbClr val="FFFFFF"/>
-                </a:solidFill>
-                <a:latin typeface="Calibri"/>
-                <a:ea typeface="Calibri"/>
-                <a:cs typeface="Calibri"/>
-              </a:defRPr>
-            </a:lvl3pPr>
-            <a:lvl4pPr>
-              <a:defRPr sz="3150" b="1">
-                <a:solidFill>
-                  <a:srgbClr val="FFFFFF"/>
-                </a:solidFill>
-                <a:latin typeface="Calibri"/>
-                <a:ea typeface="Calibri"/>
-                <a:cs typeface="Calibri"/>
-              </a:defRPr>
-            </a:lvl4pPr>
-            <a:lvl5pPr>
-              <a:defRPr sz="3150" b="1">
-                <a:solidFill>
-                  <a:srgbClr val="FFFFFF"/>
-                </a:solidFill>
-                <a:latin typeface="Calibri"/>
-                <a:ea typeface="Calibri"/>
-                <a:cs typeface="Calibri"/>
-              </a:defRPr>
-            </a:lvl5pPr>
-            <a:lvl6pPr>
-              <a:defRPr sz="3150" b="1">
-                <a:solidFill>
-                  <a:srgbClr val="FFFFFF"/>
-                </a:solidFill>
-                <a:latin typeface="Calibri"/>
-                <a:ea typeface="Calibri"/>
-                <a:cs typeface="Calibri"/>
-              </a:defRPr>
-            </a:lvl6pPr>
-            <a:lvl7pPr>
-              <a:defRPr sz="3150" b="1">
-                <a:solidFill>
-                  <a:srgbClr val="FFFFFF"/>
-                </a:solidFill>
-                <a:latin typeface="Calibri"/>
-                <a:ea typeface="Calibri"/>
-                <a:cs typeface="Calibri"/>
-              </a:defRPr>
-            </a:lvl7pPr>
-            <a:lvl8pPr>
-              <a:defRPr sz="3150" b="1">
-                <a:solidFill>
-                  <a:srgbClr val="FFFFFF"/>
-                </a:solidFill>
-                <a:latin typeface="Calibri"/>
-                <a:ea typeface="Calibri"/>
-                <a:cs typeface="Calibri"/>
-              </a:defRPr>
-            </a:lvl8pPr>
-            <a:lvl9pPr>
-              <a:defRPr sz="3150" b="1">
-                <a:solidFill>
-                  <a:srgbClr val="FFFFFF"/>
-                </a:solidFill>
-                <a:latin typeface="Calibri"/>
-                <a:ea typeface="Calibri"/>
-                <a:cs typeface="Calibri"/>
-              </a:defRPr>
-            </a:lvl9pPr>
-          </a:lstStyle>
-          <a:p xmlns:a="http://schemas.openxmlformats.org/drawingml/2006/main">
-            <a:pPr>
-              <a:defRPr sz="3150" b="1">
-                <a:solidFill>
-                  <a:srgbClr val="FFFFFF"/>
-                </a:solidFill>
-                <a:latin typeface="Calibri"/>
-                <a:ea typeface="Calibri"/>
-                <a:cs typeface="Calibri"/>
-              </a:defRPr>
-            </a:pPr>
-            <a:r>
-              <a:rPr sz="3150" b="1">
-                <a:solidFill>
-                  <a:srgbClr val="FFFFFF"/>
-                </a:solidFill>
-                <a:latin typeface="Calibri"/>
-                <a:ea typeface="Calibri"/>
-                <a:cs typeface="Calibri"/>
-              </a:rPr>
-              <a:t>Revision and submission checklist</a:t>
-            </a:r>
-          </a:p>
-        </p:txBody>
-      </p:sp>
-      <p:sp>
-        <p:nvSpPr>
-          <p:cNvPr id="3" name="">
-            <a:extLst xmlns:a="http://schemas.openxmlformats.org/drawingml/2006/main">
-              <a:ext uri="{FF2B5EF4-FFF2-40B4-BE49-F238E27FC236}">
-                <a16:creationId xmlns:a16="http://schemas.microsoft.com/office/drawing/2014/main" id="{73ECFDAD-74BD-4B38-90FE-A9A16DD76CD8}"/>
-              </a:ext>
-            </a:extLst>
-          </p:cNvPr>
-          <p:cNvSpPr>
-            <a:spLocks xmlns:a="http://schemas.openxmlformats.org/drawingml/2006/main" noGrp="1"/>
-          </p:cNvSpPr>
-          <p:nvPr/>
-        </p:nvSpPr>
-        <p:spPr>
-          <a:xfrm xmlns:a="http://schemas.openxmlformats.org/drawingml/2006/main">
-            <a:off x="619125" y="1619250"/>
-            <a:ext cx="2857500" cy="495300"/>
-          </a:xfrm>
-          <a:prstGeom xmlns:a="http://schemas.openxmlformats.org/drawingml/2006/main" prst="rect">
-            <a:avLst/>
-          </a:prstGeom>
-          <a:noFill xmlns:a="http://schemas.openxmlformats.org/drawingml/2006/main"/>
-          <a:ln xmlns:a="http://schemas.openxmlformats.org/drawingml/2006/main" w="0">
-            <a:noFill/>
-          </a:ln>
-        </p:spPr>
-        <p:txBody>
-          <a:bodyPr xmlns:a="http://schemas.openxmlformats.org/drawingml/2006/main">
-            <a:noAutofit/>
-          </a:bodyPr>
-          <a:lstStyle xmlns:a="http://schemas.openxmlformats.org/drawingml/2006/main">
-            <a:defPPr>
-              <a:defRPr sz="1950" b="1">
-                <a:solidFill>
-                  <a:srgbClr val="E4572E"/>
-                </a:solidFill>
-                <a:latin typeface="Calibri"/>
-                <a:ea typeface="Calibri"/>
-                <a:cs typeface="Calibri"/>
-              </a:defRPr>
-            </a:defPPr>
-            <a:lvl1pPr>
-              <a:defRPr sz="1950" b="1">
-                <a:solidFill>
-                  <a:srgbClr val="E4572E"/>
-                </a:solidFill>
-                <a:latin typeface="Calibri"/>
-                <a:ea typeface="Calibri"/>
-                <a:cs typeface="Calibri"/>
-              </a:defRPr>
-            </a:lvl1pPr>
-            <a:lvl2pPr>
-              <a:defRPr sz="1950" b="1">
-                <a:solidFill>
-                  <a:srgbClr val="E4572E"/>
-                </a:solidFill>
-                <a:latin typeface="Calibri"/>
-                <a:ea typeface="Calibri"/>
-                <a:cs typeface="Calibri"/>
-              </a:defRPr>
-            </a:lvl2pPr>
-            <a:lvl3pPr>
-              <a:defRPr sz="1950" b="1">
-                <a:solidFill>
-                  <a:srgbClr val="E4572E"/>
-                </a:solidFill>
-                <a:latin typeface="Calibri"/>
-                <a:ea typeface="Calibri"/>
-                <a:cs typeface="Calibri"/>
-              </a:defRPr>
-            </a:lvl3pPr>
-            <a:lvl4pPr>
-              <a:defRPr sz="1950" b="1">
-                <a:solidFill>
-                  <a:srgbClr val="E4572E"/>
-                </a:solidFill>
-                <a:latin typeface="Calibri"/>
-                <a:ea typeface="Calibri"/>
-                <a:cs typeface="Calibri"/>
-              </a:defRPr>
-            </a:lvl4pPr>
-            <a:lvl5pPr>
-              <a:defRPr sz="1950" b="1">
-                <a:solidFill>
-                  <a:srgbClr val="E4572E"/>
-                </a:solidFill>
-                <a:latin typeface="Calibri"/>
-                <a:ea typeface="Calibri"/>
-                <a:cs typeface="Calibri"/>
-              </a:defRPr>
-            </a:lvl5pPr>
-            <a:lvl6pPr>
-              <a:defRPr sz="1950" b="1">
-                <a:solidFill>
-                  <a:srgbClr val="E4572E"/>
-                </a:solidFill>
-                <a:latin typeface="Calibri"/>
-                <a:ea typeface="Calibri"/>
-                <a:cs typeface="Calibri"/>
-              </a:defRPr>
-            </a:lvl6pPr>
-            <a:lvl7pPr>
-              <a:defRPr sz="1950" b="1">
-                <a:solidFill>
-                  <a:srgbClr val="E4572E"/>
-                </a:solidFill>
-                <a:latin typeface="Calibri"/>
-                <a:ea typeface="Calibri"/>
-                <a:cs typeface="Calibri"/>
-              </a:defRPr>
-            </a:lvl7pPr>
-            <a:lvl8pPr>
-              <a:defRPr sz="1950" b="1">
-                <a:solidFill>
-                  <a:srgbClr val="E4572E"/>
-                </a:solidFill>
-                <a:latin typeface="Calibri"/>
-                <a:ea typeface="Calibri"/>
-                <a:cs typeface="Calibri"/>
-              </a:defRPr>
-            </a:lvl8pPr>
-            <a:lvl9pPr>
-              <a:defRPr sz="1950" b="1">
-                <a:solidFill>
-                  <a:srgbClr val="E4572E"/>
-                </a:solidFill>
-                <a:latin typeface="Calibri"/>
-                <a:ea typeface="Calibri"/>
-                <a:cs typeface="Calibri"/>
-              </a:defRPr>
-            </a:lvl9pPr>
-          </a:lstStyle>
-          <a:p xmlns:a="http://schemas.openxmlformats.org/drawingml/2006/main">
-            <a:pPr>
-              <a:defRPr sz="1950" b="1">
-                <a:solidFill>
-                  <a:srgbClr val="E4572E"/>
-                </a:solidFill>
-                <a:latin typeface="Calibri"/>
-                <a:ea typeface="Calibri"/>
-                <a:cs typeface="Calibri"/>
-              </a:defRPr>
-            </a:pPr>
-            <a:r>
-              <a:rPr sz="1950" b="1">
-                <a:solidFill>
-                  <a:srgbClr val="E4572E"/>
-                </a:solidFill>
-                <a:latin typeface="Calibri"/>
-                <a:ea typeface="Calibri"/>
-                <a:cs typeface="Calibri"/>
-              </a:rPr>
-              <a:t>EXPLAIN IT</a:t>
-            </a:r>
-          </a:p>
-        </p:txBody>
-      </p:sp>
-      <p:sp>
-        <p:nvSpPr>
-          <p:cNvPr id="4" name="">
-            <a:extLst xmlns:a="http://schemas.openxmlformats.org/drawingml/2006/main">
-              <a:ext uri="{FF2B5EF4-FFF2-40B4-BE49-F238E27FC236}">
-                <a16:creationId xmlns:a16="http://schemas.microsoft.com/office/drawing/2014/main" id="{C893E17A-38D9-4956-BB86-9C6B8EDD7997}"/>
-              </a:ext>
-            </a:extLst>
-          </p:cNvPr>
-          <p:cNvSpPr>
-            <a:spLocks xmlns:a="http://schemas.openxmlformats.org/drawingml/2006/main" noGrp="1"/>
-          </p:cNvSpPr>
-          <p:nvPr/>
-        </p:nvSpPr>
-        <p:spPr>
-          <a:xfrm xmlns:a="http://schemas.openxmlformats.org/drawingml/2006/main">
-            <a:off x="619125" y="2295525"/>
-            <a:ext cx="10810875" cy="3095625"/>
-          </a:xfrm>
-          <a:prstGeom xmlns:a="http://schemas.openxmlformats.org/drawingml/2006/main" prst="rect">
-            <a:avLst/>
-          </a:prstGeom>
-          <a:noFill xmlns:a="http://schemas.openxmlformats.org/drawingml/2006/main"/>
-          <a:ln xmlns:a="http://schemas.openxmlformats.org/drawingml/2006/main" w="0">
-            <a:noFill/>
-          </a:ln>
-        </p:spPr>
-        <p:txBody>
-          <a:bodyPr xmlns:a="http://schemas.openxmlformats.org/drawingml/2006/main">
-            <a:noAutofit/>
-          </a:bodyPr>
-          <a:lstStyle xmlns:a="http://schemas.openxmlformats.org/drawingml/2006/main">
-            <a:defPPr>
-              <a:defRPr sz="2850" b="0">
-                <a:solidFill>
-                  <a:srgbClr val="FFFFFF"/>
-                </a:solidFill>
-                <a:latin typeface="Calibri"/>
-                <a:ea typeface="Calibri"/>
-                <a:cs typeface="Calibri"/>
-              </a:defRPr>
-            </a:defPPr>
-            <a:lvl1pPr>
-              <a:defRPr sz="2850" b="0">
-                <a:solidFill>
-                  <a:srgbClr val="FFFFFF"/>
-                </a:solidFill>
-                <a:latin typeface="Calibri"/>
-                <a:ea typeface="Calibri"/>
-                <a:cs typeface="Calibri"/>
-              </a:defRPr>
-            </a:lvl1pPr>
-            <a:lvl2pPr>
-              <a:defRPr sz="2850" b="0">
-                <a:solidFill>
-                  <a:srgbClr val="FFFFFF"/>
-                </a:solidFill>
-                <a:latin typeface="Calibri"/>
-                <a:ea typeface="Calibri"/>
-                <a:cs typeface="Calibri"/>
-              </a:defRPr>
-            </a:lvl2pPr>
-            <a:lvl3pPr>
-              <a:defRPr sz="2850" b="0">
-                <a:solidFill>
-                  <a:srgbClr val="FFFFFF"/>
-                </a:solidFill>
-                <a:latin typeface="Calibri"/>
-                <a:ea typeface="Calibri"/>
-                <a:cs typeface="Calibri"/>
-              </a:defRPr>
-            </a:lvl3pPr>
-            <a:lvl4pPr>
-              <a:defRPr sz="2850" b="0">
-                <a:solidFill>
-                  <a:srgbClr val="FFFFFF"/>
-                </a:solidFill>
-                <a:latin typeface="Calibri"/>
-                <a:ea typeface="Calibri"/>
-                <a:cs typeface="Calibri"/>
-              </a:defRPr>
-            </a:lvl4pPr>
-            <a:lvl5pPr>
-              <a:defRPr sz="2850" b="0">
-                <a:solidFill>
-                  <a:srgbClr val="FFFFFF"/>
-                </a:solidFill>
-                <a:latin typeface="Calibri"/>
-                <a:ea typeface="Calibri"/>
-                <a:cs typeface="Calibri"/>
-              </a:defRPr>
-            </a:lvl5pPr>
-            <a:lvl6pPr>
-              <a:defRPr sz="2850" b="0">
-                <a:solidFill>
-                  <a:srgbClr val="FFFFFF"/>
-                </a:solidFill>
-                <a:latin typeface="Calibri"/>
-                <a:ea typeface="Calibri"/>
-                <a:cs typeface="Calibri"/>
-              </a:defRPr>
-            </a:lvl6pPr>
-            <a:lvl7pPr>
-              <a:defRPr sz="2850" b="0">
-                <a:solidFill>
-                  <a:srgbClr val="FFFFFF"/>
-                </a:solidFill>
-                <a:latin typeface="Calibri"/>
-                <a:ea typeface="Calibri"/>
-                <a:cs typeface="Calibri"/>
-              </a:defRPr>
-            </a:lvl7pPr>
-            <a:lvl8pPr>
-              <a:defRPr sz="2850" b="0">
-                <a:solidFill>
-                  <a:srgbClr val="FFFFFF"/>
-                </a:solidFill>
-                <a:latin typeface="Calibri"/>
-                <a:ea typeface="Calibri"/>
-                <a:cs typeface="Calibri"/>
-              </a:defRPr>
-            </a:lvl8pPr>
-            <a:lvl9pPr>
-              <a:defRPr sz="2850" b="0">
-                <a:solidFill>
-                  <a:srgbClr val="FFFFFF"/>
-                </a:solidFill>
-                <a:latin typeface="Calibri"/>
-                <a:ea typeface="Calibri"/>
-                <a:cs typeface="Calibri"/>
-              </a:defRPr>
-            </a:lvl9pPr>
-          </a:lstStyle>
-          <a:p xmlns:a="http://schemas.openxmlformats.org/drawingml/2006/main">
-            <a:pPr>
-              <a:defRPr sz="2850" b="0">
-                <a:solidFill>
-                  <a:srgbClr val="FFFFFF"/>
-                </a:solidFill>
-                <a:latin typeface="Calibri"/>
-                <a:ea typeface="Calibri"/>
-                <a:cs typeface="Calibri"/>
-              </a:defRPr>
-            </a:pPr>
-            <a:r>
-              <a:rPr sz="2850" b="0">
-                <a:solidFill>
-                  <a:srgbClr val="FFFFFF"/>
-                </a:solidFill>
-                <a:latin typeface="Calibri"/>
-                <a:ea typeface="Calibri"/>
-                <a:cs typeface="Calibri"/>
-              </a:rPr>
-              <a:t>Explain to a classmate why load divided by 100 is a derived feature, how you would decide whether to keep a new feature, and why a repair note written after a fault cannot be an input.</a:t>
-            </a:r>
-          </a:p>
-          <a:p xmlns:a="http://schemas.openxmlformats.org/drawingml/2006/main">
-            <a:r>
-              <a:t/>
-            </a:r>
-          </a:p>
-          <a:p xmlns:a="http://schemas.openxmlformats.org/drawingml/2006/main">
-            <a:pPr>
-              <a:defRPr sz="2850" b="0">
-                <a:solidFill>
-                  <a:srgbClr val="FFFFFF"/>
-                </a:solidFill>
-                <a:latin typeface="Calibri"/>
-                <a:ea typeface="Calibri"/>
-                <a:cs typeface="Calibri"/>
-              </a:defRPr>
-            </a:pPr>
-            <a:r>
-              <a:rPr sz="2850" b="0">
-                <a:solidFill>
-                  <a:srgbClr val="FFFFFF"/>
-                </a:solidFill>
-                <a:latin typeface="Calibri"/>
-                <a:ea typeface="Calibri"/>
-                <a:cs typeface="Calibri"/>
-              </a:rPr>
-              <a:t>Keep raw data unchanged. Restart and run all cells before submitting the required assignment notebook.</a:t>
-            </a:r>
-          </a:p>
-        </p:txBody>
-      </p:sp>
-      <p:sp>
-        <p:nvSpPr>
-          <p:cNvPr id="5" name="">
-            <a:extLst xmlns:a="http://schemas.openxmlformats.org/drawingml/2006/main">
-              <a:ext uri="{FF2B5EF4-FFF2-40B4-BE49-F238E27FC236}">
-                <a16:creationId xmlns:a16="http://schemas.microsoft.com/office/drawing/2014/main" id="{6D87BB01-7580-4AF3-B91E-CCB3987A28CE}"/>
-              </a:ext>
-            </a:extLst>
-          </p:cNvPr>
-          <p:cNvSpPr>
-            <a:spLocks xmlns:a="http://schemas.openxmlformats.org/drawingml/2006/main" noGrp="1"/>
-          </p:cNvSpPr>
-          <p:nvPr/>
-        </p:nvSpPr>
-        <p:spPr>
-          <a:xfrm xmlns:a="http://schemas.openxmlformats.org/drawingml/2006/main">
-            <a:off x="619125" y="5791200"/>
-            <a:ext cx="10810875" cy="542925"/>
-          </a:xfrm>
-          <a:prstGeom xmlns:a="http://schemas.openxmlformats.org/drawingml/2006/main" prst="rect">
-            <a:avLst/>
-          </a:prstGeom>
-          <a:noFill xmlns:a="http://schemas.openxmlformats.org/drawingml/2006/main"/>
-          <a:ln xmlns:a="http://schemas.openxmlformats.org/drawingml/2006/main" w="0">
-            <a:noFill/>
-          </a:ln>
-        </p:spPr>
-        <p:txBody>
-          <a:bodyPr xmlns:a="http://schemas.openxmlformats.org/drawingml/2006/main">
-            <a:noAutofit/>
-          </a:bodyPr>
-          <a:lstStyle xmlns:a="http://schemas.openxmlformats.org/drawingml/2006/main">
-            <a:defPPr>
-              <a:defRPr sz="1800" b="0">
-                <a:solidFill>
-                  <a:srgbClr val="BBCDD9"/>
-                </a:solidFill>
-                <a:latin typeface="Calibri"/>
-                <a:ea typeface="Calibri"/>
-                <a:cs typeface="Calibri"/>
-              </a:defRPr>
-            </a:defPPr>
-            <a:lvl1pPr>
-              <a:defRPr sz="1800" b="0">
-                <a:solidFill>
-                  <a:srgbClr val="BBCDD9"/>
-                </a:solidFill>
-                <a:latin typeface="Calibri"/>
-                <a:ea typeface="Calibri"/>
-                <a:cs typeface="Calibri"/>
-              </a:defRPr>
-            </a:lvl1pPr>
-            <a:lvl2pPr>
-              <a:defRPr sz="1800" b="0">
-                <a:solidFill>
-                  <a:srgbClr val="BBCDD9"/>
-                </a:solidFill>
-                <a:latin typeface="Calibri"/>
-                <a:ea typeface="Calibri"/>
-                <a:cs typeface="Calibri"/>
-              </a:defRPr>
-            </a:lvl2pPr>
-            <a:lvl3pPr>
-              <a:defRPr sz="1800" b="0">
-                <a:solidFill>
-                  <a:srgbClr val="BBCDD9"/>
-                </a:solidFill>
-                <a:latin typeface="Calibri"/>
-                <a:ea typeface="Calibri"/>
-                <a:cs typeface="Calibri"/>
-              </a:defRPr>
-            </a:lvl3pPr>
-            <a:lvl4pPr>
-              <a:defRPr sz="1800" b="0">
-                <a:solidFill>
-                  <a:srgbClr val="BBCDD9"/>
-                </a:solidFill>
-                <a:latin typeface="Calibri"/>
-                <a:ea typeface="Calibri"/>
-                <a:cs typeface="Calibri"/>
-              </a:defRPr>
-            </a:lvl4pPr>
-            <a:lvl5pPr>
-              <a:defRPr sz="1800" b="0">
-                <a:solidFill>
-                  <a:srgbClr val="BBCDD9"/>
-                </a:solidFill>
-                <a:latin typeface="Calibri"/>
-                <a:ea typeface="Calibri"/>
-                <a:cs typeface="Calibri"/>
-              </a:defRPr>
-            </a:lvl5pPr>
-            <a:lvl6pPr>
-              <a:defRPr sz="1800" b="0">
-                <a:solidFill>
-                  <a:srgbClr val="BBCDD9"/>
-                </a:solidFill>
-                <a:latin typeface="Calibri"/>
-                <a:ea typeface="Calibri"/>
-                <a:cs typeface="Calibri"/>
-              </a:defRPr>
-            </a:lvl6pPr>
-            <a:lvl7pPr>
-              <a:defRPr sz="1800" b="0">
-                <a:solidFill>
-                  <a:srgbClr val="BBCDD9"/>
-                </a:solidFill>
-                <a:latin typeface="Calibri"/>
-                <a:ea typeface="Calibri"/>
-                <a:cs typeface="Calibri"/>
-              </a:defRPr>
-            </a:lvl7pPr>
-            <a:lvl8pPr>
-              <a:defRPr sz="1800" b="0">
-                <a:solidFill>
-                  <a:srgbClr val="BBCDD9"/>
-                </a:solidFill>
-                <a:latin typeface="Calibri"/>
-                <a:ea typeface="Calibri"/>
-                <a:cs typeface="Calibri"/>
-              </a:defRPr>
-            </a:lvl8pPr>
-            <a:lvl9pPr>
-              <a:defRPr sz="1800" b="0">
-                <a:solidFill>
-                  <a:srgbClr val="BBCDD9"/>
-                </a:solidFill>
-                <a:latin typeface="Calibri"/>
-                <a:ea typeface="Calibri"/>
-                <a:cs typeface="Calibri"/>
-              </a:defRPr>
-            </a:lvl9pPr>
-          </a:lstStyle>
-          <a:p xmlns:a="http://schemas.openxmlformats.org/drawingml/2006/main">
-            <a:pPr>
-              <a:defRPr sz="1800" b="0">
-                <a:solidFill>
-                  <a:srgbClr val="BBCDD9"/>
-                </a:solidFill>
-                <a:latin typeface="Calibri"/>
-                <a:ea typeface="Calibri"/>
-                <a:cs typeface="Calibri"/>
-              </a:defRPr>
-            </a:pPr>
-            <a:r>
-              <a:rPr sz="1800" b="0">
-                <a:solidFill>
-                  <a:srgbClr val="BBCDD9"/>
-                </a:solidFill>
-                <a:latin typeface="Calibri"/>
-                <a:ea typeface="Calibri"/>
-                <a:cs typeface="Calibri"/>
-              </a:rPr>
-              <a:t>Point to your evidence. Save your work.</a:t>
-            </a:r>
-          </a:p>
-        </p:txBody>
-      </p:sp>
-      <p:sp>
-        <p:nvSpPr>
-          <p:cNvPr id="6" name="">
-            <a:extLst xmlns:a="http://schemas.openxmlformats.org/drawingml/2006/main">
-              <a:ext uri="{FF2B5EF4-FFF2-40B4-BE49-F238E27FC236}">
-                <a16:creationId xmlns:a16="http://schemas.microsoft.com/office/drawing/2014/main" id="{0D9E57B8-8DAB-4AA0-B6BB-8920C6DB3C35}"/>
-              </a:ext>
-            </a:extLst>
-          </p:cNvPr>
-          <p:cNvSpPr>
-            <a:spLocks xmlns:a="http://schemas.openxmlformats.org/drawingml/2006/main" noGrp="1"/>
-          </p:cNvSpPr>
-          <p:nvPr/>
-        </p:nvSpPr>
-        <p:spPr>
-          <a:xfrm xmlns:a="http://schemas.openxmlformats.org/drawingml/2006/main">
-            <a:off x="590550" y="6524625"/>
-            <a:ext cx="10810875" cy="219075"/>
-          </a:xfrm>
-          <a:prstGeom xmlns:a="http://schemas.openxmlformats.org/drawingml/2006/main" prst="rect">
-            <a:avLst/>
-          </a:prstGeom>
-          <a:noFill xmlns:a="http://schemas.openxmlformats.org/drawingml/2006/main"/>
-          <a:ln xmlns:a="http://schemas.openxmlformats.org/drawingml/2006/main" w="0">
-            <a:noFill/>
-          </a:ln>
-        </p:spPr>
-        <p:txBody>
-          <a:bodyPr xmlns:a="http://schemas.openxmlformats.org/drawingml/2006/main">
-            <a:noAutofit/>
-          </a:bodyPr>
-          <a:lstStyle xmlns:a="http://schemas.openxmlformats.org/drawingml/2006/main">
-            <a:defPPr>
-              <a:defRPr sz="1200" b="0">
-                <a:solidFill>
-                  <a:srgbClr val="BBCDD9"/>
-                </a:solidFill>
-                <a:latin typeface="Calibri"/>
-                <a:ea typeface="Calibri"/>
-                <a:cs typeface="Calibri"/>
-              </a:defRPr>
-            </a:defPPr>
-            <a:lvl1pPr>
-              <a:defRPr sz="1200" b="0">
-                <a:solidFill>
-                  <a:srgbClr val="BBCDD9"/>
-                </a:solidFill>
-                <a:latin typeface="Calibri"/>
-                <a:ea typeface="Calibri"/>
-                <a:cs typeface="Calibri"/>
-              </a:defRPr>
-            </a:lvl1pPr>
-            <a:lvl2pPr>
-              <a:defRPr sz="1200" b="0">
-                <a:solidFill>
-                  <a:srgbClr val="BBCDD9"/>
-                </a:solidFill>
-                <a:latin typeface="Calibri"/>
-                <a:ea typeface="Calibri"/>
-                <a:cs typeface="Calibri"/>
-              </a:defRPr>
-            </a:lvl2pPr>
-            <a:lvl3pPr>
-              <a:defRPr sz="1200" b="0">
-                <a:solidFill>
-                  <a:srgbClr val="BBCDD9"/>
-                </a:solidFill>
-                <a:latin typeface="Calibri"/>
-                <a:ea typeface="Calibri"/>
-                <a:cs typeface="Calibri"/>
-              </a:defRPr>
-            </a:lvl3pPr>
-            <a:lvl4pPr>
-              <a:defRPr sz="1200" b="0">
-                <a:solidFill>
-                  <a:srgbClr val="BBCDD9"/>
-                </a:solidFill>
-                <a:latin typeface="Calibri"/>
-                <a:ea typeface="Calibri"/>
-                <a:cs typeface="Calibri"/>
-              </a:defRPr>
-            </a:lvl4pPr>
-            <a:lvl5pPr>
-              <a:defRPr sz="1200" b="0">
-                <a:solidFill>
-                  <a:srgbClr val="BBCDD9"/>
-                </a:solidFill>
-                <a:latin typeface="Calibri"/>
-                <a:ea typeface="Calibri"/>
-                <a:cs typeface="Calibri"/>
-              </a:defRPr>
-            </a:lvl5pPr>
-            <a:lvl6pPr>
-              <a:defRPr sz="1200" b="0">
-                <a:solidFill>
-                  <a:srgbClr val="BBCDD9"/>
-                </a:solidFill>
-                <a:latin typeface="Calibri"/>
-                <a:ea typeface="Calibri"/>
-                <a:cs typeface="Calibri"/>
-              </a:defRPr>
-            </a:lvl6pPr>
-            <a:lvl7pPr>
-              <a:defRPr sz="1200" b="0">
-                <a:solidFill>
-                  <a:srgbClr val="BBCDD9"/>
-                </a:solidFill>
-                <a:latin typeface="Calibri"/>
-                <a:ea typeface="Calibri"/>
-                <a:cs typeface="Calibri"/>
-              </a:defRPr>
-            </a:lvl7pPr>
-            <a:lvl8pPr>
-              <a:defRPr sz="1200" b="0">
-                <a:solidFill>
-                  <a:srgbClr val="BBCDD9"/>
-                </a:solidFill>
-                <a:latin typeface="Calibri"/>
-                <a:ea typeface="Calibri"/>
-                <a:cs typeface="Calibri"/>
-              </a:defRPr>
-            </a:lvl8pPr>
-            <a:lvl9pPr>
-              <a:defRPr sz="1200" b="0">
-                <a:solidFill>
-                  <a:srgbClr val="BBCDD9"/>
-                </a:solidFill>
-                <a:latin typeface="Calibri"/>
-                <a:ea typeface="Calibri"/>
-                <a:cs typeface="Calibri"/>
-              </a:defRPr>
-            </a:lvl9pPr>
-          </a:lstStyle>
-          <a:p xmlns:a="http://schemas.openxmlformats.org/drawingml/2006/main">
-            <a:pPr>
-              <a:defRPr sz="1200" b="0">
-                <a:solidFill>
-                  <a:srgbClr val="BBCDD9"/>
-                </a:solidFill>
-                <a:latin typeface="Calibri"/>
-                <a:ea typeface="Calibri"/>
-                <a:cs typeface="Calibri"/>
-              </a:defRPr>
-            </a:pPr>
-            <a:r>
-              <a:rPr sz="1200" b="0">
-                <a:solidFill>
-                  <a:srgbClr val="BBCDD9"/>
-                </a:solidFill>
-                <a:latin typeface="Calibri"/>
-                <a:ea typeface="Calibri"/>
-                <a:cs typeface="Calibri"/>
-              </a:rPr>
-              <a:t>CML3111   Week 11   40</a:t>
-            </a:r>
-          </a:p>
-        </p:txBody>
-      </p:sp>
-    </p:spTree>
-    <p:extLst>
-      <p:ext uri="{BB962C8B-B14F-4D97-AF65-F5344CB8AC3E}">
-        <p14:creationId xmlns:p14="http://schemas.microsoft.com/office/powerpoint/2010/main" val="1185571863"/>
-      </p:ext>
-    </p:extLst>
-  </p:cSld>
-</p:sld>
-</file>
-
 <file path=ppt/slides/slide5.xml><?xml version="1.0" encoding="utf-8"?>
 <p:sld xmlns:p="http://schemas.openxmlformats.org/presentationml/2006/main">
   <p:cSld>
@@ -46661,6 +42417,7 @@
           </a:p>
           <a:p xmlns:a="http://schemas.openxmlformats.org/drawingml/2006/main">
             <a:r>
+              <a:rPr/>
               <a:t/>
             </a:r>
           </a:p>
